--- a/docs/BOM_Matcher_v0.10_操作SOP.pptx
+++ b/docs/BOM_Matcher_v0.10_操作SOP.pptx
@@ -137,27 +137,27 @@
   <p:extLst>
     <p:ext uri="{521415D9-36F7-43E2-AB2F-B90AF26B5E84}">
       <p14:sectionLst xmlns:p14="http://schemas.microsoft.com/office/powerpoint/2010/main">
-        <p14:section name="封面" id="{e32aa9ac-2389-259e-b72d-04efa4780eac}">
+        <p14:section name="封面" id="{591c808a-aa30-887e-7774-ed9834297a40}">
           <p14:sldIdLst>
             <p14:sldId id="256"/>
             <p14:sldId id="257"/>
           </p14:sldIdLst>
         </p14:section>
-        <p14:section name="認識工具" id="{4970671b-30c6-44f2-7672-66cbba897606}">
+        <p14:section name="認識工具" id="{4f0c883c-30d0-c0a2-1cb9-f7405d6d3d1f}">
           <p14:sldIdLst>
             <p14:sldId id="258"/>
             <p14:sldId id="259"/>
             <p14:sldId id="260"/>
           </p14:sldIdLst>
         </p14:section>
-        <p14:section name="安裝" id="{742e0d99-4b52-e9be-b6b9-07b2a2337a18}">
+        <p14:section name="安裝" id="{84617215-b559-4e28-5a5f-bd4036841ece}">
           <p14:sldIdLst>
             <p14:sldId id="261"/>
             <p14:sldId id="262"/>
             <p14:sldId id="263"/>
           </p14:sldIdLst>
         </p14:section>
-        <p14:section name="C 案操作" id="{7776e35e-e149-09cb-68d9-36de13c95dff}">
+        <p14:section name="C 案操作" id="{8cba8d6f-86cd-81d2-d708-2e104f2cd01d}">
           <p14:sldIdLst>
             <p14:sldId id="264"/>
             <p14:sldId id="265"/>
@@ -166,7 +166,7 @@
             <p14:sldId id="268"/>
           </p14:sldIdLst>
         </p14:section>
-        <p14:section name="D 案操作" id="{16ebc216-df37-702c-d4b0-a15d117f722e}">
+        <p14:section name="D 案操作" id="{8b5a1cfc-6390-f009-5a46-ba52def630b1}">
           <p14:sldIdLst>
             <p14:sldId id="269"/>
             <p14:sldId id="270"/>
@@ -176,28 +176,28 @@
             <p14:sldId id="274"/>
           </p14:sldIdLst>
         </p14:section>
-        <p14:section name="雙面板" id="{60b1c454-6e6f-f311-50ba-5c82137fad63}">
+        <p14:section name="雙面板" id="{cf23f18f-639b-59d9-07bc-98132dfe1bd1}">
           <p14:sldIdLst>
             <p14:sldId id="275"/>
             <p14:sldId id="276"/>
             <p14:sldId id="277"/>
           </p14:sldIdLst>
         </p14:section>
-        <p14:section name="降壓選料" id="{6375dd90-6ead-bebf-922a-bac314ad8bfb}">
+        <p14:section name="降壓選料" id="{2b9a22c6-a95c-e0cb-deb1-b541a9cf9d5a}">
           <p14:sldIdLst>
             <p14:sldId id="278"/>
             <p14:sldId id="279"/>
             <p14:sldId id="280"/>
           </p14:sldIdLst>
         </p14:section>
-        <p14:section name="看懂輸出" id="{397b50ed-8806-0b3a-84cc-bde49a18afd9}">
+        <p14:section name="看懂輸出" id="{6b282f7a-ebf0-82ce-9c09-9a7948228737}">
           <p14:sldIdLst>
             <p14:sldId id="281"/>
             <p14:sldId id="282"/>
             <p14:sldId id="283"/>
           </p14:sldIdLst>
         </p14:section>
-        <p14:section name="疑難排解" id="{bf780caa-0f90-f787-44c6-801a54b1ce82}">
+        <p14:section name="疑難排解" id="{302e86ae-d588-d7ff-8bd8-064961e8b439}">
           <p14:sldIdLst>
             <p14:sldId id="284"/>
             <p14:sldId id="285"/>

--- a/docs/BOM_Matcher_v0.10_操作SOP.pptx
+++ b/docs/BOM_Matcher_v0.10_操作SOP.pptx
@@ -139,27 +139,27 @@
   <p:extLst>
     <p:ext uri="{521415D9-36F7-43E2-AB2F-B90AF26B5E84}">
       <p14:sectionLst xmlns:p14="http://schemas.microsoft.com/office/powerpoint/2010/main">
-        <p14:section name="封面" id="{4f4466f0-01f8-4f90-f5c6-0351e72cd6d2}">
+        <p14:section name="封面" id="{a697e8a3-070f-652c-eeb9-f3c1f0d1edb8}">
           <p14:sldIdLst>
             <p14:sldId id="256"/>
             <p14:sldId id="257"/>
           </p14:sldIdLst>
         </p14:section>
-        <p14:section name="認識工具" id="{9fd58979-6f15-f47c-fc16-a12df874fc6a}">
+        <p14:section name="認識工具" id="{01399da9-1794-c63c-157e-9861010bb11d}">
           <p14:sldIdLst>
             <p14:sldId id="258"/>
             <p14:sldId id="259"/>
             <p14:sldId id="260"/>
           </p14:sldIdLst>
         </p14:section>
-        <p14:section name="安裝" id="{ebd409df-9f22-5262-d6b0-e115a811023d}">
+        <p14:section name="安裝" id="{5d54fbc4-f81e-073a-1331-507ce75410ba}">
           <p14:sldIdLst>
             <p14:sldId id="261"/>
             <p14:sldId id="262"/>
             <p14:sldId id="263"/>
           </p14:sldIdLst>
         </p14:section>
-        <p14:section name="C 案操作" id="{be76e9a2-9b4a-3a0a-3f2b-1a256fff626c}">
+        <p14:section name="C 案操作" id="{08890520-9eb4-c3ec-fb09-aa63f07a2673}">
           <p14:sldIdLst>
             <p14:sldId id="264"/>
             <p14:sldId id="265"/>
@@ -170,7 +170,7 @@
             <p14:sldId id="270"/>
           </p14:sldIdLst>
         </p14:section>
-        <p14:section name="D 案操作" id="{be552fc7-7932-d2cb-6ad6-717fa0aeaa72}">
+        <p14:section name="D 案操作" id="{b4f77652-94d1-322d-d02d-26113106a63a}">
           <p14:sldIdLst>
             <p14:sldId id="271"/>
             <p14:sldId id="272"/>
@@ -180,28 +180,28 @@
             <p14:sldId id="276"/>
           </p14:sldIdLst>
         </p14:section>
-        <p14:section name="雙面板" id="{af00c104-5d4d-62fd-e54e-9b38508c9865}">
+        <p14:section name="雙面板" id="{04b8d495-0fbb-197e-d267-72e9e66d843d}">
           <p14:sldIdLst>
             <p14:sldId id="277"/>
             <p14:sldId id="278"/>
             <p14:sldId id="279"/>
           </p14:sldIdLst>
         </p14:section>
-        <p14:section name="降壓選料" id="{b2f47449-43b1-e86a-5332-fb4cd946a1d2}">
+        <p14:section name="降壓選料" id="{18c8b087-a810-6628-a892-6b218a5d95e9}">
           <p14:sldIdLst>
             <p14:sldId id="280"/>
             <p14:sldId id="281"/>
             <p14:sldId id="282"/>
           </p14:sldIdLst>
         </p14:section>
-        <p14:section name="看懂輸出" id="{9d38bf67-3f9f-d383-8045-ff7d5ffd6ebe}">
+        <p14:section name="看懂輸出" id="{cc0ba255-2c0c-47c7-9c41-d68203670a86}">
           <p14:sldIdLst>
             <p14:sldId id="283"/>
             <p14:sldId id="284"/>
             <p14:sldId id="285"/>
           </p14:sldIdLst>
         </p14:section>
-        <p14:section name="疑難排解" id="{5a90a78a-8c8e-de78-715b-cdf1e0c3856d}">
+        <p14:section name="疑難排解" id="{d52361f0-1f38-d004-de8f-29d609918013}">
           <p14:sldIdLst>
             <p14:sldId id="286"/>
             <p14:sldId id="287"/>
@@ -3588,123 +3588,6 @@
           <a:chExt cx="0" cy="0"/>
         </a:xfrm>
       </p:grpSpPr>
-      <p:sp>
-        <p:nvSpPr>
-          <p:cNvPr id="2" name="Text 0"/>
-          <p:cNvSpPr txBox="1"/>
-          <p:nvPr/>
-        </p:nvSpPr>
-        <p:spPr>
-          <a:xfrm>
-            <a:off x="457200" y="4727448"/>
-            <a:ext cx="4572000" cy="274320"/>
-          </a:xfrm>
-          <a:prstGeom prst="rect">
-            <a:avLst/>
-          </a:prstGeom>
-          <a:noFill/>
-          <a:ln/>
-        </p:spPr>
-        <p:txBody>
-          <a:bodyPr wrap="square" lIns="0" tIns="0" rIns="0" bIns="0" rtlCol="0" anchor="ctr"/>
-          <a:lstStyle/>
-          <a:p>
-            <a:pPr indent="0" marL="0">
-              <a:buNone/>
-            </a:pPr>
-            <a:r>
-              <a:rPr lang="en-US" sz="900" dirty="0">
-                <a:solidFill>
-                  <a:srgbClr val="6B7180"/>
-                </a:solidFill>
-              </a:rPr>
-              <a:t>BOM Matcher v0.10 操作 SOP</a:t>
-            </a:r>
-            <a:endParaRPr lang="en-US" sz="900" dirty="0"/>
-          </a:p>
-        </p:txBody>
-      </p:sp>
-      <p:sp>
-        <p:nvSpPr>
-          <p:cNvPr id="3" name="Text 1"/>
-          <p:cNvSpPr txBox="1"/>
-          <p:nvPr/>
-        </p:nvSpPr>
-        <p:spPr>
-          <a:xfrm>
-            <a:off x="6766560" y="4727448"/>
-            <a:ext cx="1371600" cy="274320"/>
-          </a:xfrm>
-          <a:prstGeom prst="rect">
-            <a:avLst/>
-          </a:prstGeom>
-          <a:noFill/>
-          <a:ln/>
-        </p:spPr>
-        <p:txBody>
-          <a:bodyPr wrap="square" lIns="0" tIns="0" rIns="0" bIns="0" rtlCol="0" anchor="ctr"/>
-          <a:lstStyle/>
-          <a:p>
-            <a:pPr algn="r" indent="0" marL="0">
-              <a:buNone/>
-            </a:pPr>
-            <a:r>
-              <a:rPr lang="en-US" sz="900" dirty="0">
-                <a:solidFill>
-                  <a:srgbClr val="6B7180"/>
-                </a:solidFill>
-              </a:rPr>
-              <a:t>2026-10-21</a:t>
-            </a:r>
-            <a:endParaRPr lang="en-US" sz="900" dirty="0"/>
-          </a:p>
-        </p:txBody>
-      </p:sp>
-      <p:sp>
-        <p:nvSpPr>
-          <p:cNvPr id="25" name="Slide Number Placeholder 0"/>
-          <p:cNvSpPr>
-            <a:spLocks noGrp="1"/>
-          </p:cNvSpPr>
-          <p:nvPr>
-            <p:ph type="sldNum" sz="quarter" idx="4294967295"/>
-          </p:nvPr>
-        </p:nvSpPr>
-        <p:spPr>
-          <a:xfrm>
-            <a:off x="8412480" y="4727448"/>
-            <a:ext cx="457200" cy="274320"/>
-          </a:xfrm>
-          <a:prstGeom prst="rect">
-            <a:avLst/>
-          </a:prstGeom>
-          <a:extLst>
-            <a:ext uri="{C572A759-6A51-4108-AA02-DFA0A04FC94B}">
-              <ma14:wrappingTextBoxFlag xmlns:ma14="http://schemas.microsoft.com/office/mac/drawingml/2011/main" val="0"/>
-            </a:ext>
-          </a:extLst>
-        </p:spPr>
-        <p:txBody>
-          <a:bodyPr/>
-          <a:lstStyle>
-            <a:lvl1pPr>
-              <a:defRPr sz="900">
-                <a:solidFill>
-                  <a:srgbClr val="6B7180"/>
-                </a:solidFill>
-              </a:defRPr>
-            </a:lvl1pPr>
-          </a:lstStyle>
-          <a:p>
-            <a:pPr algn="r"/>
-            <a:fld id="{F7021451-1387-4CA6-816F-3879F97B5CBC}" type="slidenum">
-              <a:rPr b="0" lang="en-US"/>
-              <a:t>1004</a:t>
-            </a:fld>
-            <a:endParaRPr lang="en-US"/>
-          </a:p>
-        </p:txBody>
-      </p:sp>
     </p:spTree>
   </p:cSld>
   <p:clrMapOvr>
@@ -3730,51 +3613,6 @@
           <a:chExt cx="0" cy="0"/>
         </a:xfrm>
       </p:grpSpPr>
-      <p:sp>
-        <p:nvSpPr>
-          <p:cNvPr id="25" name="Slide Number Placeholder 0"/>
-          <p:cNvSpPr>
-            <a:spLocks noGrp="1"/>
-          </p:cNvSpPr>
-          <p:nvPr>
-            <p:ph type="sldNum" sz="quarter" idx="4294967295"/>
-          </p:nvPr>
-        </p:nvSpPr>
-        <p:spPr>
-          <a:xfrm>
-            <a:off x="8412480" y="4727448"/>
-            <a:ext cx="457200" cy="274320"/>
-          </a:xfrm>
-          <a:prstGeom prst="rect">
-            <a:avLst/>
-          </a:prstGeom>
-          <a:extLst>
-            <a:ext uri="{C572A759-6A51-4108-AA02-DFA0A04FC94B}">
-              <ma14:wrappingTextBoxFlag xmlns:ma14="http://schemas.microsoft.com/office/mac/drawingml/2011/main" val="0"/>
-            </a:ext>
-          </a:extLst>
-        </p:spPr>
-        <p:txBody>
-          <a:bodyPr/>
-          <a:lstStyle>
-            <a:lvl1pPr>
-              <a:defRPr sz="900">
-                <a:solidFill>
-                  <a:srgbClr val="6B7180"/>
-                </a:solidFill>
-              </a:defRPr>
-            </a:lvl1pPr>
-          </a:lstStyle>
-          <a:p>
-            <a:pPr algn="r"/>
-            <a:fld id="{F7021451-1387-4CA6-816F-3879F97B5CBC}" type="slidenum">
-              <a:rPr b="0" lang="en-US"/>
-              <a:t>null</a:t>
-            </a:fld>
-            <a:endParaRPr lang="en-US"/>
-          </a:p>
-        </p:txBody>
-      </p:sp>
     </p:spTree>
   </p:cSld>
   <p:clrMap bg1="lt1" tx1="dk1" bg2="lt2" tx2="dk2" accent1="accent1" accent2="accent2" accent3="accent3" accent4="accent4" accent5="accent5" accent6="accent6" hlink="hlink" folHlink="folHlink"/>
@@ -4327,20 +4165,20 @@
         </p:nvSpPr>
         <p:spPr>
           <a:xfrm>
-            <a:off x="5669280" y="4727448"/>
-            <a:ext cx="868680" cy="274320"/>
-          </a:xfrm>
-          <a:prstGeom prst="rect">
-            <a:avLst/>
-          </a:prstGeom>
-          <a:noFill/>
-          <a:ln/>
-        </p:spPr>
-        <p:txBody>
-          <a:bodyPr wrap="square" lIns="0" tIns="0" rIns="0" bIns="0" rtlCol="0" anchor="ctr"/>
-          <a:lstStyle/>
-          <a:p>
-            <a:pPr algn="r" indent="0" marL="0">
+            <a:off x="457200" y="4727448"/>
+            <a:ext cx="8229600" cy="274320"/>
+          </a:xfrm>
+          <a:prstGeom prst="rect">
+            <a:avLst/>
+          </a:prstGeom>
+          <a:noFill/>
+          <a:ln/>
+        </p:spPr>
+        <p:txBody>
+          <a:bodyPr wrap="square" lIns="0" tIns="0" rIns="0" bIns="0" rtlCol="0" anchor="ctr"/>
+          <a:lstStyle/>
+          <a:p>
+            <a:pPr algn="ctr" indent="0" marL="0">
               <a:buNone/>
             </a:pPr>
             <a:r>
@@ -4715,51 +4553,6 @@
               <a:t>選錯檔案是最常見的失誤。</a:t>
             </a:r>
             <a:endParaRPr lang="en-US" sz="1000" dirty="0"/>
-          </a:p>
-        </p:txBody>
-      </p:sp>
-      <p:sp>
-        <p:nvSpPr>
-          <p:cNvPr id="25" name="Slide Number Placeholder 0"/>
-          <p:cNvSpPr>
-            <a:spLocks noGrp="1"/>
-          </p:cNvSpPr>
-          <p:nvPr>
-            <p:ph type="sldNum" sz="quarter" idx="4294967295"/>
-          </p:nvPr>
-        </p:nvSpPr>
-        <p:spPr>
-          <a:xfrm>
-            <a:off x="8412480" y="4727448"/>
-            <a:ext cx="457200" cy="274320"/>
-          </a:xfrm>
-          <a:prstGeom prst="rect">
-            <a:avLst/>
-          </a:prstGeom>
-          <a:extLst>
-            <a:ext uri="{C572A759-6A51-4108-AA02-DFA0A04FC94B}">
-              <ma14:wrappingTextBoxFlag xmlns:ma14="http://schemas.microsoft.com/office/mac/drawingml/2011/main" val="0"/>
-            </a:ext>
-          </a:extLst>
-        </p:spPr>
-        <p:txBody>
-          <a:bodyPr/>
-          <a:lstStyle>
-            <a:lvl1pPr>
-              <a:defRPr sz="900">
-                <a:solidFill>
-                  <a:srgbClr val="6B7180"/>
-                </a:solidFill>
-              </a:defRPr>
-            </a:lvl1pPr>
-          </a:lstStyle>
-          <a:p>
-            <a:pPr algn="r"/>
-            <a:fld id="{F7021451-1387-4CA6-816F-3879F97B5CBC}" type="slidenum">
-              <a:rPr b="0" lang="en-US"/>
-              <a:t>10</a:t>
-            </a:fld>
-            <a:endParaRPr lang="en-US"/>
           </a:p>
         </p:txBody>
       </p:sp>
@@ -4832,20 +4625,20 @@
         </p:nvSpPr>
         <p:spPr>
           <a:xfrm>
-            <a:off x="5669280" y="4727448"/>
-            <a:ext cx="868680" cy="274320"/>
-          </a:xfrm>
-          <a:prstGeom prst="rect">
-            <a:avLst/>
-          </a:prstGeom>
-          <a:noFill/>
-          <a:ln/>
-        </p:spPr>
-        <p:txBody>
-          <a:bodyPr wrap="square" lIns="0" tIns="0" rIns="0" bIns="0" rtlCol="0" anchor="ctr"/>
-          <a:lstStyle/>
-          <a:p>
-            <a:pPr algn="r" indent="0" marL="0">
+            <a:off x="457200" y="4727448"/>
+            <a:ext cx="8229600" cy="274320"/>
+          </a:xfrm>
+          <a:prstGeom prst="rect">
+            <a:avLst/>
+          </a:prstGeom>
+          <a:noFill/>
+          <a:ln/>
+        </p:spPr>
+        <p:txBody>
+          <a:bodyPr wrap="square" lIns="0" tIns="0" rIns="0" bIns="0" rtlCol="0" anchor="ctr"/>
+          <a:lstStyle/>
+          <a:p>
+            <a:pPr algn="ctr" indent="0" marL="0">
               <a:buNone/>
             </a:pPr>
             <a:r>
@@ -5165,51 +4958,6 @@
               <a:t>找不到就改用目錄瀏覽器，功能一樣。</a:t>
             </a:r>
             <a:endParaRPr lang="en-US" sz="1000" dirty="0"/>
-          </a:p>
-        </p:txBody>
-      </p:sp>
-      <p:sp>
-        <p:nvSpPr>
-          <p:cNvPr id="25" name="Slide Number Placeholder 0"/>
-          <p:cNvSpPr>
-            <a:spLocks noGrp="1"/>
-          </p:cNvSpPr>
-          <p:nvPr>
-            <p:ph type="sldNum" sz="quarter" idx="4294967295"/>
-          </p:nvPr>
-        </p:nvSpPr>
-        <p:spPr>
-          <a:xfrm>
-            <a:off x="8412480" y="4727448"/>
-            <a:ext cx="457200" cy="274320"/>
-          </a:xfrm>
-          <a:prstGeom prst="rect">
-            <a:avLst/>
-          </a:prstGeom>
-          <a:extLst>
-            <a:ext uri="{C572A759-6A51-4108-AA02-DFA0A04FC94B}">
-              <ma14:wrappingTextBoxFlag xmlns:ma14="http://schemas.microsoft.com/office/mac/drawingml/2011/main" val="0"/>
-            </a:ext>
-          </a:extLst>
-        </p:spPr>
-        <p:txBody>
-          <a:bodyPr/>
-          <a:lstStyle>
-            <a:lvl1pPr>
-              <a:defRPr sz="900">
-                <a:solidFill>
-                  <a:srgbClr val="6B7180"/>
-                </a:solidFill>
-              </a:defRPr>
-            </a:lvl1pPr>
-          </a:lstStyle>
-          <a:p>
-            <a:pPr algn="r"/>
-            <a:fld id="{F7021451-1387-4CA6-816F-3879F97B5CBC}" type="slidenum">
-              <a:rPr b="0" lang="en-US"/>
-              <a:t>11</a:t>
-            </a:fld>
-            <a:endParaRPr lang="en-US"/>
           </a:p>
         </p:txBody>
       </p:sp>
@@ -5282,20 +5030,20 @@
         </p:nvSpPr>
         <p:spPr>
           <a:xfrm>
-            <a:off x="5669280" y="4727448"/>
-            <a:ext cx="868680" cy="274320"/>
-          </a:xfrm>
-          <a:prstGeom prst="rect">
-            <a:avLst/>
-          </a:prstGeom>
-          <a:noFill/>
-          <a:ln/>
-        </p:spPr>
-        <p:txBody>
-          <a:bodyPr wrap="square" lIns="0" tIns="0" rIns="0" bIns="0" rtlCol="0" anchor="ctr"/>
-          <a:lstStyle/>
-          <a:p>
-            <a:pPr algn="r" indent="0" marL="0">
+            <a:off x="457200" y="4727448"/>
+            <a:ext cx="8229600" cy="274320"/>
+          </a:xfrm>
+          <a:prstGeom prst="rect">
+            <a:avLst/>
+          </a:prstGeom>
+          <a:noFill/>
+          <a:ln/>
+        </p:spPr>
+        <p:txBody>
+          <a:bodyPr wrap="square" lIns="0" tIns="0" rIns="0" bIns="0" rtlCol="0" anchor="ctr"/>
+          <a:lstStyle/>
+          <a:p>
+            <a:pPr algn="ctr" indent="0" marL="0">
               <a:buNone/>
             </a:pPr>
             <a:r>
@@ -5649,51 +5397,6 @@
               <a:t>要看色底請切到「🎨 色底檢視」頁籤（唯讀）。</a:t>
             </a:r>
             <a:endParaRPr lang="en-US" sz="1000" dirty="0"/>
-          </a:p>
-        </p:txBody>
-      </p:sp>
-      <p:sp>
-        <p:nvSpPr>
-          <p:cNvPr id="25" name="Slide Number Placeholder 0"/>
-          <p:cNvSpPr>
-            <a:spLocks noGrp="1"/>
-          </p:cNvSpPr>
-          <p:nvPr>
-            <p:ph type="sldNum" sz="quarter" idx="4294967295"/>
-          </p:nvPr>
-        </p:nvSpPr>
-        <p:spPr>
-          <a:xfrm>
-            <a:off x="8412480" y="4727448"/>
-            <a:ext cx="457200" cy="274320"/>
-          </a:xfrm>
-          <a:prstGeom prst="rect">
-            <a:avLst/>
-          </a:prstGeom>
-          <a:extLst>
-            <a:ext uri="{C572A759-6A51-4108-AA02-DFA0A04FC94B}">
-              <ma14:wrappingTextBoxFlag xmlns:ma14="http://schemas.microsoft.com/office/mac/drawingml/2011/main" val="0"/>
-            </a:ext>
-          </a:extLst>
-        </p:spPr>
-        <p:txBody>
-          <a:bodyPr/>
-          <a:lstStyle>
-            <a:lvl1pPr>
-              <a:defRPr sz="900">
-                <a:solidFill>
-                  <a:srgbClr val="6B7180"/>
-                </a:solidFill>
-              </a:defRPr>
-            </a:lvl1pPr>
-          </a:lstStyle>
-          <a:p>
-            <a:pPr algn="r"/>
-            <a:fld id="{F7021451-1387-4CA6-816F-3879F97B5CBC}" type="slidenum">
-              <a:rPr b="0" lang="en-US"/>
-              <a:t>12</a:t>
-            </a:fld>
-            <a:endParaRPr lang="en-US"/>
           </a:p>
         </p:txBody>
       </p:sp>
@@ -5766,20 +5469,20 @@
         </p:nvSpPr>
         <p:spPr>
           <a:xfrm>
-            <a:off x="5669280" y="4727448"/>
-            <a:ext cx="868680" cy="274320"/>
-          </a:xfrm>
-          <a:prstGeom prst="rect">
-            <a:avLst/>
-          </a:prstGeom>
-          <a:noFill/>
-          <a:ln/>
-        </p:spPr>
-        <p:txBody>
-          <a:bodyPr wrap="square" lIns="0" tIns="0" rIns="0" bIns="0" rtlCol="0" anchor="ctr"/>
-          <a:lstStyle/>
-          <a:p>
-            <a:pPr algn="r" indent="0" marL="0">
+            <a:off x="457200" y="4727448"/>
+            <a:ext cx="8229600" cy="274320"/>
+          </a:xfrm>
+          <a:prstGeom prst="rect">
+            <a:avLst/>
+          </a:prstGeom>
+          <a:noFill/>
+          <a:ln/>
+        </p:spPr>
+        <p:txBody>
+          <a:bodyPr wrap="square" lIns="0" tIns="0" rIns="0" bIns="0" rtlCol="0" anchor="ctr"/>
+          <a:lstStyle/>
+          <a:p>
+            <a:pPr algn="ctr" indent="0" marL="0">
               <a:buNone/>
             </a:pPr>
             <a:r>
@@ -6099,51 +5802,6 @@
               <a:t>列數比項數多，是因為替代料被拆成獨立列。</a:t>
             </a:r>
             <a:endParaRPr lang="en-US" sz="1000" dirty="0"/>
-          </a:p>
-        </p:txBody>
-      </p:sp>
-      <p:sp>
-        <p:nvSpPr>
-          <p:cNvPr id="25" name="Slide Number Placeholder 0"/>
-          <p:cNvSpPr>
-            <a:spLocks noGrp="1"/>
-          </p:cNvSpPr>
-          <p:nvPr>
-            <p:ph type="sldNum" sz="quarter" idx="4294967295"/>
-          </p:nvPr>
-        </p:nvSpPr>
-        <p:spPr>
-          <a:xfrm>
-            <a:off x="8412480" y="4727448"/>
-            <a:ext cx="457200" cy="274320"/>
-          </a:xfrm>
-          <a:prstGeom prst="rect">
-            <a:avLst/>
-          </a:prstGeom>
-          <a:extLst>
-            <a:ext uri="{C572A759-6A51-4108-AA02-DFA0A04FC94B}">
-              <ma14:wrappingTextBoxFlag xmlns:ma14="http://schemas.microsoft.com/office/mac/drawingml/2011/main" val="0"/>
-            </a:ext>
-          </a:extLst>
-        </p:spPr>
-        <p:txBody>
-          <a:bodyPr/>
-          <a:lstStyle>
-            <a:lvl1pPr>
-              <a:defRPr sz="900">
-                <a:solidFill>
-                  <a:srgbClr val="6B7180"/>
-                </a:solidFill>
-              </a:defRPr>
-            </a:lvl1pPr>
-          </a:lstStyle>
-          <a:p>
-            <a:pPr algn="r"/>
-            <a:fld id="{F7021451-1387-4CA6-816F-3879F97B5CBC}" type="slidenum">
-              <a:rPr b="0" lang="en-US"/>
-              <a:t>13</a:t>
-            </a:fld>
-            <a:endParaRPr lang="en-US"/>
           </a:p>
         </p:txBody>
       </p:sp>
@@ -6216,20 +5874,20 @@
         </p:nvSpPr>
         <p:spPr>
           <a:xfrm>
-            <a:off x="5669280" y="4727448"/>
-            <a:ext cx="868680" cy="274320"/>
-          </a:xfrm>
-          <a:prstGeom prst="rect">
-            <a:avLst/>
-          </a:prstGeom>
-          <a:noFill/>
-          <a:ln/>
-        </p:spPr>
-        <p:txBody>
-          <a:bodyPr wrap="square" lIns="0" tIns="0" rIns="0" bIns="0" rtlCol="0" anchor="ctr"/>
-          <a:lstStyle/>
-          <a:p>
-            <a:pPr algn="r" indent="0" marL="0">
+            <a:off x="457200" y="4727448"/>
+            <a:ext cx="8229600" cy="274320"/>
+          </a:xfrm>
+          <a:prstGeom prst="rect">
+            <a:avLst/>
+          </a:prstGeom>
+          <a:noFill/>
+          <a:ln/>
+        </p:spPr>
+        <p:txBody>
+          <a:bodyPr wrap="square" lIns="0" tIns="0" rIns="0" bIns="0" rtlCol="0" anchor="ctr"/>
+          <a:lstStyle/>
+          <a:p>
+            <a:pPr algn="ctr" indent="0" marL="0">
               <a:buNone/>
             </a:pPr>
             <a:r>
@@ -6617,51 +6275,6 @@
               <a:t>要重新執行比對。</a:t>
             </a:r>
             <a:endParaRPr lang="en-US" sz="1000" dirty="0"/>
-          </a:p>
-        </p:txBody>
-      </p:sp>
-      <p:sp>
-        <p:nvSpPr>
-          <p:cNvPr id="25" name="Slide Number Placeholder 0"/>
-          <p:cNvSpPr>
-            <a:spLocks noGrp="1"/>
-          </p:cNvSpPr>
-          <p:nvPr>
-            <p:ph type="sldNum" sz="quarter" idx="4294967295"/>
-          </p:nvPr>
-        </p:nvSpPr>
-        <p:spPr>
-          <a:xfrm>
-            <a:off x="8412480" y="4727448"/>
-            <a:ext cx="457200" cy="274320"/>
-          </a:xfrm>
-          <a:prstGeom prst="rect">
-            <a:avLst/>
-          </a:prstGeom>
-          <a:extLst>
-            <a:ext uri="{C572A759-6A51-4108-AA02-DFA0A04FC94B}">
-              <ma14:wrappingTextBoxFlag xmlns:ma14="http://schemas.microsoft.com/office/mac/drawingml/2011/main" val="0"/>
-            </a:ext>
-          </a:extLst>
-        </p:spPr>
-        <p:txBody>
-          <a:bodyPr/>
-          <a:lstStyle>
-            <a:lvl1pPr>
-              <a:defRPr sz="900">
-                <a:solidFill>
-                  <a:srgbClr val="6B7180"/>
-                </a:solidFill>
-              </a:defRPr>
-            </a:lvl1pPr>
-          </a:lstStyle>
-          <a:p>
-            <a:pPr algn="r"/>
-            <a:fld id="{F7021451-1387-4CA6-816F-3879F97B5CBC}" type="slidenum">
-              <a:rPr b="0" lang="en-US"/>
-              <a:t>14</a:t>
-            </a:fld>
-            <a:endParaRPr lang="en-US"/>
           </a:p>
         </p:txBody>
       </p:sp>
@@ -6734,20 +6347,20 @@
         </p:nvSpPr>
         <p:spPr>
           <a:xfrm>
-            <a:off x="5669280" y="4727448"/>
-            <a:ext cx="868680" cy="274320"/>
-          </a:xfrm>
-          <a:prstGeom prst="rect">
-            <a:avLst/>
-          </a:prstGeom>
-          <a:noFill/>
-          <a:ln/>
-        </p:spPr>
-        <p:txBody>
-          <a:bodyPr wrap="square" lIns="0" tIns="0" rIns="0" bIns="0" rtlCol="0" anchor="ctr"/>
-          <a:lstStyle/>
-          <a:p>
-            <a:pPr algn="r" indent="0" marL="0">
+            <a:off x="457200" y="4727448"/>
+            <a:ext cx="8229600" cy="274320"/>
+          </a:xfrm>
+          <a:prstGeom prst="rect">
+            <a:avLst/>
+          </a:prstGeom>
+          <a:noFill/>
+          <a:ln/>
+        </p:spPr>
+        <p:txBody>
+          <a:bodyPr wrap="square" lIns="0" tIns="0" rIns="0" bIns="0" rtlCol="0" anchor="ctr"/>
+          <a:lstStyle/>
+          <a:p>
+            <a:pPr algn="ctr" indent="0" marL="0">
               <a:buNone/>
             </a:pPr>
             <a:r>
@@ -8001,51 +7614,6 @@
           </a:p>
         </p:txBody>
       </p:sp>
-      <p:sp>
-        <p:nvSpPr>
-          <p:cNvPr id="25" name="Slide Number Placeholder 0"/>
-          <p:cNvSpPr>
-            <a:spLocks noGrp="1"/>
-          </p:cNvSpPr>
-          <p:nvPr>
-            <p:ph type="sldNum" sz="quarter" idx="4294967295"/>
-          </p:nvPr>
-        </p:nvSpPr>
-        <p:spPr>
-          <a:xfrm>
-            <a:off x="8412480" y="4727448"/>
-            <a:ext cx="457200" cy="274320"/>
-          </a:xfrm>
-          <a:prstGeom prst="rect">
-            <a:avLst/>
-          </a:prstGeom>
-          <a:extLst>
-            <a:ext uri="{C572A759-6A51-4108-AA02-DFA0A04FC94B}">
-              <ma14:wrappingTextBoxFlag xmlns:ma14="http://schemas.microsoft.com/office/mac/drawingml/2011/main" val="0"/>
-            </a:ext>
-          </a:extLst>
-        </p:spPr>
-        <p:txBody>
-          <a:bodyPr/>
-          <a:lstStyle>
-            <a:lvl1pPr>
-              <a:defRPr sz="900">
-                <a:solidFill>
-                  <a:srgbClr val="6B7180"/>
-                </a:solidFill>
-              </a:defRPr>
-            </a:lvl1pPr>
-          </a:lstStyle>
-          <a:p>
-            <a:pPr algn="r"/>
-            <a:fld id="{F7021451-1387-4CA6-816F-3879F97B5CBC}" type="slidenum">
-              <a:rPr b="0" lang="en-US"/>
-              <a:t>15</a:t>
-            </a:fld>
-            <a:endParaRPr lang="en-US"/>
-          </a:p>
-        </p:txBody>
-      </p:sp>
     </p:spTree>
   </p:cSld>
   <p:clrMapOvr>
@@ -8257,20 +7825,20 @@
         </p:nvSpPr>
         <p:spPr>
           <a:xfrm>
-            <a:off x="5669280" y="4727448"/>
-            <a:ext cx="868680" cy="274320"/>
-          </a:xfrm>
-          <a:prstGeom prst="rect">
-            <a:avLst/>
-          </a:prstGeom>
-          <a:noFill/>
-          <a:ln/>
-        </p:spPr>
-        <p:txBody>
-          <a:bodyPr wrap="square" lIns="0" tIns="0" rIns="0" bIns="0" rtlCol="0" anchor="ctr"/>
-          <a:lstStyle/>
-          <a:p>
-            <a:pPr algn="r" indent="0" marL="0">
+            <a:off x="457200" y="4727448"/>
+            <a:ext cx="8229600" cy="274320"/>
+          </a:xfrm>
+          <a:prstGeom prst="rect">
+            <a:avLst/>
+          </a:prstGeom>
+          <a:noFill/>
+          <a:ln/>
+        </p:spPr>
+        <p:txBody>
+          <a:bodyPr wrap="square" lIns="0" tIns="0" rIns="0" bIns="0" rtlCol="0" anchor="ctr"/>
+          <a:lstStyle/>
+          <a:p>
+            <a:pPr algn="ctr" indent="0" marL="0">
               <a:buNone/>
             </a:pPr>
             <a:r>
@@ -8684,51 +8252,6 @@
               <a:t>BOM Matcher v0.10　[run_D_webview.bat]</a:t>
             </a:r>
             <a:endParaRPr lang="en-US" sz="1000" dirty="0"/>
-          </a:p>
-        </p:txBody>
-      </p:sp>
-      <p:sp>
-        <p:nvSpPr>
-          <p:cNvPr id="25" name="Slide Number Placeholder 0"/>
-          <p:cNvSpPr>
-            <a:spLocks noGrp="1"/>
-          </p:cNvSpPr>
-          <p:nvPr>
-            <p:ph type="sldNum" sz="quarter" idx="4294967295"/>
-          </p:nvPr>
-        </p:nvSpPr>
-        <p:spPr>
-          <a:xfrm>
-            <a:off x="8412480" y="4727448"/>
-            <a:ext cx="457200" cy="274320"/>
-          </a:xfrm>
-          <a:prstGeom prst="rect">
-            <a:avLst/>
-          </a:prstGeom>
-          <a:extLst>
-            <a:ext uri="{C572A759-6A51-4108-AA02-DFA0A04FC94B}">
-              <ma14:wrappingTextBoxFlag xmlns:ma14="http://schemas.microsoft.com/office/mac/drawingml/2011/main" val="0"/>
-            </a:ext>
-          </a:extLst>
-        </p:spPr>
-        <p:txBody>
-          <a:bodyPr/>
-          <a:lstStyle>
-            <a:lvl1pPr>
-              <a:defRPr sz="900">
-                <a:solidFill>
-                  <a:srgbClr val="6B7180"/>
-                </a:solidFill>
-              </a:defRPr>
-            </a:lvl1pPr>
-          </a:lstStyle>
-          <a:p>
-            <a:pPr algn="r"/>
-            <a:fld id="{F7021451-1387-4CA6-816F-3879F97B5CBC}" type="slidenum">
-              <a:rPr b="0" lang="en-US"/>
-              <a:t>17</a:t>
-            </a:fld>
-            <a:endParaRPr lang="en-US"/>
           </a:p>
         </p:txBody>
       </p:sp>
@@ -8801,20 +8324,20 @@
         </p:nvSpPr>
         <p:spPr>
           <a:xfrm>
-            <a:off x="5669280" y="4727448"/>
-            <a:ext cx="868680" cy="274320"/>
-          </a:xfrm>
-          <a:prstGeom prst="rect">
-            <a:avLst/>
-          </a:prstGeom>
-          <a:noFill/>
-          <a:ln/>
-        </p:spPr>
-        <p:txBody>
-          <a:bodyPr wrap="square" lIns="0" tIns="0" rIns="0" bIns="0" rtlCol="0" anchor="ctr"/>
-          <a:lstStyle/>
-          <a:p>
-            <a:pPr algn="r" indent="0" marL="0">
+            <a:off x="457200" y="4727448"/>
+            <a:ext cx="8229600" cy="274320"/>
+          </a:xfrm>
+          <a:prstGeom prst="rect">
+            <a:avLst/>
+          </a:prstGeom>
+          <a:noFill/>
+          <a:ln/>
+        </p:spPr>
+        <p:txBody>
+          <a:bodyPr wrap="square" lIns="0" tIns="0" rIns="0" bIns="0" rtlCol="0" anchor="ctr"/>
+          <a:lstStyle/>
+          <a:p>
+            <a:pPr algn="ctr" indent="0" marL="0">
               <a:buNone/>
             </a:pPr>
             <a:r>
@@ -9476,51 +8999,6 @@
               <a:t>可以用來確認改對了。</a:t>
             </a:r>
             <a:endParaRPr lang="en-US" sz="1000" dirty="0"/>
-          </a:p>
-        </p:txBody>
-      </p:sp>
-      <p:sp>
-        <p:nvSpPr>
-          <p:cNvPr id="25" name="Slide Number Placeholder 0"/>
-          <p:cNvSpPr>
-            <a:spLocks noGrp="1"/>
-          </p:cNvSpPr>
-          <p:nvPr>
-            <p:ph type="sldNum" sz="quarter" idx="4294967295"/>
-          </p:nvPr>
-        </p:nvSpPr>
-        <p:spPr>
-          <a:xfrm>
-            <a:off x="8412480" y="4727448"/>
-            <a:ext cx="457200" cy="274320"/>
-          </a:xfrm>
-          <a:prstGeom prst="rect">
-            <a:avLst/>
-          </a:prstGeom>
-          <a:extLst>
-            <a:ext uri="{C572A759-6A51-4108-AA02-DFA0A04FC94B}">
-              <ma14:wrappingTextBoxFlag xmlns:ma14="http://schemas.microsoft.com/office/mac/drawingml/2011/main" val="0"/>
-            </a:ext>
-          </a:extLst>
-        </p:spPr>
-        <p:txBody>
-          <a:bodyPr/>
-          <a:lstStyle>
-            <a:lvl1pPr>
-              <a:defRPr sz="900">
-                <a:solidFill>
-                  <a:srgbClr val="6B7180"/>
-                </a:solidFill>
-              </a:defRPr>
-            </a:lvl1pPr>
-          </a:lstStyle>
-          <a:p>
-            <a:pPr algn="r"/>
-            <a:fld id="{F7021451-1387-4CA6-816F-3879F97B5CBC}" type="slidenum">
-              <a:rPr b="0" lang="en-US"/>
-              <a:t>18</a:t>
-            </a:fld>
-            <a:endParaRPr lang="en-US"/>
           </a:p>
         </p:txBody>
       </p:sp>
@@ -9593,20 +9071,20 @@
         </p:nvSpPr>
         <p:spPr>
           <a:xfrm>
-            <a:off x="5669280" y="4727448"/>
-            <a:ext cx="868680" cy="274320"/>
-          </a:xfrm>
-          <a:prstGeom prst="rect">
-            <a:avLst/>
-          </a:prstGeom>
-          <a:noFill/>
-          <a:ln/>
-        </p:spPr>
-        <p:txBody>
-          <a:bodyPr wrap="square" lIns="0" tIns="0" rIns="0" bIns="0" rtlCol="0" anchor="ctr"/>
-          <a:lstStyle/>
-          <a:p>
-            <a:pPr algn="r" indent="0" marL="0">
+            <a:off x="457200" y="4727448"/>
+            <a:ext cx="8229600" cy="274320"/>
+          </a:xfrm>
+          <a:prstGeom prst="rect">
+            <a:avLst/>
+          </a:prstGeom>
+          <a:noFill/>
+          <a:ln/>
+        </p:spPr>
+        <p:txBody>
+          <a:bodyPr wrap="square" lIns="0" tIns="0" rIns="0" bIns="0" rtlCol="0" anchor="ctr"/>
+          <a:lstStyle/>
+          <a:p>
+            <a:pPr algn="ctr" indent="0" marL="0">
               <a:buNone/>
             </a:pPr>
             <a:r>
@@ -9926,51 +9404,6 @@
               <a:t>例如品名「TVS」會命中講 SOD-523 的條目，要人工判斷。</a:t>
             </a:r>
             <a:endParaRPr lang="en-US" sz="1000" dirty="0"/>
-          </a:p>
-        </p:txBody>
-      </p:sp>
-      <p:sp>
-        <p:nvSpPr>
-          <p:cNvPr id="25" name="Slide Number Placeholder 0"/>
-          <p:cNvSpPr>
-            <a:spLocks noGrp="1"/>
-          </p:cNvSpPr>
-          <p:nvPr>
-            <p:ph type="sldNum" sz="quarter" idx="4294967295"/>
-          </p:nvPr>
-        </p:nvSpPr>
-        <p:spPr>
-          <a:xfrm>
-            <a:off x="8412480" y="4727448"/>
-            <a:ext cx="457200" cy="274320"/>
-          </a:xfrm>
-          <a:prstGeom prst="rect">
-            <a:avLst/>
-          </a:prstGeom>
-          <a:extLst>
-            <a:ext uri="{C572A759-6A51-4108-AA02-DFA0A04FC94B}">
-              <ma14:wrappingTextBoxFlag xmlns:ma14="http://schemas.microsoft.com/office/mac/drawingml/2011/main" val="0"/>
-            </a:ext>
-          </a:extLst>
-        </p:spPr>
-        <p:txBody>
-          <a:bodyPr/>
-          <a:lstStyle>
-            <a:lvl1pPr>
-              <a:defRPr sz="900">
-                <a:solidFill>
-                  <a:srgbClr val="6B7180"/>
-                </a:solidFill>
-              </a:defRPr>
-            </a:lvl1pPr>
-          </a:lstStyle>
-          <a:p>
-            <a:pPr algn="r"/>
-            <a:fld id="{F7021451-1387-4CA6-816F-3879F97B5CBC}" type="slidenum">
-              <a:rPr b="0" lang="en-US"/>
-              <a:t>19</a:t>
-            </a:fld>
-            <a:endParaRPr lang="en-US"/>
           </a:p>
         </p:txBody>
       </p:sp>
@@ -12731,54 +12164,9 @@
                   <a:srgbClr val="6B7180"/>
                 </a:solidFill>
               </a:rPr>
-              <a:t>點選任一列可直接跳到該頁；每頁右下角的「☰ 目錄」可以回到這裡。</a:t>
+              <a:t>點選任一列可直接跳到該頁；每頁下方置中的「☰ 目錄」可以回到這裡。</a:t>
             </a:r>
             <a:endParaRPr lang="en-US" sz="1000" dirty="0"/>
-          </a:p>
-        </p:txBody>
-      </p:sp>
-      <p:sp>
-        <p:nvSpPr>
-          <p:cNvPr id="25" name="Slide Number Placeholder 0"/>
-          <p:cNvSpPr>
-            <a:spLocks noGrp="1"/>
-          </p:cNvSpPr>
-          <p:nvPr>
-            <p:ph type="sldNum" sz="quarter" idx="4294967295"/>
-          </p:nvPr>
-        </p:nvSpPr>
-        <p:spPr>
-          <a:xfrm>
-            <a:off x="8412480" y="4727448"/>
-            <a:ext cx="457200" cy="274320"/>
-          </a:xfrm>
-          <a:prstGeom prst="rect">
-            <a:avLst/>
-          </a:prstGeom>
-          <a:extLst>
-            <a:ext uri="{C572A759-6A51-4108-AA02-DFA0A04FC94B}">
-              <ma14:wrappingTextBoxFlag xmlns:ma14="http://schemas.microsoft.com/office/mac/drawingml/2011/main" val="0"/>
-            </a:ext>
-          </a:extLst>
-        </p:spPr>
-        <p:txBody>
-          <a:bodyPr/>
-          <a:lstStyle>
-            <a:lvl1pPr>
-              <a:defRPr sz="900">
-                <a:solidFill>
-                  <a:srgbClr val="6B7180"/>
-                </a:solidFill>
-              </a:defRPr>
-            </a:lvl1pPr>
-          </a:lstStyle>
-          <a:p>
-            <a:pPr algn="r"/>
-            <a:fld id="{F7021451-1387-4CA6-816F-3879F97B5CBC}" type="slidenum">
-              <a:rPr b="0" lang="en-US"/>
-              <a:t>2</a:t>
-            </a:fld>
-            <a:endParaRPr lang="en-US"/>
           </a:p>
         </p:txBody>
       </p:sp>
@@ -12851,20 +12239,20 @@
         </p:nvSpPr>
         <p:spPr>
           <a:xfrm>
-            <a:off x="5669280" y="4727448"/>
-            <a:ext cx="868680" cy="274320"/>
-          </a:xfrm>
-          <a:prstGeom prst="rect">
-            <a:avLst/>
-          </a:prstGeom>
-          <a:noFill/>
-          <a:ln/>
-        </p:spPr>
-        <p:txBody>
-          <a:bodyPr wrap="square" lIns="0" tIns="0" rIns="0" bIns="0" rtlCol="0" anchor="ctr"/>
-          <a:lstStyle/>
-          <a:p>
-            <a:pPr algn="r" indent="0" marL="0">
+            <a:off x="457200" y="4727448"/>
+            <a:ext cx="8229600" cy="274320"/>
+          </a:xfrm>
+          <a:prstGeom prst="rect">
+            <a:avLst/>
+          </a:prstGeom>
+          <a:noFill/>
+          <a:ln/>
+        </p:spPr>
+        <p:txBody>
+          <a:bodyPr wrap="square" lIns="0" tIns="0" rIns="0" bIns="0" rtlCol="0" anchor="ctr"/>
+          <a:lstStyle/>
+          <a:p>
+            <a:pPr algn="ctr" indent="0" marL="0">
               <a:buNone/>
             </a:pPr>
             <a:r>
@@ -13040,51 +12428,6 @@
               <a:t>留空就是空白，不影響其他功能</a:t>
             </a:r>
             <a:endParaRPr lang="en-US" sz="1100" dirty="0"/>
-          </a:p>
-        </p:txBody>
-      </p:sp>
-      <p:sp>
-        <p:nvSpPr>
-          <p:cNvPr id="25" name="Slide Number Placeholder 0"/>
-          <p:cNvSpPr>
-            <a:spLocks noGrp="1"/>
-          </p:cNvSpPr>
-          <p:nvPr>
-            <p:ph type="sldNum" sz="quarter" idx="4294967295"/>
-          </p:nvPr>
-        </p:nvSpPr>
-        <p:spPr>
-          <a:xfrm>
-            <a:off x="8412480" y="4727448"/>
-            <a:ext cx="457200" cy="274320"/>
-          </a:xfrm>
-          <a:prstGeom prst="rect">
-            <a:avLst/>
-          </a:prstGeom>
-          <a:extLst>
-            <a:ext uri="{C572A759-6A51-4108-AA02-DFA0A04FC94B}">
-              <ma14:wrappingTextBoxFlag xmlns:ma14="http://schemas.microsoft.com/office/mac/drawingml/2011/main" val="0"/>
-            </a:ext>
-          </a:extLst>
-        </p:spPr>
-        <p:txBody>
-          <a:bodyPr/>
-          <a:lstStyle>
-            <a:lvl1pPr>
-              <a:defRPr sz="900">
-                <a:solidFill>
-                  <a:srgbClr val="6B7180"/>
-                </a:solidFill>
-              </a:defRPr>
-            </a:lvl1pPr>
-          </a:lstStyle>
-          <a:p>
-            <a:pPr algn="r"/>
-            <a:fld id="{F7021451-1387-4CA6-816F-3879F97B5CBC}" type="slidenum">
-              <a:rPr b="0" lang="en-US"/>
-              <a:t>20</a:t>
-            </a:fld>
-            <a:endParaRPr lang="en-US"/>
           </a:p>
         </p:txBody>
       </p:sp>
@@ -13157,20 +12500,20 @@
         </p:nvSpPr>
         <p:spPr>
           <a:xfrm>
-            <a:off x="5669280" y="4727448"/>
-            <a:ext cx="868680" cy="274320"/>
-          </a:xfrm>
-          <a:prstGeom prst="rect">
-            <a:avLst/>
-          </a:prstGeom>
-          <a:noFill/>
-          <a:ln/>
-        </p:spPr>
-        <p:txBody>
-          <a:bodyPr wrap="square" lIns="0" tIns="0" rIns="0" bIns="0" rtlCol="0" anchor="ctr"/>
-          <a:lstStyle/>
-          <a:p>
-            <a:pPr algn="r" indent="0" marL="0">
+            <a:off x="457200" y="4727448"/>
+            <a:ext cx="8229600" cy="274320"/>
+          </a:xfrm>
+          <a:prstGeom prst="rect">
+            <a:avLst/>
+          </a:prstGeom>
+          <a:noFill/>
+          <a:ln/>
+        </p:spPr>
+        <p:txBody>
+          <a:bodyPr wrap="square" lIns="0" tIns="0" rIns="0" bIns="0" rtlCol="0" anchor="ctr"/>
+          <a:lstStyle/>
+          <a:p>
+            <a:pPr algn="ctr" indent="0" marL="0">
               <a:buNone/>
             </a:pPr>
             <a:r>
@@ -13346,51 +12689,6 @@
               <a:t>檔案設定與比對結果頁的右上角也有「▶ 產出 E-BOM」，不必切到這一頁</a:t>
             </a:r>
             <a:endParaRPr lang="en-US" sz="1100" dirty="0"/>
-          </a:p>
-        </p:txBody>
-      </p:sp>
-      <p:sp>
-        <p:nvSpPr>
-          <p:cNvPr id="25" name="Slide Number Placeholder 0"/>
-          <p:cNvSpPr>
-            <a:spLocks noGrp="1"/>
-          </p:cNvSpPr>
-          <p:nvPr>
-            <p:ph type="sldNum" sz="quarter" idx="4294967295"/>
-          </p:nvPr>
-        </p:nvSpPr>
-        <p:spPr>
-          <a:xfrm>
-            <a:off x="8412480" y="4727448"/>
-            <a:ext cx="457200" cy="274320"/>
-          </a:xfrm>
-          <a:prstGeom prst="rect">
-            <a:avLst/>
-          </a:prstGeom>
-          <a:extLst>
-            <a:ext uri="{C572A759-6A51-4108-AA02-DFA0A04FC94B}">
-              <ma14:wrappingTextBoxFlag xmlns:ma14="http://schemas.microsoft.com/office/mac/drawingml/2011/main" val="0"/>
-            </a:ext>
-          </a:extLst>
-        </p:spPr>
-        <p:txBody>
-          <a:bodyPr/>
-          <a:lstStyle>
-            <a:lvl1pPr>
-              <a:defRPr sz="900">
-                <a:solidFill>
-                  <a:srgbClr val="6B7180"/>
-                </a:solidFill>
-              </a:defRPr>
-            </a:lvl1pPr>
-          </a:lstStyle>
-          <a:p>
-            <a:pPr algn="r"/>
-            <a:fld id="{F7021451-1387-4CA6-816F-3879F97B5CBC}" type="slidenum">
-              <a:rPr b="0" lang="en-US"/>
-              <a:t>21</a:t>
-            </a:fld>
-            <a:endParaRPr lang="en-US"/>
           </a:p>
         </p:txBody>
       </p:sp>
@@ -13605,20 +12903,20 @@
         </p:nvSpPr>
         <p:spPr>
           <a:xfrm>
-            <a:off x="5669280" y="4727448"/>
-            <a:ext cx="868680" cy="274320"/>
-          </a:xfrm>
-          <a:prstGeom prst="rect">
-            <a:avLst/>
-          </a:prstGeom>
-          <a:noFill/>
-          <a:ln/>
-        </p:spPr>
-        <p:txBody>
-          <a:bodyPr wrap="square" lIns="0" tIns="0" rIns="0" bIns="0" rtlCol="0" anchor="ctr"/>
-          <a:lstStyle/>
-          <a:p>
-            <a:pPr algn="r" indent="0" marL="0">
+            <a:off x="457200" y="4727448"/>
+            <a:ext cx="8229600" cy="274320"/>
+          </a:xfrm>
+          <a:prstGeom prst="rect">
+            <a:avLst/>
+          </a:prstGeom>
+          <a:noFill/>
+          <a:ln/>
+        </p:spPr>
+        <p:txBody>
+          <a:bodyPr wrap="square" lIns="0" tIns="0" rIns="0" bIns="0" rtlCol="0" anchor="ctr"/>
+          <a:lstStyle/>
+          <a:p>
+            <a:pPr algn="ctr" indent="0" marL="0">
               <a:buNone/>
             </a:pPr>
             <a:r>
@@ -14280,51 +13578,6 @@
               <a:t>TOP 和 BOT 都會是 0，4 顆電阻等於從兩面同時消失。</a:t>
             </a:r>
             <a:endParaRPr lang="en-US" sz="1000" dirty="0"/>
-          </a:p>
-        </p:txBody>
-      </p:sp>
-      <p:sp>
-        <p:nvSpPr>
-          <p:cNvPr id="25" name="Slide Number Placeholder 0"/>
-          <p:cNvSpPr>
-            <a:spLocks noGrp="1"/>
-          </p:cNvSpPr>
-          <p:nvPr>
-            <p:ph type="sldNum" sz="quarter" idx="4294967295"/>
-          </p:nvPr>
-        </p:nvSpPr>
-        <p:spPr>
-          <a:xfrm>
-            <a:off x="8412480" y="4727448"/>
-            <a:ext cx="457200" cy="274320"/>
-          </a:xfrm>
-          <a:prstGeom prst="rect">
-            <a:avLst/>
-          </a:prstGeom>
-          <a:extLst>
-            <a:ext uri="{C572A759-6A51-4108-AA02-DFA0A04FC94B}">
-              <ma14:wrappingTextBoxFlag xmlns:ma14="http://schemas.microsoft.com/office/mac/drawingml/2011/main" val="0"/>
-            </a:ext>
-          </a:extLst>
-        </p:spPr>
-        <p:txBody>
-          <a:bodyPr/>
-          <a:lstStyle>
-            <a:lvl1pPr>
-              <a:defRPr sz="900">
-                <a:solidFill>
-                  <a:srgbClr val="6B7180"/>
-                </a:solidFill>
-              </a:defRPr>
-            </a:lvl1pPr>
-          </a:lstStyle>
-          <a:p>
-            <a:pPr algn="r"/>
-            <a:fld id="{F7021451-1387-4CA6-816F-3879F97B5CBC}" type="slidenum">
-              <a:rPr b="0" lang="en-US"/>
-              <a:t>23</a:t>
-            </a:fld>
-            <a:endParaRPr lang="en-US"/>
           </a:p>
         </p:txBody>
       </p:sp>
@@ -14397,20 +13650,20 @@
         </p:nvSpPr>
         <p:spPr>
           <a:xfrm>
-            <a:off x="5669280" y="4727448"/>
-            <a:ext cx="868680" cy="274320"/>
-          </a:xfrm>
-          <a:prstGeom prst="rect">
-            <a:avLst/>
-          </a:prstGeom>
-          <a:noFill/>
-          <a:ln/>
-        </p:spPr>
-        <p:txBody>
-          <a:bodyPr wrap="square" lIns="0" tIns="0" rIns="0" bIns="0" rtlCol="0" anchor="ctr"/>
-          <a:lstStyle/>
-          <a:p>
-            <a:pPr algn="r" indent="0" marL="0">
+            <a:off x="457200" y="4727448"/>
+            <a:ext cx="8229600" cy="274320"/>
+          </a:xfrm>
+          <a:prstGeom prst="rect">
+            <a:avLst/>
+          </a:prstGeom>
+          <a:noFill/>
+          <a:ln/>
+        </p:spPr>
+        <p:txBody>
+          <a:bodyPr wrap="square" lIns="0" tIns="0" rIns="0" bIns="0" rtlCol="0" anchor="ctr"/>
+          <a:lstStyle/>
+          <a:p>
+            <a:pPr algn="ctr" indent="0" marL="0">
               <a:buNone/>
             </a:pPr>
             <a:r>
@@ -15125,51 +14378,6 @@
               <a:t>沒有對照表＝單面板，與 v0.08 相同</a:t>
             </a:r>
             <a:endParaRPr lang="en-US" sz="1100" dirty="0"/>
-          </a:p>
-        </p:txBody>
-      </p:sp>
-      <p:sp>
-        <p:nvSpPr>
-          <p:cNvPr id="25" name="Slide Number Placeholder 0"/>
-          <p:cNvSpPr>
-            <a:spLocks noGrp="1"/>
-          </p:cNvSpPr>
-          <p:nvPr>
-            <p:ph type="sldNum" sz="quarter" idx="4294967295"/>
-          </p:nvPr>
-        </p:nvSpPr>
-        <p:spPr>
-          <a:xfrm>
-            <a:off x="8412480" y="4727448"/>
-            <a:ext cx="457200" cy="274320"/>
-          </a:xfrm>
-          <a:prstGeom prst="rect">
-            <a:avLst/>
-          </a:prstGeom>
-          <a:extLst>
-            <a:ext uri="{C572A759-6A51-4108-AA02-DFA0A04FC94B}">
-              <ma14:wrappingTextBoxFlag xmlns:ma14="http://schemas.microsoft.com/office/mac/drawingml/2011/main" val="0"/>
-            </a:ext>
-          </a:extLst>
-        </p:spPr>
-        <p:txBody>
-          <a:bodyPr/>
-          <a:lstStyle>
-            <a:lvl1pPr>
-              <a:defRPr sz="900">
-                <a:solidFill>
-                  <a:srgbClr val="6B7180"/>
-                </a:solidFill>
-              </a:defRPr>
-            </a:lvl1pPr>
-          </a:lstStyle>
-          <a:p>
-            <a:pPr algn="r"/>
-            <a:fld id="{F7021451-1387-4CA6-816F-3879F97B5CBC}" type="slidenum">
-              <a:rPr b="0" lang="en-US"/>
-              <a:t>24</a:t>
-            </a:fld>
-            <a:endParaRPr lang="en-US"/>
           </a:p>
         </p:txBody>
       </p:sp>
@@ -15384,20 +14592,20 @@
         </p:nvSpPr>
         <p:spPr>
           <a:xfrm>
-            <a:off x="5669280" y="4727448"/>
-            <a:ext cx="868680" cy="274320"/>
-          </a:xfrm>
-          <a:prstGeom prst="rect">
-            <a:avLst/>
-          </a:prstGeom>
-          <a:noFill/>
-          <a:ln/>
-        </p:spPr>
-        <p:txBody>
-          <a:bodyPr wrap="square" lIns="0" tIns="0" rIns="0" bIns="0" rtlCol="0" anchor="ctr"/>
-          <a:lstStyle/>
-          <a:p>
-            <a:pPr algn="r" indent="0" marL="0">
+            <a:off x="457200" y="4727448"/>
+            <a:ext cx="8229600" cy="274320"/>
+          </a:xfrm>
+          <a:prstGeom prst="rect">
+            <a:avLst/>
+          </a:prstGeom>
+          <a:noFill/>
+          <a:ln/>
+        </p:spPr>
+        <p:txBody>
+          <a:bodyPr wrap="square" lIns="0" tIns="0" rIns="0" bIns="0" rtlCol="0" anchor="ctr"/>
+          <a:lstStyle/>
+          <a:p>
+            <a:pPr algn="ctr" indent="0" marL="0">
               <a:buNone/>
             </a:pPr>
             <a:r>
@@ -16127,51 +15335,6 @@
               <a:t>耐壓不足看得到、可人工判斷；誤差或電流不符是功能性錯誤。</a:t>
             </a:r>
             <a:endParaRPr lang="en-US" sz="1000" dirty="0"/>
-          </a:p>
-        </p:txBody>
-      </p:sp>
-      <p:sp>
-        <p:nvSpPr>
-          <p:cNvPr id="25" name="Slide Number Placeholder 0"/>
-          <p:cNvSpPr>
-            <a:spLocks noGrp="1"/>
-          </p:cNvSpPr>
-          <p:nvPr>
-            <p:ph type="sldNum" sz="quarter" idx="4294967295"/>
-          </p:nvPr>
-        </p:nvSpPr>
-        <p:spPr>
-          <a:xfrm>
-            <a:off x="8412480" y="4727448"/>
-            <a:ext cx="457200" cy="274320"/>
-          </a:xfrm>
-          <a:prstGeom prst="rect">
-            <a:avLst/>
-          </a:prstGeom>
-          <a:extLst>
-            <a:ext uri="{C572A759-6A51-4108-AA02-DFA0A04FC94B}">
-              <ma14:wrappingTextBoxFlag xmlns:ma14="http://schemas.microsoft.com/office/mac/drawingml/2011/main" val="0"/>
-            </a:ext>
-          </a:extLst>
-        </p:spPr>
-        <p:txBody>
-          <a:bodyPr/>
-          <a:lstStyle>
-            <a:lvl1pPr>
-              <a:defRPr sz="900">
-                <a:solidFill>
-                  <a:srgbClr val="6B7180"/>
-                </a:solidFill>
-              </a:defRPr>
-            </a:lvl1pPr>
-          </a:lstStyle>
-          <a:p>
-            <a:pPr algn="r"/>
-            <a:fld id="{F7021451-1387-4CA6-816F-3879F97B5CBC}" type="slidenum">
-              <a:rPr b="0" lang="en-US"/>
-              <a:t>26</a:t>
-            </a:fld>
-            <a:endParaRPr lang="en-US"/>
           </a:p>
         </p:txBody>
       </p:sp>
@@ -16244,20 +15407,20 @@
         </p:nvSpPr>
         <p:spPr>
           <a:xfrm>
-            <a:off x="5669280" y="4727448"/>
-            <a:ext cx="868680" cy="274320"/>
-          </a:xfrm>
-          <a:prstGeom prst="rect">
-            <a:avLst/>
-          </a:prstGeom>
-          <a:noFill/>
-          <a:ln/>
-        </p:spPr>
-        <p:txBody>
-          <a:bodyPr wrap="square" lIns="0" tIns="0" rIns="0" bIns="0" rtlCol="0" anchor="ctr"/>
-          <a:lstStyle/>
-          <a:p>
-            <a:pPr algn="r" indent="0" marL="0">
+            <a:off x="457200" y="4727448"/>
+            <a:ext cx="8229600" cy="274320"/>
+          </a:xfrm>
+          <a:prstGeom prst="rect">
+            <a:avLst/>
+          </a:prstGeom>
+          <a:noFill/>
+          <a:ln/>
+        </p:spPr>
+        <p:txBody>
+          <a:bodyPr wrap="square" lIns="0" tIns="0" rIns="0" bIns="0" rtlCol="0" anchor="ctr"/>
+          <a:lstStyle/>
+          <a:p>
+            <a:pPr algn="ctr" indent="0" marL="0">
               <a:buNone/>
             </a:pPr>
             <a:r>
@@ -16820,51 +15983,6 @@
               <a:t>執行日誌會把每一筆列出來。確認可用就留著，不可用就在格子裡清掉料號。</a:t>
             </a:r>
             <a:endParaRPr lang="en-US" sz="1150" dirty="0"/>
-          </a:p>
-        </p:txBody>
-      </p:sp>
-      <p:sp>
-        <p:nvSpPr>
-          <p:cNvPr id="25" name="Slide Number Placeholder 0"/>
-          <p:cNvSpPr>
-            <a:spLocks noGrp="1"/>
-          </p:cNvSpPr>
-          <p:nvPr>
-            <p:ph type="sldNum" sz="quarter" idx="4294967295"/>
-          </p:nvPr>
-        </p:nvSpPr>
-        <p:spPr>
-          <a:xfrm>
-            <a:off x="8412480" y="4727448"/>
-            <a:ext cx="457200" cy="274320"/>
-          </a:xfrm>
-          <a:prstGeom prst="rect">
-            <a:avLst/>
-          </a:prstGeom>
-          <a:extLst>
-            <a:ext uri="{C572A759-6A51-4108-AA02-DFA0A04FC94B}">
-              <ma14:wrappingTextBoxFlag xmlns:ma14="http://schemas.microsoft.com/office/mac/drawingml/2011/main" val="0"/>
-            </a:ext>
-          </a:extLst>
-        </p:spPr>
-        <p:txBody>
-          <a:bodyPr/>
-          <a:lstStyle>
-            <a:lvl1pPr>
-              <a:defRPr sz="900">
-                <a:solidFill>
-                  <a:srgbClr val="6B7180"/>
-                </a:solidFill>
-              </a:defRPr>
-            </a:lvl1pPr>
-          </a:lstStyle>
-          <a:p>
-            <a:pPr algn="r"/>
-            <a:fld id="{F7021451-1387-4CA6-816F-3879F97B5CBC}" type="slidenum">
-              <a:rPr b="0" lang="en-US"/>
-              <a:t>27</a:t>
-            </a:fld>
-            <a:endParaRPr lang="en-US"/>
           </a:p>
         </p:txBody>
       </p:sp>
@@ -17079,20 +16197,20 @@
         </p:nvSpPr>
         <p:spPr>
           <a:xfrm>
-            <a:off x="5669280" y="4727448"/>
-            <a:ext cx="868680" cy="274320"/>
-          </a:xfrm>
-          <a:prstGeom prst="rect">
-            <a:avLst/>
-          </a:prstGeom>
-          <a:noFill/>
-          <a:ln/>
-        </p:spPr>
-        <p:txBody>
-          <a:bodyPr wrap="square" lIns="0" tIns="0" rIns="0" bIns="0" rtlCol="0" anchor="ctr"/>
-          <a:lstStyle/>
-          <a:p>
-            <a:pPr algn="r" indent="0" marL="0">
+            <a:off x="457200" y="4727448"/>
+            <a:ext cx="8229600" cy="274320"/>
+          </a:xfrm>
+          <a:prstGeom prst="rect">
+            <a:avLst/>
+          </a:prstGeom>
+          <a:noFill/>
+          <a:ln/>
+        </p:spPr>
+        <p:txBody>
+          <a:bodyPr wrap="square" lIns="0" tIns="0" rIns="0" bIns="0" rtlCol="0" anchor="ctr"/>
+          <a:lstStyle/>
+          <a:p>
+            <a:pPr algn="ctr" indent="0" marL="0">
               <a:buNone/>
             </a:pPr>
             <a:r>
@@ -17925,51 +17043,6 @@
               <a:t>Total Qty 只加總主列，不會因為拆列而重複計算。</a:t>
             </a:r>
             <a:endParaRPr lang="en-US" sz="1100" dirty="0"/>
-          </a:p>
-        </p:txBody>
-      </p:sp>
-      <p:sp>
-        <p:nvSpPr>
-          <p:cNvPr id="25" name="Slide Number Placeholder 0"/>
-          <p:cNvSpPr>
-            <a:spLocks noGrp="1"/>
-          </p:cNvSpPr>
-          <p:nvPr>
-            <p:ph type="sldNum" sz="quarter" idx="4294967295"/>
-          </p:nvPr>
-        </p:nvSpPr>
-        <p:spPr>
-          <a:xfrm>
-            <a:off x="8412480" y="4727448"/>
-            <a:ext cx="457200" cy="274320"/>
-          </a:xfrm>
-          <a:prstGeom prst="rect">
-            <a:avLst/>
-          </a:prstGeom>
-          <a:extLst>
-            <a:ext uri="{C572A759-6A51-4108-AA02-DFA0A04FC94B}">
-              <ma14:wrappingTextBoxFlag xmlns:ma14="http://schemas.microsoft.com/office/mac/drawingml/2011/main" val="0"/>
-            </a:ext>
-          </a:extLst>
-        </p:spPr>
-        <p:txBody>
-          <a:bodyPr/>
-          <a:lstStyle>
-            <a:lvl1pPr>
-              <a:defRPr sz="900">
-                <a:solidFill>
-                  <a:srgbClr val="6B7180"/>
-                </a:solidFill>
-              </a:defRPr>
-            </a:lvl1pPr>
-          </a:lstStyle>
-          <a:p>
-            <a:pPr algn="r"/>
-            <a:fld id="{F7021451-1387-4CA6-816F-3879F97B5CBC}" type="slidenum">
-              <a:rPr b="0" lang="en-US"/>
-              <a:t>29</a:t>
-            </a:fld>
-            <a:endParaRPr lang="en-US"/>
           </a:p>
         </p:txBody>
       </p:sp>
@@ -18184,20 +17257,20 @@
         </p:nvSpPr>
         <p:spPr>
           <a:xfrm>
-            <a:off x="5669280" y="4727448"/>
-            <a:ext cx="868680" cy="274320"/>
-          </a:xfrm>
-          <a:prstGeom prst="rect">
-            <a:avLst/>
-          </a:prstGeom>
-          <a:noFill/>
-          <a:ln/>
-        </p:spPr>
-        <p:txBody>
-          <a:bodyPr wrap="square" lIns="0" tIns="0" rIns="0" bIns="0" rtlCol="0" anchor="ctr"/>
-          <a:lstStyle/>
-          <a:p>
-            <a:pPr algn="r" indent="0" marL="0">
+            <a:off x="457200" y="4727448"/>
+            <a:ext cx="8229600" cy="274320"/>
+          </a:xfrm>
+          <a:prstGeom prst="rect">
+            <a:avLst/>
+          </a:prstGeom>
+          <a:noFill/>
+          <a:ln/>
+        </p:spPr>
+        <p:txBody>
+          <a:bodyPr wrap="square" lIns="0" tIns="0" rIns="0" bIns="0" rtlCol="0" anchor="ctr"/>
+          <a:lstStyle/>
+          <a:p>
+            <a:pPr algn="ctr" indent="0" marL="0">
               <a:buNone/>
             </a:pPr>
             <a:r>
@@ -19259,51 +18332,6 @@
           </a:p>
         </p:txBody>
       </p:sp>
-      <p:sp>
-        <p:nvSpPr>
-          <p:cNvPr id="25" name="Slide Number Placeholder 0"/>
-          <p:cNvSpPr>
-            <a:spLocks noGrp="1"/>
-          </p:cNvSpPr>
-          <p:nvPr>
-            <p:ph type="sldNum" sz="quarter" idx="4294967295"/>
-          </p:nvPr>
-        </p:nvSpPr>
-        <p:spPr>
-          <a:xfrm>
-            <a:off x="8412480" y="4727448"/>
-            <a:ext cx="457200" cy="274320"/>
-          </a:xfrm>
-          <a:prstGeom prst="rect">
-            <a:avLst/>
-          </a:prstGeom>
-          <a:extLst>
-            <a:ext uri="{C572A759-6A51-4108-AA02-DFA0A04FC94B}">
-              <ma14:wrappingTextBoxFlag xmlns:ma14="http://schemas.microsoft.com/office/mac/drawingml/2011/main" val="0"/>
-            </a:ext>
-          </a:extLst>
-        </p:spPr>
-        <p:txBody>
-          <a:bodyPr/>
-          <a:lstStyle>
-            <a:lvl1pPr>
-              <a:defRPr sz="900">
-                <a:solidFill>
-                  <a:srgbClr val="6B7180"/>
-                </a:solidFill>
-              </a:defRPr>
-            </a:lvl1pPr>
-          </a:lstStyle>
-          <a:p>
-            <a:pPr algn="r"/>
-            <a:fld id="{F7021451-1387-4CA6-816F-3879F97B5CBC}" type="slidenum">
-              <a:rPr b="0" lang="en-US"/>
-              <a:t>30</a:t>
-            </a:fld>
-            <a:endParaRPr lang="en-US"/>
-          </a:p>
-        </p:txBody>
-      </p:sp>
     </p:spTree>
   </p:cSld>
   <p:clrMapOvr>
@@ -19515,20 +18543,20 @@
         </p:nvSpPr>
         <p:spPr>
           <a:xfrm>
-            <a:off x="5669280" y="4727448"/>
-            <a:ext cx="868680" cy="274320"/>
-          </a:xfrm>
-          <a:prstGeom prst="rect">
-            <a:avLst/>
-          </a:prstGeom>
-          <a:noFill/>
-          <a:ln/>
-        </p:spPr>
-        <p:txBody>
-          <a:bodyPr wrap="square" lIns="0" tIns="0" rIns="0" bIns="0" rtlCol="0" anchor="ctr"/>
-          <a:lstStyle/>
-          <a:p>
-            <a:pPr algn="r" indent="0" marL="0">
+            <a:off x="457200" y="4727448"/>
+            <a:ext cx="8229600" cy="274320"/>
+          </a:xfrm>
+          <a:prstGeom prst="rect">
+            <a:avLst/>
+          </a:prstGeom>
+          <a:noFill/>
+          <a:ln/>
+        </p:spPr>
+        <p:txBody>
+          <a:bodyPr wrap="square" lIns="0" tIns="0" rIns="0" bIns="0" rtlCol="0" anchor="ctr"/>
+          <a:lstStyle/>
+          <a:p>
+            <a:pPr algn="ctr" indent="0" marL="0">
               <a:buNone/>
             </a:pPr>
             <a:r>
@@ -20225,51 +19253,6 @@
               <a:t>v0.08 起副檔名強制 .xlsx，不會再有 .xls 的問題。</a:t>
             </a:r>
             <a:endParaRPr lang="en-US" sz="1050" dirty="0"/>
-          </a:p>
-        </p:txBody>
-      </p:sp>
-      <p:sp>
-        <p:nvSpPr>
-          <p:cNvPr id="25" name="Slide Number Placeholder 0"/>
-          <p:cNvSpPr>
-            <a:spLocks noGrp="1"/>
-          </p:cNvSpPr>
-          <p:nvPr>
-            <p:ph type="sldNum" sz="quarter" idx="4294967295"/>
-          </p:nvPr>
-        </p:nvSpPr>
-        <p:spPr>
-          <a:xfrm>
-            <a:off x="8412480" y="4727448"/>
-            <a:ext cx="457200" cy="274320"/>
-          </a:xfrm>
-          <a:prstGeom prst="rect">
-            <a:avLst/>
-          </a:prstGeom>
-          <a:extLst>
-            <a:ext uri="{C572A759-6A51-4108-AA02-DFA0A04FC94B}">
-              <ma14:wrappingTextBoxFlag xmlns:ma14="http://schemas.microsoft.com/office/mac/drawingml/2011/main" val="0"/>
-            </a:ext>
-          </a:extLst>
-        </p:spPr>
-        <p:txBody>
-          <a:bodyPr/>
-          <a:lstStyle>
-            <a:lvl1pPr>
-              <a:defRPr sz="900">
-                <a:solidFill>
-                  <a:srgbClr val="6B7180"/>
-                </a:solidFill>
-              </a:defRPr>
-            </a:lvl1pPr>
-          </a:lstStyle>
-          <a:p>
-            <a:pPr algn="r"/>
-            <a:fld id="{F7021451-1387-4CA6-816F-3879F97B5CBC}" type="slidenum">
-              <a:rPr b="0" lang="en-US"/>
-              <a:t>32</a:t>
-            </a:fld>
-            <a:endParaRPr lang="en-US"/>
           </a:p>
         </p:txBody>
       </p:sp>
@@ -20342,20 +19325,20 @@
         </p:nvSpPr>
         <p:spPr>
           <a:xfrm>
-            <a:off x="5669280" y="4727448"/>
-            <a:ext cx="868680" cy="274320"/>
-          </a:xfrm>
-          <a:prstGeom prst="rect">
-            <a:avLst/>
-          </a:prstGeom>
-          <a:noFill/>
-          <a:ln/>
-        </p:spPr>
-        <p:txBody>
-          <a:bodyPr wrap="square" lIns="0" tIns="0" rIns="0" bIns="0" rtlCol="0" anchor="ctr"/>
-          <a:lstStyle/>
-          <a:p>
-            <a:pPr algn="r" indent="0" marL="0">
+            <a:off x="457200" y="4727448"/>
+            <a:ext cx="8229600" cy="274320"/>
+          </a:xfrm>
+          <a:prstGeom prst="rect">
+            <a:avLst/>
+          </a:prstGeom>
+          <a:noFill/>
+          <a:ln/>
+        </p:spPr>
+        <p:txBody>
+          <a:bodyPr wrap="square" lIns="0" tIns="0" rIns="0" bIns="0" rtlCol="0" anchor="ctr"/>
+          <a:lstStyle/>
+          <a:p>
+            <a:pPr algn="ctr" indent="0" marL="0">
               <a:buNone/>
             </a:pPr>
             <a:r>
@@ -21089,51 +20072,6 @@
               <a:t>完整清單見 changelog_BOM_matcher_v0.10.txt</a:t>
             </a:r>
             <a:endParaRPr lang="en-US" sz="1100" dirty="0"/>
-          </a:p>
-        </p:txBody>
-      </p:sp>
-      <p:sp>
-        <p:nvSpPr>
-          <p:cNvPr id="25" name="Slide Number Placeholder 0"/>
-          <p:cNvSpPr>
-            <a:spLocks noGrp="1"/>
-          </p:cNvSpPr>
-          <p:nvPr>
-            <p:ph type="sldNum" sz="quarter" idx="4294967295"/>
-          </p:nvPr>
-        </p:nvSpPr>
-        <p:spPr>
-          <a:xfrm>
-            <a:off x="8412480" y="4727448"/>
-            <a:ext cx="457200" cy="274320"/>
-          </a:xfrm>
-          <a:prstGeom prst="rect">
-            <a:avLst/>
-          </a:prstGeom>
-          <a:extLst>
-            <a:ext uri="{C572A759-6A51-4108-AA02-DFA0A04FC94B}">
-              <ma14:wrappingTextBoxFlag xmlns:ma14="http://schemas.microsoft.com/office/mac/drawingml/2011/main" val="0"/>
-            </a:ext>
-          </a:extLst>
-        </p:spPr>
-        <p:txBody>
-          <a:bodyPr/>
-          <a:lstStyle>
-            <a:lvl1pPr>
-              <a:defRPr sz="900">
-                <a:solidFill>
-                  <a:srgbClr val="6B7180"/>
-                </a:solidFill>
-              </a:defRPr>
-            </a:lvl1pPr>
-          </a:lstStyle>
-          <a:p>
-            <a:pPr algn="r"/>
-            <a:fld id="{F7021451-1387-4CA6-816F-3879F97B5CBC}" type="slidenum">
-              <a:rPr b="0" lang="en-US"/>
-              <a:t>33</a:t>
-            </a:fld>
-            <a:endParaRPr lang="en-US"/>
           </a:p>
         </p:txBody>
       </p:sp>
@@ -21206,20 +20144,20 @@
         </p:nvSpPr>
         <p:spPr>
           <a:xfrm>
-            <a:off x="5669280" y="4727448"/>
-            <a:ext cx="868680" cy="274320"/>
-          </a:xfrm>
-          <a:prstGeom prst="rect">
-            <a:avLst/>
-          </a:prstGeom>
-          <a:noFill/>
-          <a:ln/>
-        </p:spPr>
-        <p:txBody>
-          <a:bodyPr wrap="square" lIns="0" tIns="0" rIns="0" bIns="0" rtlCol="0" anchor="ctr"/>
-          <a:lstStyle/>
-          <a:p>
-            <a:pPr algn="r" indent="0" marL="0">
+            <a:off x="457200" y="4727448"/>
+            <a:ext cx="8229600" cy="274320"/>
+          </a:xfrm>
+          <a:prstGeom prst="rect">
+            <a:avLst/>
+          </a:prstGeom>
+          <a:noFill/>
+          <a:ln/>
+        </p:spPr>
+        <p:txBody>
+          <a:bodyPr wrap="square" lIns="0" tIns="0" rIns="0" bIns="0" rtlCol="0" anchor="ctr"/>
+          <a:lstStyle/>
+          <a:p>
+            <a:pPr algn="ctr" indent="0" marL="0">
               <a:buNone/>
             </a:pPr>
             <a:r>
@@ -22138,51 +21076,6 @@
               <a:t>同一份輸入產出的 Excel 完全相同。</a:t>
             </a:r>
             <a:endParaRPr lang="en-US" sz="1100" dirty="0"/>
-          </a:p>
-        </p:txBody>
-      </p:sp>
-      <p:sp>
-        <p:nvSpPr>
-          <p:cNvPr id="25" name="Slide Number Placeholder 0"/>
-          <p:cNvSpPr>
-            <a:spLocks noGrp="1"/>
-          </p:cNvSpPr>
-          <p:nvPr>
-            <p:ph type="sldNum" sz="quarter" idx="4294967295"/>
-          </p:nvPr>
-        </p:nvSpPr>
-        <p:spPr>
-          <a:xfrm>
-            <a:off x="8412480" y="4727448"/>
-            <a:ext cx="457200" cy="274320"/>
-          </a:xfrm>
-          <a:prstGeom prst="rect">
-            <a:avLst/>
-          </a:prstGeom>
-          <a:extLst>
-            <a:ext uri="{C572A759-6A51-4108-AA02-DFA0A04FC94B}">
-              <ma14:wrappingTextBoxFlag xmlns:ma14="http://schemas.microsoft.com/office/mac/drawingml/2011/main" val="0"/>
-            </a:ext>
-          </a:extLst>
-        </p:spPr>
-        <p:txBody>
-          <a:bodyPr/>
-          <a:lstStyle>
-            <a:lvl1pPr>
-              <a:defRPr sz="900">
-                <a:solidFill>
-                  <a:srgbClr val="6B7180"/>
-                </a:solidFill>
-              </a:defRPr>
-            </a:lvl1pPr>
-          </a:lstStyle>
-          <a:p>
-            <a:pPr algn="r"/>
-            <a:fld id="{F7021451-1387-4CA6-816F-3879F97B5CBC}" type="slidenum">
-              <a:rPr b="0" lang="en-US"/>
-              <a:t>4</a:t>
-            </a:fld>
-            <a:endParaRPr lang="en-US"/>
           </a:p>
         </p:txBody>
       </p:sp>
@@ -22255,20 +21148,20 @@
         </p:nvSpPr>
         <p:spPr>
           <a:xfrm>
-            <a:off x="5669280" y="4727448"/>
-            <a:ext cx="868680" cy="274320"/>
-          </a:xfrm>
-          <a:prstGeom prst="rect">
-            <a:avLst/>
-          </a:prstGeom>
-          <a:noFill/>
-          <a:ln/>
-        </p:spPr>
-        <p:txBody>
-          <a:bodyPr wrap="square" lIns="0" tIns="0" rIns="0" bIns="0" rtlCol="0" anchor="ctr"/>
-          <a:lstStyle/>
-          <a:p>
-            <a:pPr algn="r" indent="0" marL="0">
+            <a:off x="457200" y="4727448"/>
+            <a:ext cx="8229600" cy="274320"/>
+          </a:xfrm>
+          <a:prstGeom prst="rect">
+            <a:avLst/>
+          </a:prstGeom>
+          <a:noFill/>
+          <a:ln/>
+        </p:spPr>
+        <p:txBody>
+          <a:bodyPr wrap="square" lIns="0" tIns="0" rIns="0" bIns="0" rtlCol="0" anchor="ctr"/>
+          <a:lstStyle/>
+          <a:p>
+            <a:pPr algn="ctr" indent="0" marL="0">
               <a:buNone/>
             </a:pPr>
             <a:r>
@@ -22983,51 +21876,6 @@
               <a:t>篩選鈕＋搜尋框，快速找到要確認的列</a:t>
             </a:r>
             <a:endParaRPr lang="en-US" sz="1100" dirty="0"/>
-          </a:p>
-        </p:txBody>
-      </p:sp>
-      <p:sp>
-        <p:nvSpPr>
-          <p:cNvPr id="25" name="Slide Number Placeholder 0"/>
-          <p:cNvSpPr>
-            <a:spLocks noGrp="1"/>
-          </p:cNvSpPr>
-          <p:nvPr>
-            <p:ph type="sldNum" sz="quarter" idx="4294967295"/>
-          </p:nvPr>
-        </p:nvSpPr>
-        <p:spPr>
-          <a:xfrm>
-            <a:off x="8412480" y="4727448"/>
-            <a:ext cx="457200" cy="274320"/>
-          </a:xfrm>
-          <a:prstGeom prst="rect">
-            <a:avLst/>
-          </a:prstGeom>
-          <a:extLst>
-            <a:ext uri="{C572A759-6A51-4108-AA02-DFA0A04FC94B}">
-              <ma14:wrappingTextBoxFlag xmlns:ma14="http://schemas.microsoft.com/office/mac/drawingml/2011/main" val="0"/>
-            </a:ext>
-          </a:extLst>
-        </p:spPr>
-        <p:txBody>
-          <a:bodyPr/>
-          <a:lstStyle>
-            <a:lvl1pPr>
-              <a:defRPr sz="900">
-                <a:solidFill>
-                  <a:srgbClr val="6B7180"/>
-                </a:solidFill>
-              </a:defRPr>
-            </a:lvl1pPr>
-          </a:lstStyle>
-          <a:p>
-            <a:pPr algn="r"/>
-            <a:fld id="{F7021451-1387-4CA6-816F-3879F97B5CBC}" type="slidenum">
-              <a:rPr b="0" lang="en-US"/>
-              <a:t>5</a:t>
-            </a:fld>
-            <a:endParaRPr lang="en-US"/>
           </a:p>
         </p:txBody>
       </p:sp>
@@ -23242,20 +22090,20 @@
         </p:nvSpPr>
         <p:spPr>
           <a:xfrm>
-            <a:off x="5669280" y="4727448"/>
-            <a:ext cx="868680" cy="274320"/>
-          </a:xfrm>
-          <a:prstGeom prst="rect">
-            <a:avLst/>
-          </a:prstGeom>
-          <a:noFill/>
-          <a:ln/>
-        </p:spPr>
-        <p:txBody>
-          <a:bodyPr wrap="square" lIns="0" tIns="0" rIns="0" bIns="0" rtlCol="0" anchor="ctr"/>
-          <a:lstStyle/>
-          <a:p>
-            <a:pPr algn="r" indent="0" marL="0">
+            <a:off x="457200" y="4727448"/>
+            <a:ext cx="8229600" cy="274320"/>
+          </a:xfrm>
+          <a:prstGeom prst="rect">
+            <a:avLst/>
+          </a:prstGeom>
+          <a:noFill/>
+          <a:ln/>
+        </p:spPr>
+        <p:txBody>
+          <a:bodyPr wrap="square" lIns="0" tIns="0" rIns="0" bIns="0" rtlCol="0" anchor="ctr"/>
+          <a:lstStyle/>
+          <a:p>
+            <a:pPr algn="ctr" indent="0" marL="0">
               <a:buNone/>
             </a:pPr>
             <a:r>
@@ -23774,51 +22622,6 @@
               <a:t>兩包的程式本體與範例資料完全相同，差別只在「套件怎麼來」。</a:t>
             </a:r>
             <a:endParaRPr lang="en-US" sz="1150" dirty="0"/>
-          </a:p>
-        </p:txBody>
-      </p:sp>
-      <p:sp>
-        <p:nvSpPr>
-          <p:cNvPr id="25" name="Slide Number Placeholder 0"/>
-          <p:cNvSpPr>
-            <a:spLocks noGrp="1"/>
-          </p:cNvSpPr>
-          <p:nvPr>
-            <p:ph type="sldNum" sz="quarter" idx="4294967295"/>
-          </p:nvPr>
-        </p:nvSpPr>
-        <p:spPr>
-          <a:xfrm>
-            <a:off x="8412480" y="4727448"/>
-            <a:ext cx="457200" cy="274320"/>
-          </a:xfrm>
-          <a:prstGeom prst="rect">
-            <a:avLst/>
-          </a:prstGeom>
-          <a:extLst>
-            <a:ext uri="{C572A759-6A51-4108-AA02-DFA0A04FC94B}">
-              <ma14:wrappingTextBoxFlag xmlns:ma14="http://schemas.microsoft.com/office/mac/drawingml/2011/main" val="0"/>
-            </a:ext>
-          </a:extLst>
-        </p:spPr>
-        <p:txBody>
-          <a:bodyPr/>
-          <a:lstStyle>
-            <a:lvl1pPr>
-              <a:defRPr sz="900">
-                <a:solidFill>
-                  <a:srgbClr val="6B7180"/>
-                </a:solidFill>
-              </a:defRPr>
-            </a:lvl1pPr>
-          </a:lstStyle>
-          <a:p>
-            <a:pPr algn="r"/>
-            <a:fld id="{F7021451-1387-4CA6-816F-3879F97B5CBC}" type="slidenum">
-              <a:rPr b="0" lang="en-US"/>
-              <a:t>7</a:t>
-            </a:fld>
-            <a:endParaRPr lang="en-US"/>
           </a:p>
         </p:txBody>
       </p:sp>
@@ -23891,20 +22694,20 @@
         </p:nvSpPr>
         <p:spPr>
           <a:xfrm>
-            <a:off x="5669280" y="4727448"/>
-            <a:ext cx="868680" cy="274320"/>
-          </a:xfrm>
-          <a:prstGeom prst="rect">
-            <a:avLst/>
-          </a:prstGeom>
-          <a:noFill/>
-          <a:ln/>
-        </p:spPr>
-        <p:txBody>
-          <a:bodyPr wrap="square" lIns="0" tIns="0" rIns="0" bIns="0" rtlCol="0" anchor="ctr"/>
-          <a:lstStyle/>
-          <a:p>
-            <a:pPr algn="r" indent="0" marL="0">
+            <a:off x="457200" y="4727448"/>
+            <a:ext cx="8229600" cy="274320"/>
+          </a:xfrm>
+          <a:prstGeom prst="rect">
+            <a:avLst/>
+          </a:prstGeom>
+          <a:noFill/>
+          <a:ln/>
+        </p:spPr>
+        <p:txBody>
+          <a:bodyPr wrap="square" lIns="0" tIns="0" rIns="0" bIns="0" rtlCol="0" anchor="ctr"/>
+          <a:lstStyle/>
+          <a:p>
+            <a:pPr algn="ctr" indent="0" marL="0">
               <a:buNone/>
             </a:pPr>
             <a:r>
@@ -24518,51 +23321,6 @@
               <a:t>出現 [--] 表示該介面不能用，其餘仍可運作。</a:t>
             </a:r>
             <a:endParaRPr lang="en-US" sz="1150" dirty="0"/>
-          </a:p>
-        </p:txBody>
-      </p:sp>
-      <p:sp>
-        <p:nvSpPr>
-          <p:cNvPr id="25" name="Slide Number Placeholder 0"/>
-          <p:cNvSpPr>
-            <a:spLocks noGrp="1"/>
-          </p:cNvSpPr>
-          <p:nvPr>
-            <p:ph type="sldNum" sz="quarter" idx="4294967295"/>
-          </p:nvPr>
-        </p:nvSpPr>
-        <p:spPr>
-          <a:xfrm>
-            <a:off x="8412480" y="4727448"/>
-            <a:ext cx="457200" cy="274320"/>
-          </a:xfrm>
-          <a:prstGeom prst="rect">
-            <a:avLst/>
-          </a:prstGeom>
-          <a:extLst>
-            <a:ext uri="{C572A759-6A51-4108-AA02-DFA0A04FC94B}">
-              <ma14:wrappingTextBoxFlag xmlns:ma14="http://schemas.microsoft.com/office/mac/drawingml/2011/main" val="0"/>
-            </a:ext>
-          </a:extLst>
-        </p:spPr>
-        <p:txBody>
-          <a:bodyPr/>
-          <a:lstStyle>
-            <a:lvl1pPr>
-              <a:defRPr sz="900">
-                <a:solidFill>
-                  <a:srgbClr val="6B7180"/>
-                </a:solidFill>
-              </a:defRPr>
-            </a:lvl1pPr>
-          </a:lstStyle>
-          <a:p>
-            <a:pPr algn="r"/>
-            <a:fld id="{F7021451-1387-4CA6-816F-3879F97B5CBC}" type="slidenum">
-              <a:rPr b="0" lang="en-US"/>
-              <a:t>8</a:t>
-            </a:fld>
-            <a:endParaRPr lang="en-US"/>
           </a:p>
         </p:txBody>
       </p:sp>

--- a/docs/BOM_Matcher_v0.10_操作SOP.pptx
+++ b/docs/BOM_Matcher_v0.10_操作SOP.pptx
@@ -139,27 +139,27 @@
   <p:extLst>
     <p:ext uri="{521415D9-36F7-43E2-AB2F-B90AF26B5E84}">
       <p14:sectionLst xmlns:p14="http://schemas.microsoft.com/office/powerpoint/2010/main">
-        <p14:section name="封面" id="{a697e8a3-070f-652c-eeb9-f3c1f0d1edb8}">
+        <p14:section name="封面" id="{49a84f9b-7d32-5aa3-c1a0-d2ff847c5c7b}">
           <p14:sldIdLst>
             <p14:sldId id="256"/>
             <p14:sldId id="257"/>
           </p14:sldIdLst>
         </p14:section>
-        <p14:section name="認識工具" id="{01399da9-1794-c63c-157e-9861010bb11d}">
+        <p14:section name="認識工具" id="{31ef7901-17ad-2dac-842c-bc67686310bb}">
           <p14:sldIdLst>
             <p14:sldId id="258"/>
             <p14:sldId id="259"/>
             <p14:sldId id="260"/>
           </p14:sldIdLst>
         </p14:section>
-        <p14:section name="安裝" id="{5d54fbc4-f81e-073a-1331-507ce75410ba}">
+        <p14:section name="安裝" id="{98b32cfd-1a7f-e9b4-cf9d-1d3958180ec8}">
           <p14:sldIdLst>
             <p14:sldId id="261"/>
             <p14:sldId id="262"/>
             <p14:sldId id="263"/>
           </p14:sldIdLst>
         </p14:section>
-        <p14:section name="C 案操作" id="{08890520-9eb4-c3ec-fb09-aa63f07a2673}">
+        <p14:section name="S 案操作" id="{2873f4a4-e31b-0ce3-b93d-d0fca210af32}">
           <p14:sldIdLst>
             <p14:sldId id="264"/>
             <p14:sldId id="265"/>
@@ -170,7 +170,7 @@
             <p14:sldId id="270"/>
           </p14:sldIdLst>
         </p14:section>
-        <p14:section name="D 案操作" id="{b4f77652-94d1-322d-d02d-26113106a63a}">
+        <p14:section name="W 案操作" id="{7935effb-ecb6-2578-17f9-44610cd58f2d}">
           <p14:sldIdLst>
             <p14:sldId id="271"/>
             <p14:sldId id="272"/>
@@ -180,28 +180,28 @@
             <p14:sldId id="276"/>
           </p14:sldIdLst>
         </p14:section>
-        <p14:section name="雙面板" id="{04b8d495-0fbb-197e-d267-72e9e66d843d}">
+        <p14:section name="雙面板" id="{ba7dd8f6-4591-6b20-5bd7-b4835baa987f}">
           <p14:sldIdLst>
             <p14:sldId id="277"/>
             <p14:sldId id="278"/>
             <p14:sldId id="279"/>
           </p14:sldIdLst>
         </p14:section>
-        <p14:section name="降壓選料" id="{18c8b087-a810-6628-a892-6b218a5d95e9}">
+        <p14:section name="降壓選料" id="{c824c9e2-087e-6841-c27f-d3219ef50d28}">
           <p14:sldIdLst>
             <p14:sldId id="280"/>
             <p14:sldId id="281"/>
             <p14:sldId id="282"/>
           </p14:sldIdLst>
         </p14:section>
-        <p14:section name="看懂輸出" id="{cc0ba255-2c0c-47c7-9c41-d68203670a86}">
+        <p14:section name="看懂輸出" id="{07cdcfcd-6422-4a2d-eefb-082ad28b08f3}">
           <p14:sldIdLst>
             <p14:sldId id="283"/>
             <p14:sldId id="284"/>
             <p14:sldId id="285"/>
           </p14:sldIdLst>
         </p14:section>
-        <p14:section name="疑難排解" id="{d52361f0-1f38-d004-de8f-29d609918013}">
+        <p14:section name="疑難排解" id="{70a4ef6e-5794-b23e-5363-66ba2079cfe9}">
           <p14:sldIdLst>
             <p14:sldId id="286"/>
             <p14:sldId id="287"/>
@@ -700,7 +700,7 @@
           <a:p>
             <a:r>
               <a:rPr lang="en-US" dirty="0"/>
-              <a:t>上面四個檔案由程式自動偵測，候選依最後修改時間排序，最新的排第一個　「雙面板（選填）」區塊：Location TOP/BOT 對照表、PCB 圖片（BOT 面）　綠色「雙面板模式」／藍色「單面板模式」告訴你這次會怎麼輸出　不對就按右邊的「瀏覽…」，或選「— 手動輸入路徑 —」自己貼路徑　輸出路徑預設在 output\，副檔名一律強制 .xlsx</a:t>
+              <a:t>上面四個檔案由程式自動偵測，候選依最後修改時間排序，最新的排第一個　「雙面板（選填）」區塊：Location TOP/BOT 對照表、PCB 圖片（BOT 面）　不對就按右邊的「瀏覽…」，或選「— 手動輸入路徑 —」自己貼路徑</a:t>
             </a:r>
             <a:endParaRPr lang="en-US" dirty="0"/>
           </a:p>
@@ -876,7 +876,7 @@
           <a:p>
             <a:r>
               <a:rPr lang="en-US" dirty="0"/>
-              <a:t>上方六個數字：總項次 / 輸出列數 / 命中 P/N / 未命中 / Knowledge / Total Qty　表格可直接改 P/N、RC/EC、Description、Qty、Location（帶 (T)/(B)，同 Excel）　改完按「儲存修改」才會帶進產出的 Excel　狀態欄：🔴 R8 降壓選料　⚠️ Location 未知　🟠🟡🟢 對應 Excel 色底</a:t>
+              <a:t>上方六個數字：總項次 / 輸出列數 / 命中 P/N / 未命中 / Knowledge / Total Qty　「⤢ 放大表格」一次看三倍的列數（151 列預設只看得到十幾列）　表格可直接改 P/N、RC/EC、Description、Qty、Location（帶 (T)/(B)，同 Excel）　狀態欄：🔴 R8 降壓選料　⚠️ Location 未知　🟠🟡🟢 對應 Excel 色底</a:t>
             </a:r>
             <a:endParaRPr lang="en-US" dirty="0"/>
           </a:p>
@@ -964,7 +964,7 @@
           <a:p>
             <a:r>
               <a:rPr lang="en-US" dirty="0"/>
-              <a:t>輸出路徑已經有同名檔時會出現黃色警告，要勾「確認覆蓋」才按得下去　按「▶ 產出 Excel」，檔案直接寫到輸出路徑　下方日誌會列出 PCB 圖片尺寸、實際輸出路徑、項數與 Total Qty　「⤓ 下載 xlsx」可另存一份到瀏覽器的下載目錄</a:t>
+              <a:t>上方灰框是這次要寫出去的完整路徑　已經有同名檔時會出現黃色警告　要勾「確認覆蓋」，「▶ 產出 Excel」才按得下去（沒勾是灰的）　下方日誌和 W 案同一套配色：✓ 綠、[請人工確認] / [警告] / [提示] 紅</a:t>
             </a:r>
             <a:endParaRPr lang="en-US" dirty="0"/>
           </a:p>
@@ -1140,7 +1140,7 @@
           <a:p>
             <a:r>
               <a:rPr lang="en-US" dirty="0"/>
-              <a:t>兩案共用同一份核心，同一份輸入產出的 Excel 完全相同。 Knowledge 與表頭的操作見 D 案步驟 3、4。</a:t>
+              <a:t>兩案共用同一份核心，同一份輸入產出的 Excel 完全相同。 Knowledge 與表頭的操作見 W 案步驟 3、4。</a:t>
             </a:r>
             <a:endParaRPr lang="en-US" dirty="0"/>
           </a:p>
@@ -1228,7 +1228,7 @@
           <a:p>
             <a:r>
               <a:rPr lang="en-US" dirty="0"/>
-              <a:t>D 案　原生視窗</a:t>
+              <a:t>W 案　原生視窗</a:t>
             </a:r>
             <a:endParaRPr lang="en-US" dirty="0"/>
           </a:p>
@@ -1316,7 +1316,7 @@
           <a:p>
             <a:r>
               <a:rPr lang="en-US" dirty="0"/>
-              <a:t>欄位與 C 案相同；輸入檔按「瀏覽…」，輸出路徑按「變更…」　Location TOP/BOT 對照表：選填，給了就切換成雙面板模式　PCB 圖片（BOT 面）：雙面板時提供兩張，圖片區自動切成上下兩半　「替代料拆列」打勾時一列只有一個 P/N；取消勾選會回到 a;b 單列格式　下方黑色區塊是執行日誌　按「▶ 執行比對」開始</a:t>
+              <a:t>欄位與 S 案相同；輸入檔按「瀏覽…」，輸出路徑按「變更…」　Location TOP/BOT 對照表：選填，給了就切換成雙面板模式　PCB 圖片（BOT 面）：雙面板時提供兩張，圖片區自動切成上下兩半　「替代料拆列」打勾時一列只有一個 P/N；取消勾選會回到 a;b 單列格式　下方黑色區塊是執行日誌　按「▶ 執行比對」開始</a:t>
             </a:r>
             <a:endParaRPr lang="en-US" dirty="0"/>
           </a:p>
@@ -1756,7 +1756,7 @@
           <a:p>
             <a:r>
               <a:rPr lang="en-US" dirty="0"/>
-              <a:t>確認輸出路徑後按「▶ 產出 Excel」　同名檔已經存在時會跳出確認視窗，按「取消」就不產出　「開啟輸出資料夾」會直接叫出檔案總管　檔案設定與比對結果頁的右上角也有「▶ 產出 E-BOM」，不必切到這一頁</a:t>
+              <a:t>輸出路徑可以直接在這裡改，或按右邊的「變更…」　確認無誤後按「▶ 產出 Excel」　「開啟輸出資料夾」會直接叫出檔案總管　同名檔會先跳確認視窗；按「取消」就不產出，確定覆蓋時日誌會留下紀錄</a:t>
             </a:r>
             <a:endParaRPr lang="en-US" dirty="0"/>
           </a:p>
@@ -2812,7 +2812,7 @@
           <a:p>
             <a:r>
               <a:rPr lang="en-US" dirty="0"/>
-              <a:t>雙擊 .bat 一閃就關　雙擊 .py 沒反應 / 閃退　C 案瀏覽器打不開　D 案視窗開不起來　說找不到零件資料庫　產出的檔案別的工具打不開</a:t>
+              <a:t>雙擊 .bat 一閃就關　雙擊 .py 沒反應 / 閃退　S 案瀏覽器打不開　W 案視窗開不起來　說找不到零件資料庫　產出的檔案別的工具打不開</a:t>
             </a:r>
             <a:endParaRPr lang="en-US" dirty="0"/>
           </a:p>
@@ -2988,7 +2988,7 @@
           <a:p>
             <a:r>
               <a:rPr lang="en-US" dirty="0"/>
-              <a:t>三種介面（CLI / C 案 / D 案）共用同一份核心邏輯， 同一份輸入產出的 Excel 完全相同。</a:t>
+              <a:t>三種介面（CLI / S 案 / W 案）共用同一份核心邏輯， 同一份輸入產出的 Excel 完全相同。</a:t>
             </a:r>
             <a:endParaRPr lang="en-US" dirty="0"/>
           </a:p>
@@ -3076,7 +3076,7 @@
           <a:p>
             <a:r>
               <a:rPr lang="en-US" dirty="0"/>
-              <a:t>run_CLI.bat：命令列；run_C_streamlit.bat：C 案．瀏覽器；run_D_webview.bat：D 案．原生視窗</a:t>
+              <a:t>run_CLI.bat：命令列；run_S_streamlit.bat：S 案．瀏覽器；run_W_webview.bat：W 案．原生視窗</a:t>
             </a:r>
             <a:endParaRPr lang="en-US" dirty="0"/>
           </a:p>
@@ -3428,7 +3428,7 @@
           <a:p>
             <a:r>
               <a:rPr lang="en-US" dirty="0"/>
-              <a:t>C 案　瀏覽器介面</a:t>
+              <a:t>S 案　瀏覽器介面</a:t>
             </a:r>
             <a:endParaRPr lang="en-US" dirty="0"/>
           </a:p>
@@ -4202,7 +4202,7 @@
       </p:sp>
       <p:pic>
         <p:nvPicPr>
-          <p:cNvPr id="4" name="shot" descr="F:\AI_BOM\docs\sop\shots\C_01_files.jpg">    </p:cNvPr>
+          <p:cNvPr id="4" name="shot" descr="F:\AI_BOM\docs\sop\shots\S_01_files.png">    </p:cNvPr>
           <p:cNvPicPr>
             <a:picLocks noChangeAspect="1"/>
           </p:cNvPicPr>
@@ -4253,7 +4253,190 @@
       </p:sp>
       <p:sp>
         <p:nvSpPr>
-          <p:cNvPr id="6" name="Text 3"/>
+          <p:cNvPr id="6" name="Shape 3"/>
+          <p:cNvSpPr/>
+          <p:nvPr/>
+        </p:nvSpPr>
+        <p:spPr>
+          <a:xfrm>
+            <a:off x="2545112" y="1729423"/>
+            <a:ext cx="169164" cy="169164"/>
+          </a:xfrm>
+          <a:prstGeom prst="ellipse">
+            <a:avLst/>
+          </a:prstGeom>
+          <a:solidFill>
+            <a:srgbClr val="D92D20"/>
+          </a:solidFill>
+          <a:ln w="19050">
+            <a:solidFill>
+              <a:srgbClr val="FFFFFF"/>
+            </a:solidFill>
+            <a:prstDash val="solid"/>
+          </a:ln>
+        </p:spPr>
+      </p:sp>
+      <p:sp>
+        <p:nvSpPr>
+          <p:cNvPr id="7" name="Text 4"/>
+          <p:cNvSpPr txBox="1"/>
+          <p:nvPr/>
+        </p:nvSpPr>
+        <p:spPr>
+          <a:xfrm>
+            <a:off x="2460530" y="1644840"/>
+            <a:ext cx="338328" cy="338328"/>
+          </a:xfrm>
+          <a:prstGeom prst="rect">
+            <a:avLst/>
+          </a:prstGeom>
+          <a:noFill/>
+          <a:ln/>
+        </p:spPr>
+        <p:txBody>
+          <a:bodyPr wrap="square" lIns="0" tIns="0" rIns="0" bIns="0" rtlCol="0" anchor="ctr"/>
+          <a:lstStyle/>
+          <a:p>
+            <a:pPr algn="ctr" indent="0" marL="0">
+              <a:buNone/>
+            </a:pPr>
+            <a:r>
+              <a:rPr lang="en-US" sz="850" b="1" dirty="0">
+                <a:solidFill>
+                  <a:srgbClr val="FFFFFF"/>
+                </a:solidFill>
+              </a:rPr>
+              <a:t>1</a:t>
+            </a:r>
+            <a:endParaRPr lang="en-US" sz="850" dirty="0"/>
+          </a:p>
+        </p:txBody>
+      </p:sp>
+      <p:sp>
+        <p:nvSpPr>
+          <p:cNvPr id="8" name="Shape 5"/>
+          <p:cNvSpPr/>
+          <p:nvPr/>
+        </p:nvSpPr>
+        <p:spPr>
+          <a:xfrm>
+            <a:off x="2148396" y="2889345"/>
+            <a:ext cx="169164" cy="169164"/>
+          </a:xfrm>
+          <a:prstGeom prst="ellipse">
+            <a:avLst/>
+          </a:prstGeom>
+          <a:solidFill>
+            <a:srgbClr val="D92D20"/>
+          </a:solidFill>
+          <a:ln w="19050">
+            <a:solidFill>
+              <a:srgbClr val="FFFFFF"/>
+            </a:solidFill>
+            <a:prstDash val="solid"/>
+          </a:ln>
+        </p:spPr>
+      </p:sp>
+      <p:sp>
+        <p:nvSpPr>
+          <p:cNvPr id="9" name="Text 6"/>
+          <p:cNvSpPr txBox="1"/>
+          <p:nvPr/>
+        </p:nvSpPr>
+        <p:spPr>
+          <a:xfrm>
+            <a:off x="2063814" y="2804763"/>
+            <a:ext cx="338328" cy="338328"/>
+          </a:xfrm>
+          <a:prstGeom prst="rect">
+            <a:avLst/>
+          </a:prstGeom>
+          <a:noFill/>
+          <a:ln/>
+        </p:spPr>
+        <p:txBody>
+          <a:bodyPr wrap="square" lIns="0" tIns="0" rIns="0" bIns="0" rtlCol="0" anchor="ctr"/>
+          <a:lstStyle/>
+          <a:p>
+            <a:pPr algn="ctr" indent="0" marL="0">
+              <a:buNone/>
+            </a:pPr>
+            <a:r>
+              <a:rPr lang="en-US" sz="850" b="1" dirty="0">
+                <a:solidFill>
+                  <a:srgbClr val="FFFFFF"/>
+                </a:solidFill>
+              </a:rPr>
+              <a:t>2</a:t>
+            </a:r>
+            <a:endParaRPr lang="en-US" sz="850" dirty="0"/>
+          </a:p>
+        </p:txBody>
+      </p:sp>
+      <p:sp>
+        <p:nvSpPr>
+          <p:cNvPr id="10" name="Shape 7"/>
+          <p:cNvSpPr/>
+          <p:nvPr/>
+        </p:nvSpPr>
+        <p:spPr>
+          <a:xfrm>
+            <a:off x="3474561" y="1680305"/>
+            <a:ext cx="169164" cy="169164"/>
+          </a:xfrm>
+          <a:prstGeom prst="ellipse">
+            <a:avLst/>
+          </a:prstGeom>
+          <a:solidFill>
+            <a:srgbClr val="D92D20"/>
+          </a:solidFill>
+          <a:ln w="19050">
+            <a:solidFill>
+              <a:srgbClr val="FFFFFF"/>
+            </a:solidFill>
+            <a:prstDash val="solid"/>
+          </a:ln>
+        </p:spPr>
+      </p:sp>
+      <p:sp>
+        <p:nvSpPr>
+          <p:cNvPr id="11" name="Text 8"/>
+          <p:cNvSpPr txBox="1"/>
+          <p:nvPr/>
+        </p:nvSpPr>
+        <p:spPr>
+          <a:xfrm>
+            <a:off x="3389979" y="1595723"/>
+            <a:ext cx="338328" cy="338328"/>
+          </a:xfrm>
+          <a:prstGeom prst="rect">
+            <a:avLst/>
+          </a:prstGeom>
+          <a:noFill/>
+          <a:ln/>
+        </p:spPr>
+        <p:txBody>
+          <a:bodyPr wrap="square" lIns="0" tIns="0" rIns="0" bIns="0" rtlCol="0" anchor="ctr"/>
+          <a:lstStyle/>
+          <a:p>
+            <a:pPr algn="ctr" indent="0" marL="0">
+              <a:buNone/>
+            </a:pPr>
+            <a:r>
+              <a:rPr lang="en-US" sz="850" b="1" dirty="0">
+                <a:solidFill>
+                  <a:srgbClr val="FFFFFF"/>
+                </a:solidFill>
+              </a:rPr>
+              <a:t>3</a:t>
+            </a:r>
+            <a:endParaRPr lang="en-US" sz="850" dirty="0"/>
+          </a:p>
+        </p:txBody>
+      </p:sp>
+      <p:sp>
+        <p:nvSpPr>
+          <p:cNvPr id="12" name="Text 9"/>
           <p:cNvSpPr txBox="1"/>
           <p:nvPr/>
         </p:nvSpPr>
@@ -4272,23 +4455,22 @@
           <a:bodyPr wrap="square" lIns="0" tIns="0" rIns="0" bIns="0" rtlCol="0" anchor="ctr"/>
           <a:lstStyle/>
           <a:p>
-            <a:pPr marL="342900" indent="-342900">
+            <a:pPr indent="0" marL="0">
               <a:lnSpc>
                 <a:spcPts val="1600"/>
               </a:lnSpc>
               <a:spcAft>
                 <a:spcPts val="900"/>
               </a:spcAft>
-              <a:buSzPct val="100000"/>
-              <a:buChar char="•"/>
-            </a:pPr>
-            <a:r>
-              <a:rPr lang="en-US" sz="1100" dirty="0">
-                <a:solidFill>
-                  <a:srgbClr val="3C4252"/>
-                </a:solidFill>
-              </a:rPr>
-              <a:t>上面四個檔案由程式自動偵測，候選依</a:t>
+              <a:buNone/>
+            </a:pPr>
+            <a:r>
+              <a:rPr lang="en-US" sz="1200" b="1" dirty="0">
+                <a:solidFill>
+                  <a:srgbClr val="D92D20"/>
+                </a:solidFill>
+              </a:rPr>
+              <a:t>① </a:t>
             </a:r>
             <a:pPr indent="0" marL="0">
               <a:lnSpc>
@@ -4300,12 +4482,12 @@
               <a:buNone/>
             </a:pPr>
             <a:r>
-              <a:rPr lang="en-US" sz="1100" b="1" dirty="0">
+              <a:rPr lang="en-US" sz="1100" dirty="0">
                 <a:solidFill>
                   <a:srgbClr val="3C4252"/>
                 </a:solidFill>
               </a:rPr>
-              <a:t>最後修改時間</a:t>
+              <a:t>上面四個檔案由程式自動偵測，候選依</a:t>
             </a:r>
             <a:pPr indent="0" marL="0">
               <a:lnSpc>
@@ -4317,25 +4499,21 @@
               <a:buNone/>
             </a:pPr>
             <a:r>
-              <a:rPr lang="en-US" sz="1100" dirty="0">
+              <a:rPr lang="en-US" sz="1100" b="1" dirty="0">
                 <a:solidFill>
                   <a:srgbClr val="3C4252"/>
                 </a:solidFill>
               </a:rPr>
-              <a:t>排序，最新的排第一個</a:t>
-            </a:r>
-            <a:endParaRPr lang="en-US" sz="1100" dirty="0"/>
-          </a:p>
-          <a:p>
-            <a:pPr marL="342900" indent="-342900">
+              <a:t>最後修改時間</a:t>
+            </a:r>
+            <a:pPr indent="0" marL="0">
               <a:lnSpc>
                 <a:spcPts val="1600"/>
               </a:lnSpc>
               <a:spcAft>
                 <a:spcPts val="900"/>
               </a:spcAft>
-              <a:buSzPct val="100000"/>
-              <a:buChar char="•"/>
+              <a:buNone/>
             </a:pPr>
             <a:r>
               <a:rPr lang="en-US" sz="1100" dirty="0">
@@ -4343,41 +4521,36 @@
                   <a:srgbClr val="3C4252"/>
                 </a:solidFill>
               </a:rPr>
-              <a:t>「雙面板（選填）」區塊：Location TOP/BOT 對照表、PCB 圖片（BOT 面）</a:t>
+              <a:t>排序，最新的排第一個</a:t>
             </a:r>
             <a:endParaRPr lang="en-US" sz="1100" dirty="0"/>
           </a:p>
           <a:p>
-            <a:pPr marL="342900" indent="-342900">
+            <a:pPr indent="0" marL="0">
               <a:lnSpc>
                 <a:spcPts val="1600"/>
               </a:lnSpc>
               <a:spcAft>
                 <a:spcPts val="900"/>
               </a:spcAft>
-              <a:buSzPct val="100000"/>
-              <a:buChar char="•"/>
-            </a:pPr>
-            <a:r>
-              <a:rPr lang="en-US" sz="1100" dirty="0">
-                <a:solidFill>
-                  <a:srgbClr val="3C4252"/>
-                </a:solidFill>
-              </a:rPr>
-              <a:t>綠色「雙面板模式」／藍色「單面板模式」告訴你這次會怎麼輸出</a:t>
-            </a:r>
-            <a:endParaRPr lang="en-US" sz="1100" dirty="0"/>
-          </a:p>
-          <a:p>
-            <a:pPr marL="342900" indent="-342900">
+              <a:buNone/>
+            </a:pPr>
+            <a:r>
+              <a:rPr lang="en-US" sz="1200" b="1" dirty="0">
+                <a:solidFill>
+                  <a:srgbClr val="D92D20"/>
+                </a:solidFill>
+              </a:rPr>
+              <a:t>② </a:t>
+            </a:r>
+            <a:pPr indent="0" marL="0">
               <a:lnSpc>
                 <a:spcPts val="1600"/>
               </a:lnSpc>
               <a:spcAft>
                 <a:spcPts val="900"/>
               </a:spcAft>
-              <a:buSzPct val="100000"/>
-              <a:buChar char="•"/>
+              <a:buNone/>
             </a:pPr>
             <a:r>
               <a:rPr lang="en-US" sz="1100" dirty="0">
@@ -4385,20 +4558,36 @@
                   <a:srgbClr val="3C4252"/>
                 </a:solidFill>
               </a:rPr>
-              <a:t>不對就按右邊的「瀏覽…」，或選「— 手動輸入路徑 —」自己貼路徑</a:t>
+              <a:t>「雙面板（選填）」區塊：Location TOP/BOT 對照表、PCB 圖片（BOT 面）</a:t>
             </a:r>
             <a:endParaRPr lang="en-US" sz="1100" dirty="0"/>
           </a:p>
           <a:p>
-            <a:pPr marL="342900" indent="-342900">
+            <a:pPr indent="0" marL="0">
               <a:lnSpc>
                 <a:spcPts val="1600"/>
               </a:lnSpc>
               <a:spcAft>
                 <a:spcPts val="900"/>
               </a:spcAft>
-              <a:buSzPct val="100000"/>
-              <a:buChar char="•"/>
+              <a:buNone/>
+            </a:pPr>
+            <a:r>
+              <a:rPr lang="en-US" sz="1200" b="1" dirty="0">
+                <a:solidFill>
+                  <a:srgbClr val="D92D20"/>
+                </a:solidFill>
+              </a:rPr>
+              <a:t>③ </a:t>
+            </a:r>
+            <a:pPr indent="0" marL="0">
+              <a:lnSpc>
+                <a:spcPts val="1600"/>
+              </a:lnSpc>
+              <a:spcAft>
+                <a:spcPts val="900"/>
+              </a:spcAft>
+              <a:buNone/>
             </a:pPr>
             <a:r>
               <a:rPr lang="en-US" sz="1100" dirty="0">
@@ -4406,7 +4595,7 @@
                   <a:srgbClr val="3C4252"/>
                 </a:solidFill>
               </a:rPr>
-              <a:t>輸出路徑預設在 output\，副檔名一律強制 .xlsx</a:t>
+              <a:t>不對就按右邊的「瀏覽…」，或選「— 手動輸入路徑 —」自己貼路徑</a:t>
             </a:r>
             <a:endParaRPr lang="en-US" sz="1100" dirty="0"/>
           </a:p>
@@ -4414,7 +4603,7 @@
       </p:sp>
       <p:sp>
         <p:nvSpPr>
-          <p:cNvPr id="7" name="warn"/>
+          <p:cNvPr id="13" name="warn"/>
           <p:cNvSpPr/>
           <p:nvPr/>
         </p:nvSpPr>
@@ -4441,7 +4630,7 @@
       </p:sp>
       <p:sp>
         <p:nvSpPr>
-          <p:cNvPr id="8" name="Shape 5"/>
+          <p:cNvPr id="14" name="Shape 11"/>
           <p:cNvSpPr/>
           <p:nvPr/>
         </p:nvSpPr>
@@ -4466,7 +4655,7 @@
       </p:sp>
       <p:sp>
         <p:nvSpPr>
-          <p:cNvPr id="9" name="Text 6"/>
+          <p:cNvPr id="15" name="Text 12"/>
           <p:cNvSpPr txBox="1"/>
           <p:nvPr/>
         </p:nvSpPr>
@@ -4502,7 +4691,7 @@
       </p:sp>
       <p:sp>
         <p:nvSpPr>
-          <p:cNvPr id="10" name="Text 7"/>
+          <p:cNvPr id="16" name="Text 13"/>
           <p:cNvSpPr txBox="1"/>
           <p:nvPr/>
         </p:nvSpPr>
@@ -4533,7 +4722,7 @@
                   <a:srgbClr val="6B4413"/>
                 </a:solidFill>
               </a:rPr>
-              <a:t>確認 Text BOM 是你這次要跑的那一支。</a:t>
+              <a:t>綠色「雙面板模式」／藍色「單面板模式」會告訴你這次會怎麼輸出；輸出路徑預設在 output\，副檔名強制 .xlsx。</a:t>
             </a:r>
             <a:endParaRPr lang="en-US" sz="1000" dirty="0"/>
           </a:p>
@@ -4550,7 +4739,7 @@
                   <a:srgbClr val="6B4413"/>
                 </a:solidFill>
               </a:rPr>
-              <a:t>選錯檔案是最常見的失誤。</a:t>
+              <a:t>確認 Text BOM 是你這次要跑的那一支 —— 選錯檔案是最常見的失誤。</a:t>
             </a:r>
             <a:endParaRPr lang="en-US" sz="1000" dirty="0"/>
           </a:p>
@@ -4662,7 +4851,7 @@
       </p:sp>
       <p:pic>
         <p:nvPicPr>
-          <p:cNvPr id="4" name="shot" descr="F:\AI_BOM\docs\sop\shots\C_02_browser.jpg">    </p:cNvPr>
+          <p:cNvPr id="4" name="shot" descr="F:\AI_BOM\docs\sop\shots\S_02_browser.png">    </p:cNvPr>
           <p:cNvPicPr>
             <a:picLocks noChangeAspect="1"/>
           </p:cNvPicPr>
@@ -4713,7 +4902,251 @@
       </p:sp>
       <p:sp>
         <p:nvSpPr>
-          <p:cNvPr id="6" name="Text 3"/>
+          <p:cNvPr id="6" name="Shape 3"/>
+          <p:cNvSpPr/>
+          <p:nvPr/>
+        </p:nvSpPr>
+        <p:spPr>
+          <a:xfrm>
+            <a:off x="2133283" y="1937226"/>
+            <a:ext cx="169164" cy="169164"/>
+          </a:xfrm>
+          <a:prstGeom prst="ellipse">
+            <a:avLst/>
+          </a:prstGeom>
+          <a:solidFill>
+            <a:srgbClr val="D92D20"/>
+          </a:solidFill>
+          <a:ln w="19050">
+            <a:solidFill>
+              <a:srgbClr val="FFFFFF"/>
+            </a:solidFill>
+            <a:prstDash val="solid"/>
+          </a:ln>
+        </p:spPr>
+      </p:sp>
+      <p:sp>
+        <p:nvSpPr>
+          <p:cNvPr id="7" name="Text 4"/>
+          <p:cNvSpPr txBox="1"/>
+          <p:nvPr/>
+        </p:nvSpPr>
+        <p:spPr>
+          <a:xfrm>
+            <a:off x="2048701" y="1852644"/>
+            <a:ext cx="338328" cy="338328"/>
+          </a:xfrm>
+          <a:prstGeom prst="rect">
+            <a:avLst/>
+          </a:prstGeom>
+          <a:noFill/>
+          <a:ln/>
+        </p:spPr>
+        <p:txBody>
+          <a:bodyPr wrap="square" lIns="0" tIns="0" rIns="0" bIns="0" rtlCol="0" anchor="ctr"/>
+          <a:lstStyle/>
+          <a:p>
+            <a:pPr algn="ctr" indent="0" marL="0">
+              <a:buNone/>
+            </a:pPr>
+            <a:r>
+              <a:rPr lang="en-US" sz="850" b="1" dirty="0">
+                <a:solidFill>
+                  <a:srgbClr val="FFFFFF"/>
+                </a:solidFill>
+              </a:rPr>
+              <a:t>1</a:t>
+            </a:r>
+            <a:endParaRPr lang="en-US" sz="850" dirty="0"/>
+          </a:p>
+        </p:txBody>
+      </p:sp>
+      <p:sp>
+        <p:nvSpPr>
+          <p:cNvPr id="8" name="Shape 5"/>
+          <p:cNvSpPr/>
+          <p:nvPr/>
+        </p:nvSpPr>
+        <p:spPr>
+          <a:xfrm>
+            <a:off x="3157188" y="2677763"/>
+            <a:ext cx="169164" cy="169164"/>
+          </a:xfrm>
+          <a:prstGeom prst="ellipse">
+            <a:avLst/>
+          </a:prstGeom>
+          <a:solidFill>
+            <a:srgbClr val="D92D20"/>
+          </a:solidFill>
+          <a:ln w="19050">
+            <a:solidFill>
+              <a:srgbClr val="FFFFFF"/>
+            </a:solidFill>
+            <a:prstDash val="solid"/>
+          </a:ln>
+        </p:spPr>
+      </p:sp>
+      <p:sp>
+        <p:nvSpPr>
+          <p:cNvPr id="9" name="Text 6"/>
+          <p:cNvSpPr txBox="1"/>
+          <p:nvPr/>
+        </p:nvSpPr>
+        <p:spPr>
+          <a:xfrm>
+            <a:off x="3072606" y="2593181"/>
+            <a:ext cx="338328" cy="338328"/>
+          </a:xfrm>
+          <a:prstGeom prst="rect">
+            <a:avLst/>
+          </a:prstGeom>
+          <a:noFill/>
+          <a:ln/>
+        </p:spPr>
+        <p:txBody>
+          <a:bodyPr wrap="square" lIns="0" tIns="0" rIns="0" bIns="0" rtlCol="0" anchor="ctr"/>
+          <a:lstStyle/>
+          <a:p>
+            <a:pPr algn="ctr" indent="0" marL="0">
+              <a:buNone/>
+            </a:pPr>
+            <a:r>
+              <a:rPr lang="en-US" sz="850" b="1" dirty="0">
+                <a:solidFill>
+                  <a:srgbClr val="FFFFFF"/>
+                </a:solidFill>
+              </a:rPr>
+              <a:t>2</a:t>
+            </a:r>
+            <a:endParaRPr lang="en-US" sz="850" dirty="0"/>
+          </a:p>
+        </p:txBody>
+      </p:sp>
+      <p:sp>
+        <p:nvSpPr>
+          <p:cNvPr id="10" name="Shape 7"/>
+          <p:cNvSpPr/>
+          <p:nvPr/>
+        </p:nvSpPr>
+        <p:spPr>
+          <a:xfrm>
+            <a:off x="2140839" y="2179034"/>
+            <a:ext cx="169164" cy="169164"/>
+          </a:xfrm>
+          <a:prstGeom prst="ellipse">
+            <a:avLst/>
+          </a:prstGeom>
+          <a:solidFill>
+            <a:srgbClr val="D92D20"/>
+          </a:solidFill>
+          <a:ln w="19050">
+            <a:solidFill>
+              <a:srgbClr val="FFFFFF"/>
+            </a:solidFill>
+            <a:prstDash val="solid"/>
+          </a:ln>
+        </p:spPr>
+      </p:sp>
+      <p:sp>
+        <p:nvSpPr>
+          <p:cNvPr id="11" name="Text 8"/>
+          <p:cNvSpPr txBox="1"/>
+          <p:nvPr/>
+        </p:nvSpPr>
+        <p:spPr>
+          <a:xfrm>
+            <a:off x="2056257" y="2094452"/>
+            <a:ext cx="338328" cy="338328"/>
+          </a:xfrm>
+          <a:prstGeom prst="rect">
+            <a:avLst/>
+          </a:prstGeom>
+          <a:noFill/>
+          <a:ln/>
+        </p:spPr>
+        <p:txBody>
+          <a:bodyPr wrap="square" lIns="0" tIns="0" rIns="0" bIns="0" rtlCol="0" anchor="ctr"/>
+          <a:lstStyle/>
+          <a:p>
+            <a:pPr algn="ctr" indent="0" marL="0">
+              <a:buNone/>
+            </a:pPr>
+            <a:r>
+              <a:rPr lang="en-US" sz="850" b="1" dirty="0">
+                <a:solidFill>
+                  <a:srgbClr val="FFFFFF"/>
+                </a:solidFill>
+              </a:rPr>
+              <a:t>3</a:t>
+            </a:r>
+            <a:endParaRPr lang="en-US" sz="850" dirty="0"/>
+          </a:p>
+        </p:txBody>
+      </p:sp>
+      <p:sp>
+        <p:nvSpPr>
+          <p:cNvPr id="12" name="Shape 9"/>
+          <p:cNvSpPr/>
+          <p:nvPr/>
+        </p:nvSpPr>
+        <p:spPr>
+          <a:xfrm>
+            <a:off x="2552668" y="1729423"/>
+            <a:ext cx="169164" cy="169164"/>
+          </a:xfrm>
+          <a:prstGeom prst="ellipse">
+            <a:avLst/>
+          </a:prstGeom>
+          <a:solidFill>
+            <a:srgbClr val="D92D20"/>
+          </a:solidFill>
+          <a:ln w="19050">
+            <a:solidFill>
+              <a:srgbClr val="FFFFFF"/>
+            </a:solidFill>
+            <a:prstDash val="solid"/>
+          </a:ln>
+        </p:spPr>
+      </p:sp>
+      <p:sp>
+        <p:nvSpPr>
+          <p:cNvPr id="13" name="Text 10"/>
+          <p:cNvSpPr txBox="1"/>
+          <p:nvPr/>
+        </p:nvSpPr>
+        <p:spPr>
+          <a:xfrm>
+            <a:off x="2468086" y="1644840"/>
+            <a:ext cx="338328" cy="338328"/>
+          </a:xfrm>
+          <a:prstGeom prst="rect">
+            <a:avLst/>
+          </a:prstGeom>
+          <a:noFill/>
+          <a:ln/>
+        </p:spPr>
+        <p:txBody>
+          <a:bodyPr wrap="square" lIns="0" tIns="0" rIns="0" bIns="0" rtlCol="0" anchor="ctr"/>
+          <a:lstStyle/>
+          <a:p>
+            <a:pPr algn="ctr" indent="0" marL="0">
+              <a:buNone/>
+            </a:pPr>
+            <a:r>
+              <a:rPr lang="en-US" sz="850" b="1" dirty="0">
+                <a:solidFill>
+                  <a:srgbClr val="FFFFFF"/>
+                </a:solidFill>
+              </a:rPr>
+              <a:t>4</a:t>
+            </a:r>
+            <a:endParaRPr lang="en-US" sz="850" dirty="0"/>
+          </a:p>
+        </p:txBody>
+      </p:sp>
+      <p:sp>
+        <p:nvSpPr>
+          <p:cNvPr id="14" name="Text 11"/>
           <p:cNvSpPr txBox="1"/>
           <p:nvPr/>
         </p:nvSpPr>
@@ -4732,36 +5165,31 @@
           <a:bodyPr wrap="square" lIns="0" tIns="0" rIns="0" bIns="0" rtlCol="0" anchor="ctr"/>
           <a:lstStyle/>
           <a:p>
-            <a:pPr marL="342900" indent="-342900">
+            <a:pPr indent="0" marL="0">
               <a:lnSpc>
                 <a:spcPts val="1600"/>
               </a:lnSpc>
               <a:spcAft>
                 <a:spcPts val="900"/>
               </a:spcAft>
-              <a:buSzPct val="100000"/>
-              <a:buChar char="•"/>
-            </a:pPr>
-            <a:r>
-              <a:rPr lang="en-US" sz="1100" dirty="0">
-                <a:solidFill>
-                  <a:srgbClr val="3C4252"/>
-                </a:solidFill>
-              </a:rPr>
-              <a:t>展開「📂 目錄瀏覽器」就能自己翻資料夾</a:t>
-            </a:r>
-            <a:endParaRPr lang="en-US" sz="1100" dirty="0"/>
-          </a:p>
-          <a:p>
-            <a:pPr marL="342900" indent="-342900">
+              <a:buNone/>
+            </a:pPr>
+            <a:r>
+              <a:rPr lang="en-US" sz="1200" b="1" dirty="0">
+                <a:solidFill>
+                  <a:srgbClr val="D92D20"/>
+                </a:solidFill>
+              </a:rPr>
+              <a:t>① </a:t>
+            </a:r>
+            <a:pPr indent="0" marL="0">
               <a:lnSpc>
                 <a:spcPts val="1600"/>
               </a:lnSpc>
               <a:spcAft>
                 <a:spcPts val="900"/>
               </a:spcAft>
-              <a:buSzPct val="100000"/>
-              <a:buChar char="•"/>
+              <a:buNone/>
             </a:pPr>
             <a:r>
               <a:rPr lang="en-US" sz="1100" dirty="0">
@@ -4769,41 +5197,36 @@
                   <a:srgbClr val="3C4252"/>
                 </a:solidFill>
               </a:rPr>
-              <a:t>左邊是子資料夾，右邊是符合副檔名的檔案，後面附最後修改日期</a:t>
+              <a:t>展開「📂 目錄瀏覽器」就能自己翻資料夾</a:t>
             </a:r>
             <a:endParaRPr lang="en-US" sz="1100" dirty="0"/>
           </a:p>
           <a:p>
-            <a:pPr marL="342900" indent="-342900">
+            <a:pPr indent="0" marL="0">
               <a:lnSpc>
                 <a:spcPts val="1600"/>
               </a:lnSpc>
               <a:spcAft>
                 <a:spcPts val="900"/>
               </a:spcAft>
-              <a:buSzPct val="100000"/>
-              <a:buChar char="•"/>
-            </a:pPr>
-            <a:r>
-              <a:rPr lang="en-US" sz="1100" dirty="0">
-                <a:solidFill>
-                  <a:srgbClr val="3C4252"/>
-                </a:solidFill>
-              </a:rPr>
-              <a:t>「⬆ 上一層」往上、「🏠 程式目錄」跳回程式所在位置</a:t>
-            </a:r>
-            <a:endParaRPr lang="en-US" sz="1100" dirty="0"/>
-          </a:p>
-          <a:p>
-            <a:pPr marL="342900" indent="-342900">
+              <a:buNone/>
+            </a:pPr>
+            <a:r>
+              <a:rPr lang="en-US" sz="1200" b="1" dirty="0">
+                <a:solidFill>
+                  <a:srgbClr val="D92D20"/>
+                </a:solidFill>
+              </a:rPr>
+              <a:t>② </a:t>
+            </a:r>
+            <a:pPr indent="0" marL="0">
               <a:lnSpc>
                 <a:spcPts val="1600"/>
               </a:lnSpc>
               <a:spcAft>
                 <a:spcPts val="900"/>
               </a:spcAft>
-              <a:buSzPct val="100000"/>
-              <a:buChar char="•"/>
+              <a:buNone/>
             </a:pPr>
             <a:r>
               <a:rPr lang="en-US" sz="1100" dirty="0">
@@ -4811,6 +5234,80 @@
                   <a:srgbClr val="3C4252"/>
                 </a:solidFill>
               </a:rPr>
+              <a:t>左邊是子資料夾，右邊是符合副檔名的檔案，後面附最後修改日期</a:t>
+            </a:r>
+            <a:endParaRPr lang="en-US" sz="1100" dirty="0"/>
+          </a:p>
+          <a:p>
+            <a:pPr indent="0" marL="0">
+              <a:lnSpc>
+                <a:spcPts val="1600"/>
+              </a:lnSpc>
+              <a:spcAft>
+                <a:spcPts val="900"/>
+              </a:spcAft>
+              <a:buNone/>
+            </a:pPr>
+            <a:r>
+              <a:rPr lang="en-US" sz="1200" b="1" dirty="0">
+                <a:solidFill>
+                  <a:srgbClr val="D92D20"/>
+                </a:solidFill>
+              </a:rPr>
+              <a:t>③ </a:t>
+            </a:r>
+            <a:pPr indent="0" marL="0">
+              <a:lnSpc>
+                <a:spcPts val="1600"/>
+              </a:lnSpc>
+              <a:spcAft>
+                <a:spcPts val="900"/>
+              </a:spcAft>
+              <a:buNone/>
+            </a:pPr>
+            <a:r>
+              <a:rPr lang="en-US" sz="1100" dirty="0">
+                <a:solidFill>
+                  <a:srgbClr val="3C4252"/>
+                </a:solidFill>
+              </a:rPr>
+              <a:t>「⬆ 上一層」往上、「🏠 程式目錄」跳回程式所在位置</a:t>
+            </a:r>
+            <a:endParaRPr lang="en-US" sz="1100" dirty="0"/>
+          </a:p>
+          <a:p>
+            <a:pPr indent="0" marL="0">
+              <a:lnSpc>
+                <a:spcPts val="1600"/>
+              </a:lnSpc>
+              <a:spcAft>
+                <a:spcPts val="900"/>
+              </a:spcAft>
+              <a:buNone/>
+            </a:pPr>
+            <a:r>
+              <a:rPr lang="en-US" sz="1200" b="1" dirty="0">
+                <a:solidFill>
+                  <a:srgbClr val="D92D20"/>
+                </a:solidFill>
+              </a:rPr>
+              <a:t>④ </a:t>
+            </a:r>
+            <a:pPr indent="0" marL="0">
+              <a:lnSpc>
+                <a:spcPts val="1600"/>
+              </a:lnSpc>
+              <a:spcAft>
+                <a:spcPts val="900"/>
+              </a:spcAft>
+              <a:buNone/>
+            </a:pPr>
+            <a:r>
+              <a:rPr lang="en-US" sz="1100" dirty="0">
+                <a:solidFill>
+                  <a:srgbClr val="3C4252"/>
+                </a:solidFill>
+              </a:rPr>
               <a:t>點檔名即選取，上方的下拉選單會跟著換</a:t>
             </a:r>
             <a:endParaRPr lang="en-US" sz="1100" dirty="0"/>
@@ -4819,7 +5316,7 @@
       </p:sp>
       <p:sp>
         <p:nvSpPr>
-          <p:cNvPr id="7" name="warn"/>
+          <p:cNvPr id="15" name="warn"/>
           <p:cNvSpPr/>
           <p:nvPr/>
         </p:nvSpPr>
@@ -4846,7 +5343,7 @@
       </p:sp>
       <p:sp>
         <p:nvSpPr>
-          <p:cNvPr id="8" name="Shape 5"/>
+          <p:cNvPr id="16" name="Shape 13"/>
           <p:cNvSpPr/>
           <p:nvPr/>
         </p:nvSpPr>
@@ -4871,7 +5368,7 @@
       </p:sp>
       <p:sp>
         <p:nvSpPr>
-          <p:cNvPr id="9" name="Text 6"/>
+          <p:cNvPr id="17" name="Text 14"/>
           <p:cNvSpPr txBox="1"/>
           <p:nvPr/>
         </p:nvSpPr>
@@ -4907,7 +5404,7 @@
       </p:sp>
       <p:sp>
         <p:nvSpPr>
-          <p:cNvPr id="10" name="Text 7"/>
+          <p:cNvPr id="18" name="Text 15"/>
           <p:cNvSpPr txBox="1"/>
           <p:nvPr/>
         </p:nvSpPr>
@@ -5067,7 +5564,7 @@
       </p:sp>
       <p:pic>
         <p:nvPicPr>
-          <p:cNvPr id="4" name="shot" descr="F:\AI_BOM\docs\sop\shots\C_03_rows.jpg">    </p:cNvPr>
+          <p:cNvPr id="4" name="shot" descr="F:\AI_BOM\docs\sop\shots\S_03_rows.png">    </p:cNvPr>
           <p:cNvPicPr>
             <a:picLocks noChangeAspect="1"/>
           </p:cNvPicPr>
@@ -5118,7 +5615,251 @@
       </p:sp>
       <p:sp>
         <p:nvSpPr>
-          <p:cNvPr id="6" name="Text 3"/>
+          <p:cNvPr id="6" name="Shape 3"/>
+          <p:cNvSpPr/>
+          <p:nvPr/>
+        </p:nvSpPr>
+        <p:spPr>
+          <a:xfrm>
+            <a:off x="2526221" y="1714310"/>
+            <a:ext cx="169164" cy="169164"/>
+          </a:xfrm>
+          <a:prstGeom prst="ellipse">
+            <a:avLst/>
+          </a:prstGeom>
+          <a:solidFill>
+            <a:srgbClr val="D92D20"/>
+          </a:solidFill>
+          <a:ln w="19050">
+            <a:solidFill>
+              <a:srgbClr val="FFFFFF"/>
+            </a:solidFill>
+            <a:prstDash val="solid"/>
+          </a:ln>
+        </p:spPr>
+      </p:sp>
+      <p:sp>
+        <p:nvSpPr>
+          <p:cNvPr id="7" name="Text 4"/>
+          <p:cNvSpPr txBox="1"/>
+          <p:nvPr/>
+        </p:nvSpPr>
+        <p:spPr>
+          <a:xfrm>
+            <a:off x="2441639" y="1629728"/>
+            <a:ext cx="338328" cy="338328"/>
+          </a:xfrm>
+          <a:prstGeom prst="rect">
+            <a:avLst/>
+          </a:prstGeom>
+          <a:noFill/>
+          <a:ln/>
+        </p:spPr>
+        <p:txBody>
+          <a:bodyPr wrap="square" lIns="0" tIns="0" rIns="0" bIns="0" rtlCol="0" anchor="ctr"/>
+          <a:lstStyle/>
+          <a:p>
+            <a:pPr algn="ctr" indent="0" marL="0">
+              <a:buNone/>
+            </a:pPr>
+            <a:r>
+              <a:rPr lang="en-US" sz="850" b="1" dirty="0">
+                <a:solidFill>
+                  <a:srgbClr val="FFFFFF"/>
+                </a:solidFill>
+              </a:rPr>
+              <a:t>1</a:t>
+            </a:r>
+            <a:endParaRPr lang="en-US" sz="850" dirty="0"/>
+          </a:p>
+        </p:txBody>
+      </p:sp>
+      <p:sp>
+        <p:nvSpPr>
+          <p:cNvPr id="8" name="Shape 5"/>
+          <p:cNvSpPr/>
+          <p:nvPr/>
+        </p:nvSpPr>
+        <p:spPr>
+          <a:xfrm>
+            <a:off x="2035048" y="2077022"/>
+            <a:ext cx="169164" cy="169164"/>
+          </a:xfrm>
+          <a:prstGeom prst="ellipse">
+            <a:avLst/>
+          </a:prstGeom>
+          <a:solidFill>
+            <a:srgbClr val="D92D20"/>
+          </a:solidFill>
+          <a:ln w="19050">
+            <a:solidFill>
+              <a:srgbClr val="FFFFFF"/>
+            </a:solidFill>
+            <a:prstDash val="solid"/>
+          </a:ln>
+        </p:spPr>
+      </p:sp>
+      <p:sp>
+        <p:nvSpPr>
+          <p:cNvPr id="9" name="Text 6"/>
+          <p:cNvSpPr txBox="1"/>
+          <p:nvPr/>
+        </p:nvSpPr>
+        <p:spPr>
+          <a:xfrm>
+            <a:off x="1950466" y="1992440"/>
+            <a:ext cx="338328" cy="338328"/>
+          </a:xfrm>
+          <a:prstGeom prst="rect">
+            <a:avLst/>
+          </a:prstGeom>
+          <a:noFill/>
+          <a:ln/>
+        </p:spPr>
+        <p:txBody>
+          <a:bodyPr wrap="square" lIns="0" tIns="0" rIns="0" bIns="0" rtlCol="0" anchor="ctr"/>
+          <a:lstStyle/>
+          <a:p>
+            <a:pPr algn="ctr" indent="0" marL="0">
+              <a:buNone/>
+            </a:pPr>
+            <a:r>
+              <a:rPr lang="en-US" sz="850" b="1" dirty="0">
+                <a:solidFill>
+                  <a:srgbClr val="FFFFFF"/>
+                </a:solidFill>
+              </a:rPr>
+              <a:t>2</a:t>
+            </a:r>
+            <a:endParaRPr lang="en-US" sz="850" dirty="0"/>
+          </a:p>
+        </p:txBody>
+      </p:sp>
+      <p:sp>
+        <p:nvSpPr>
+          <p:cNvPr id="10" name="Shape 7"/>
+          <p:cNvSpPr/>
+          <p:nvPr/>
+        </p:nvSpPr>
+        <p:spPr>
+          <a:xfrm>
+            <a:off x="4169759" y="2866676"/>
+            <a:ext cx="169164" cy="169164"/>
+          </a:xfrm>
+          <a:prstGeom prst="ellipse">
+            <a:avLst/>
+          </a:prstGeom>
+          <a:solidFill>
+            <a:srgbClr val="D92D20"/>
+          </a:solidFill>
+          <a:ln w="19050">
+            <a:solidFill>
+              <a:srgbClr val="FFFFFF"/>
+            </a:solidFill>
+            <a:prstDash val="solid"/>
+          </a:ln>
+        </p:spPr>
+      </p:sp>
+      <p:sp>
+        <p:nvSpPr>
+          <p:cNvPr id="11" name="Text 8"/>
+          <p:cNvSpPr txBox="1"/>
+          <p:nvPr/>
+        </p:nvSpPr>
+        <p:spPr>
+          <a:xfrm>
+            <a:off x="4085177" y="2782094"/>
+            <a:ext cx="338328" cy="338328"/>
+          </a:xfrm>
+          <a:prstGeom prst="rect">
+            <a:avLst/>
+          </a:prstGeom>
+          <a:noFill/>
+          <a:ln/>
+        </p:spPr>
+        <p:txBody>
+          <a:bodyPr wrap="square" lIns="0" tIns="0" rIns="0" bIns="0" rtlCol="0" anchor="ctr"/>
+          <a:lstStyle/>
+          <a:p>
+            <a:pPr algn="ctr" indent="0" marL="0">
+              <a:buNone/>
+            </a:pPr>
+            <a:r>
+              <a:rPr lang="en-US" sz="850" b="1" dirty="0">
+                <a:solidFill>
+                  <a:srgbClr val="FFFFFF"/>
+                </a:solidFill>
+              </a:rPr>
+              <a:t>3</a:t>
+            </a:r>
+            <a:endParaRPr lang="en-US" sz="850" dirty="0"/>
+          </a:p>
+        </p:txBody>
+      </p:sp>
+      <p:sp>
+        <p:nvSpPr>
+          <p:cNvPr id="12" name="Shape 9"/>
+          <p:cNvSpPr/>
+          <p:nvPr/>
+        </p:nvSpPr>
+        <p:spPr>
+          <a:xfrm>
+            <a:off x="1880140" y="2602198"/>
+            <a:ext cx="169164" cy="169164"/>
+          </a:xfrm>
+          <a:prstGeom prst="ellipse">
+            <a:avLst/>
+          </a:prstGeom>
+          <a:solidFill>
+            <a:srgbClr val="D92D20"/>
+          </a:solidFill>
+          <a:ln w="19050">
+            <a:solidFill>
+              <a:srgbClr val="FFFFFF"/>
+            </a:solidFill>
+            <a:prstDash val="solid"/>
+          </a:ln>
+        </p:spPr>
+      </p:sp>
+      <p:sp>
+        <p:nvSpPr>
+          <p:cNvPr id="13" name="Text 10"/>
+          <p:cNvSpPr txBox="1"/>
+          <p:nvPr/>
+        </p:nvSpPr>
+        <p:spPr>
+          <a:xfrm>
+            <a:off x="1795558" y="2517616"/>
+            <a:ext cx="338328" cy="338328"/>
+          </a:xfrm>
+          <a:prstGeom prst="rect">
+            <a:avLst/>
+          </a:prstGeom>
+          <a:noFill/>
+          <a:ln/>
+        </p:spPr>
+        <p:txBody>
+          <a:bodyPr wrap="square" lIns="0" tIns="0" rIns="0" bIns="0" rtlCol="0" anchor="ctr"/>
+          <a:lstStyle/>
+          <a:p>
+            <a:pPr algn="ctr" indent="0" marL="0">
+              <a:buNone/>
+            </a:pPr>
+            <a:r>
+              <a:rPr lang="en-US" sz="850" b="1" dirty="0">
+                <a:solidFill>
+                  <a:srgbClr val="FFFFFF"/>
+                </a:solidFill>
+              </a:rPr>
+              <a:t>4</a:t>
+            </a:r>
+            <a:endParaRPr lang="en-US" sz="850" dirty="0"/>
+          </a:p>
+        </p:txBody>
+      </p:sp>
+      <p:sp>
+        <p:nvSpPr>
+          <p:cNvPr id="14" name="Text 11"/>
           <p:cNvSpPr txBox="1"/>
           <p:nvPr/>
         </p:nvSpPr>
@@ -5137,36 +5878,31 @@
           <a:bodyPr wrap="square" lIns="0" tIns="0" rIns="0" bIns="0" rtlCol="0" anchor="ctr"/>
           <a:lstStyle/>
           <a:p>
-            <a:pPr marL="342900" indent="-342900">
+            <a:pPr indent="0" marL="0">
               <a:lnSpc>
                 <a:spcPts val="1600"/>
               </a:lnSpc>
               <a:spcAft>
                 <a:spcPts val="900"/>
               </a:spcAft>
-              <a:buSzPct val="100000"/>
-              <a:buChar char="•"/>
-            </a:pPr>
-            <a:r>
-              <a:rPr lang="en-US" sz="1100" dirty="0">
-                <a:solidFill>
-                  <a:srgbClr val="3C4252"/>
-                </a:solidFill>
-              </a:rPr>
-              <a:t>上方六個數字：總項次 / 輸出列數 / 命中 P/N / 未命中 / Knowledge / Total Qty</a:t>
-            </a:r>
-            <a:endParaRPr lang="en-US" sz="1100" dirty="0"/>
-          </a:p>
-          <a:p>
-            <a:pPr marL="342900" indent="-342900">
+              <a:buNone/>
+            </a:pPr>
+            <a:r>
+              <a:rPr lang="en-US" sz="1200" b="1" dirty="0">
+                <a:solidFill>
+                  <a:srgbClr val="D92D20"/>
+                </a:solidFill>
+              </a:rPr>
+              <a:t>① </a:t>
+            </a:r>
+            <a:pPr indent="0" marL="0">
               <a:lnSpc>
                 <a:spcPts val="1600"/>
               </a:lnSpc>
               <a:spcAft>
                 <a:spcPts val="900"/>
               </a:spcAft>
-              <a:buSzPct val="100000"/>
-              <a:buChar char="•"/>
+              <a:buNone/>
             </a:pPr>
             <a:r>
               <a:rPr lang="en-US" sz="1100" dirty="0">
@@ -5174,8 +5910,11 @@
                   <a:srgbClr val="3C4252"/>
                 </a:solidFill>
               </a:rPr>
-              <a:t>表格可直接改 P/N、RC/EC、Description、Qty、Location（帶 </a:t>
-            </a:r>
+              <a:t>上方六個數字：總項次 / 輸出列數 / 命中 P/N / 未命中 / Knowledge / Total Qty</a:t>
+            </a:r>
+            <a:endParaRPr lang="en-US" sz="1100" dirty="0"/>
+          </a:p>
+          <a:p>
             <a:pPr indent="0" marL="0">
               <a:lnSpc>
                 <a:spcPts val="1600"/>
@@ -5186,12 +5925,12 @@
               <a:buNone/>
             </a:pPr>
             <a:r>
-              <a:rPr lang="en-US" sz="1100" b="1" dirty="0">
-                <a:solidFill>
-                  <a:srgbClr val="3C4252"/>
-                </a:solidFill>
-              </a:rPr>
-              <a:t>(T)/(B)</a:t>
+              <a:rPr lang="en-US" sz="1200" b="1" dirty="0">
+                <a:solidFill>
+                  <a:srgbClr val="D92D20"/>
+                </a:solidFill>
+              </a:rPr>
+              <a:t>② </a:t>
             </a:r>
             <a:pPr indent="0" marL="0">
               <a:lnSpc>
@@ -5208,41 +5947,33 @@
                   <a:srgbClr val="3C4252"/>
                 </a:solidFill>
               </a:rPr>
-              <a:t>，同 Excel）</a:t>
-            </a:r>
-            <a:endParaRPr lang="en-US" sz="1100" dirty="0"/>
-          </a:p>
-          <a:p>
-            <a:pPr marL="342900" indent="-342900">
+              <a:t>「</a:t>
+            </a:r>
+            <a:pPr indent="0" marL="0">
               <a:lnSpc>
                 <a:spcPts val="1600"/>
               </a:lnSpc>
               <a:spcAft>
                 <a:spcPts val="900"/>
               </a:spcAft>
-              <a:buSzPct val="100000"/>
-              <a:buChar char="•"/>
-            </a:pPr>
-            <a:r>
-              <a:rPr lang="en-US" sz="1100" dirty="0">
+              <a:buNone/>
+            </a:pPr>
+            <a:r>
+              <a:rPr lang="en-US" sz="1100" b="1" dirty="0">
                 <a:solidFill>
                   <a:srgbClr val="3C4252"/>
                 </a:solidFill>
               </a:rPr>
-              <a:t>改完按「儲存修改」才會帶進產出的 Excel</a:t>
-            </a:r>
-            <a:endParaRPr lang="en-US" sz="1100" dirty="0"/>
-          </a:p>
-          <a:p>
-            <a:pPr marL="342900" indent="-342900">
+              <a:t>⤢ 放大表格</a:t>
+            </a:r>
+            <a:pPr indent="0" marL="0">
               <a:lnSpc>
                 <a:spcPts val="1600"/>
               </a:lnSpc>
               <a:spcAft>
                 <a:spcPts val="900"/>
               </a:spcAft>
-              <a:buSzPct val="100000"/>
-              <a:buChar char="•"/>
+              <a:buNone/>
             </a:pPr>
             <a:r>
               <a:rPr lang="en-US" sz="1100" dirty="0">
@@ -5250,6 +5981,114 @@
                   <a:srgbClr val="3C4252"/>
                 </a:solidFill>
               </a:rPr>
+              <a:t>」一次看三倍的列數（151 列預設只看得到十幾列）</a:t>
+            </a:r>
+            <a:endParaRPr lang="en-US" sz="1100" dirty="0"/>
+          </a:p>
+          <a:p>
+            <a:pPr indent="0" marL="0">
+              <a:lnSpc>
+                <a:spcPts val="1600"/>
+              </a:lnSpc>
+              <a:spcAft>
+                <a:spcPts val="900"/>
+              </a:spcAft>
+              <a:buNone/>
+            </a:pPr>
+            <a:r>
+              <a:rPr lang="en-US" sz="1200" b="1" dirty="0">
+                <a:solidFill>
+                  <a:srgbClr val="D92D20"/>
+                </a:solidFill>
+              </a:rPr>
+              <a:t>③ </a:t>
+            </a:r>
+            <a:pPr indent="0" marL="0">
+              <a:lnSpc>
+                <a:spcPts val="1600"/>
+              </a:lnSpc>
+              <a:spcAft>
+                <a:spcPts val="900"/>
+              </a:spcAft>
+              <a:buNone/>
+            </a:pPr>
+            <a:r>
+              <a:rPr lang="en-US" sz="1100" dirty="0">
+                <a:solidFill>
+                  <a:srgbClr val="3C4252"/>
+                </a:solidFill>
+              </a:rPr>
+              <a:t>表格可直接改 P/N、RC/EC、Description、Qty、Location（帶 </a:t>
+            </a:r>
+            <a:pPr indent="0" marL="0">
+              <a:lnSpc>
+                <a:spcPts val="1600"/>
+              </a:lnSpc>
+              <a:spcAft>
+                <a:spcPts val="900"/>
+              </a:spcAft>
+              <a:buNone/>
+            </a:pPr>
+            <a:r>
+              <a:rPr lang="en-US" sz="1100" b="1" dirty="0">
+                <a:solidFill>
+                  <a:srgbClr val="3C4252"/>
+                </a:solidFill>
+              </a:rPr>
+              <a:t>(T)/(B)</a:t>
+            </a:r>
+            <a:pPr indent="0" marL="0">
+              <a:lnSpc>
+                <a:spcPts val="1600"/>
+              </a:lnSpc>
+              <a:spcAft>
+                <a:spcPts val="900"/>
+              </a:spcAft>
+              <a:buNone/>
+            </a:pPr>
+            <a:r>
+              <a:rPr lang="en-US" sz="1100" dirty="0">
+                <a:solidFill>
+                  <a:srgbClr val="3C4252"/>
+                </a:solidFill>
+              </a:rPr>
+              <a:t>，同 Excel）</a:t>
+            </a:r>
+            <a:endParaRPr lang="en-US" sz="1100" dirty="0"/>
+          </a:p>
+          <a:p>
+            <a:pPr indent="0" marL="0">
+              <a:lnSpc>
+                <a:spcPts val="1600"/>
+              </a:lnSpc>
+              <a:spcAft>
+                <a:spcPts val="900"/>
+              </a:spcAft>
+              <a:buNone/>
+            </a:pPr>
+            <a:r>
+              <a:rPr lang="en-US" sz="1200" b="1" dirty="0">
+                <a:solidFill>
+                  <a:srgbClr val="D92D20"/>
+                </a:solidFill>
+              </a:rPr>
+              <a:t>④ </a:t>
+            </a:r>
+            <a:pPr indent="0" marL="0">
+              <a:lnSpc>
+                <a:spcPts val="1600"/>
+              </a:lnSpc>
+              <a:spcAft>
+                <a:spcPts val="900"/>
+              </a:spcAft>
+              <a:buNone/>
+            </a:pPr>
+            <a:r>
+              <a:rPr lang="en-US" sz="1100" dirty="0">
+                <a:solidFill>
+                  <a:srgbClr val="3C4252"/>
+                </a:solidFill>
+              </a:rPr>
               <a:t>狀態欄：🔴 R8 降壓選料　⚠️ Location 未知　🟠🟡🟢 對應 Excel 色底</a:t>
             </a:r>
             <a:endParaRPr lang="en-US" sz="1100" dirty="0"/>
@@ -5258,7 +6097,7 @@
       </p:sp>
       <p:sp>
         <p:nvSpPr>
-          <p:cNvPr id="7" name="warn"/>
+          <p:cNvPr id="15" name="warn"/>
           <p:cNvSpPr/>
           <p:nvPr/>
         </p:nvSpPr>
@@ -5285,7 +6124,7 @@
       </p:sp>
       <p:sp>
         <p:nvSpPr>
-          <p:cNvPr id="8" name="Shape 5"/>
+          <p:cNvPr id="16" name="Shape 13"/>
           <p:cNvSpPr/>
           <p:nvPr/>
         </p:nvSpPr>
@@ -5310,7 +6149,7 @@
       </p:sp>
       <p:sp>
         <p:nvSpPr>
-          <p:cNvPr id="9" name="Text 6"/>
+          <p:cNvPr id="17" name="Text 14"/>
           <p:cNvSpPr txBox="1"/>
           <p:nvPr/>
         </p:nvSpPr>
@@ -5346,7 +6185,7 @@
       </p:sp>
       <p:sp>
         <p:nvSpPr>
-          <p:cNvPr id="10" name="Text 7"/>
+          <p:cNvPr id="18" name="Text 15"/>
           <p:cNvSpPr txBox="1"/>
           <p:nvPr/>
         </p:nvSpPr>
@@ -5377,7 +6216,7 @@
                   <a:srgbClr val="6B4413"/>
                 </a:solidFill>
               </a:rPr>
-              <a:t>C 案的「✎ 編輯」頁籤不顯示色底 —— 這是 Streamlit 的限制。</a:t>
+              <a:t>S 案的「✎ 編輯」頁籤不顯示色底 —— 這是 Streamlit 的限制。</a:t>
             </a:r>
             <a:endParaRPr lang="en-US" sz="1000" dirty="0"/>
           </a:p>
@@ -5506,7 +6345,7 @@
       </p:sp>
       <p:pic>
         <p:nvPicPr>
-          <p:cNvPr id="4" name="shot" descr="F:\AI_BOM\docs\sop\shots\C_04_export.jpg">    </p:cNvPr>
+          <p:cNvPr id="4" name="shot" descr="F:\AI_BOM\docs\sop\shots\S_04_export.png">    </p:cNvPr>
           <p:cNvPicPr>
             <a:picLocks noChangeAspect="1"/>
           </p:cNvPicPr>
@@ -5557,7 +6396,251 @@
       </p:sp>
       <p:sp>
         <p:nvSpPr>
-          <p:cNvPr id="6" name="Text 3"/>
+          <p:cNvPr id="6" name="Shape 3"/>
+          <p:cNvSpPr/>
+          <p:nvPr/>
+        </p:nvSpPr>
+        <p:spPr>
+          <a:xfrm>
+            <a:off x="3640804" y="1464945"/>
+            <a:ext cx="169164" cy="169164"/>
+          </a:xfrm>
+          <a:prstGeom prst="ellipse">
+            <a:avLst/>
+          </a:prstGeom>
+          <a:solidFill>
+            <a:srgbClr val="D92D20"/>
+          </a:solidFill>
+          <a:ln w="19050">
+            <a:solidFill>
+              <a:srgbClr val="FFFFFF"/>
+            </a:solidFill>
+            <a:prstDash val="solid"/>
+          </a:ln>
+        </p:spPr>
+      </p:sp>
+      <p:sp>
+        <p:nvSpPr>
+          <p:cNvPr id="7" name="Text 4"/>
+          <p:cNvSpPr txBox="1"/>
+          <p:nvPr/>
+        </p:nvSpPr>
+        <p:spPr>
+          <a:xfrm>
+            <a:off x="3556222" y="1380363"/>
+            <a:ext cx="338328" cy="338328"/>
+          </a:xfrm>
+          <a:prstGeom prst="rect">
+            <a:avLst/>
+          </a:prstGeom>
+          <a:noFill/>
+          <a:ln/>
+        </p:spPr>
+        <p:txBody>
+          <a:bodyPr wrap="square" lIns="0" tIns="0" rIns="0" bIns="0" rtlCol="0" anchor="ctr"/>
+          <a:lstStyle/>
+          <a:p>
+            <a:pPr algn="ctr" indent="0" marL="0">
+              <a:buNone/>
+            </a:pPr>
+            <a:r>
+              <a:rPr lang="en-US" sz="850" b="1" dirty="0">
+                <a:solidFill>
+                  <a:srgbClr val="FFFFFF"/>
+                </a:solidFill>
+              </a:rPr>
+              <a:t>1</a:t>
+            </a:r>
+            <a:endParaRPr lang="en-US" sz="850" dirty="0"/>
+          </a:p>
+        </p:txBody>
+      </p:sp>
+      <p:sp>
+        <p:nvSpPr>
+          <p:cNvPr id="8" name="Shape 5"/>
+          <p:cNvSpPr/>
+          <p:nvPr/>
+        </p:nvSpPr>
+        <p:spPr>
+          <a:xfrm>
+            <a:off x="3640804" y="1842770"/>
+            <a:ext cx="169164" cy="169164"/>
+          </a:xfrm>
+          <a:prstGeom prst="ellipse">
+            <a:avLst/>
+          </a:prstGeom>
+          <a:solidFill>
+            <a:srgbClr val="D92D20"/>
+          </a:solidFill>
+          <a:ln w="19050">
+            <a:solidFill>
+              <a:srgbClr val="FFFFFF"/>
+            </a:solidFill>
+            <a:prstDash val="solid"/>
+          </a:ln>
+        </p:spPr>
+      </p:sp>
+      <p:sp>
+        <p:nvSpPr>
+          <p:cNvPr id="9" name="Text 6"/>
+          <p:cNvSpPr txBox="1"/>
+          <p:nvPr/>
+        </p:nvSpPr>
+        <p:spPr>
+          <a:xfrm>
+            <a:off x="3556222" y="1758188"/>
+            <a:ext cx="338328" cy="338328"/>
+          </a:xfrm>
+          <a:prstGeom prst="rect">
+            <a:avLst/>
+          </a:prstGeom>
+          <a:noFill/>
+          <a:ln/>
+        </p:spPr>
+        <p:txBody>
+          <a:bodyPr wrap="square" lIns="0" tIns="0" rIns="0" bIns="0" rtlCol="0" anchor="ctr"/>
+          <a:lstStyle/>
+          <a:p>
+            <a:pPr algn="ctr" indent="0" marL="0">
+              <a:buNone/>
+            </a:pPr>
+            <a:r>
+              <a:rPr lang="en-US" sz="850" b="1" dirty="0">
+                <a:solidFill>
+                  <a:srgbClr val="FFFFFF"/>
+                </a:solidFill>
+              </a:rPr>
+              <a:t>2</a:t>
+            </a:r>
+            <a:endParaRPr lang="en-US" sz="850" dirty="0"/>
+          </a:p>
+        </p:txBody>
+      </p:sp>
+      <p:sp>
+        <p:nvSpPr>
+          <p:cNvPr id="10" name="Shape 7"/>
+          <p:cNvSpPr/>
+          <p:nvPr/>
+        </p:nvSpPr>
+        <p:spPr>
+          <a:xfrm>
+            <a:off x="1842357" y="2054352"/>
+            <a:ext cx="169164" cy="169164"/>
+          </a:xfrm>
+          <a:prstGeom prst="ellipse">
+            <a:avLst/>
+          </a:prstGeom>
+          <a:solidFill>
+            <a:srgbClr val="D92D20"/>
+          </a:solidFill>
+          <a:ln w="19050">
+            <a:solidFill>
+              <a:srgbClr val="FFFFFF"/>
+            </a:solidFill>
+            <a:prstDash val="solid"/>
+          </a:ln>
+        </p:spPr>
+      </p:sp>
+      <p:sp>
+        <p:nvSpPr>
+          <p:cNvPr id="11" name="Text 8"/>
+          <p:cNvSpPr txBox="1"/>
+          <p:nvPr/>
+        </p:nvSpPr>
+        <p:spPr>
+          <a:xfrm>
+            <a:off x="1757775" y="1969770"/>
+            <a:ext cx="338328" cy="338328"/>
+          </a:xfrm>
+          <a:prstGeom prst="rect">
+            <a:avLst/>
+          </a:prstGeom>
+          <a:noFill/>
+          <a:ln/>
+        </p:spPr>
+        <p:txBody>
+          <a:bodyPr wrap="square" lIns="0" tIns="0" rIns="0" bIns="0" rtlCol="0" anchor="ctr"/>
+          <a:lstStyle/>
+          <a:p>
+            <a:pPr algn="ctr" indent="0" marL="0">
+              <a:buNone/>
+            </a:pPr>
+            <a:r>
+              <a:rPr lang="en-US" sz="850" b="1" dirty="0">
+                <a:solidFill>
+                  <a:srgbClr val="FFFFFF"/>
+                </a:solidFill>
+              </a:rPr>
+              <a:t>3</a:t>
+            </a:r>
+            <a:endParaRPr lang="en-US" sz="850" dirty="0"/>
+          </a:p>
+        </p:txBody>
+      </p:sp>
+      <p:sp>
+        <p:nvSpPr>
+          <p:cNvPr id="12" name="Shape 9"/>
+          <p:cNvSpPr/>
+          <p:nvPr/>
+        </p:nvSpPr>
+        <p:spPr>
+          <a:xfrm>
+            <a:off x="3640804" y="2764663"/>
+            <a:ext cx="169164" cy="169164"/>
+          </a:xfrm>
+          <a:prstGeom prst="ellipse">
+            <a:avLst/>
+          </a:prstGeom>
+          <a:solidFill>
+            <a:srgbClr val="D92D20"/>
+          </a:solidFill>
+          <a:ln w="19050">
+            <a:solidFill>
+              <a:srgbClr val="FFFFFF"/>
+            </a:solidFill>
+            <a:prstDash val="solid"/>
+          </a:ln>
+        </p:spPr>
+      </p:sp>
+      <p:sp>
+        <p:nvSpPr>
+          <p:cNvPr id="13" name="Text 10"/>
+          <p:cNvSpPr txBox="1"/>
+          <p:nvPr/>
+        </p:nvSpPr>
+        <p:spPr>
+          <a:xfrm>
+            <a:off x="3556222" y="2680081"/>
+            <a:ext cx="338328" cy="338328"/>
+          </a:xfrm>
+          <a:prstGeom prst="rect">
+            <a:avLst/>
+          </a:prstGeom>
+          <a:noFill/>
+          <a:ln/>
+        </p:spPr>
+        <p:txBody>
+          <a:bodyPr wrap="square" lIns="0" tIns="0" rIns="0" bIns="0" rtlCol="0" anchor="ctr"/>
+          <a:lstStyle/>
+          <a:p>
+            <a:pPr algn="ctr" indent="0" marL="0">
+              <a:buNone/>
+            </a:pPr>
+            <a:r>
+              <a:rPr lang="en-US" sz="850" b="1" dirty="0">
+                <a:solidFill>
+                  <a:srgbClr val="FFFFFF"/>
+                </a:solidFill>
+              </a:rPr>
+              <a:t>4</a:t>
+            </a:r>
+            <a:endParaRPr lang="en-US" sz="850" dirty="0"/>
+          </a:p>
+        </p:txBody>
+      </p:sp>
+      <p:sp>
+        <p:nvSpPr>
+          <p:cNvPr id="14" name="Text 11"/>
           <p:cNvSpPr txBox="1"/>
           <p:nvPr/>
         </p:nvSpPr>
@@ -5576,36 +6659,31 @@
           <a:bodyPr wrap="square" lIns="0" tIns="0" rIns="0" bIns="0" rtlCol="0" anchor="ctr"/>
           <a:lstStyle/>
           <a:p>
-            <a:pPr marL="342900" indent="-342900">
+            <a:pPr indent="0" marL="0">
               <a:lnSpc>
                 <a:spcPts val="1600"/>
               </a:lnSpc>
               <a:spcAft>
                 <a:spcPts val="900"/>
               </a:spcAft>
-              <a:buSzPct val="100000"/>
-              <a:buChar char="•"/>
-            </a:pPr>
-            <a:r>
-              <a:rPr lang="en-US" sz="1100" dirty="0">
-                <a:solidFill>
-                  <a:srgbClr val="3C4252"/>
-                </a:solidFill>
-              </a:rPr>
-              <a:t>輸出路徑已經有同名檔時會出現黃色警告，要勾「確認覆蓋」才按得下去</a:t>
-            </a:r>
-            <a:endParaRPr lang="en-US" sz="1100" dirty="0"/>
-          </a:p>
-          <a:p>
-            <a:pPr marL="342900" indent="-342900">
+              <a:buNone/>
+            </a:pPr>
+            <a:r>
+              <a:rPr lang="en-US" sz="1200" b="1" dirty="0">
+                <a:solidFill>
+                  <a:srgbClr val="D92D20"/>
+                </a:solidFill>
+              </a:rPr>
+              <a:t>① </a:t>
+            </a:r>
+            <a:pPr indent="0" marL="0">
               <a:lnSpc>
                 <a:spcPts val="1600"/>
               </a:lnSpc>
               <a:spcAft>
                 <a:spcPts val="900"/>
               </a:spcAft>
-              <a:buSzPct val="100000"/>
-              <a:buChar char="•"/>
+              <a:buNone/>
             </a:pPr>
             <a:r>
               <a:rPr lang="en-US" sz="1100" dirty="0">
@@ -5613,41 +6691,36 @@
                   <a:srgbClr val="3C4252"/>
                 </a:solidFill>
               </a:rPr>
-              <a:t>按「▶ 產出 Excel」，檔案直接寫到輸出路徑</a:t>
+              <a:t>上方灰框是這次要寫出去的完整路徑</a:t>
             </a:r>
             <a:endParaRPr lang="en-US" sz="1100" dirty="0"/>
           </a:p>
           <a:p>
-            <a:pPr marL="342900" indent="-342900">
+            <a:pPr indent="0" marL="0">
               <a:lnSpc>
                 <a:spcPts val="1600"/>
               </a:lnSpc>
               <a:spcAft>
                 <a:spcPts val="900"/>
               </a:spcAft>
-              <a:buSzPct val="100000"/>
-              <a:buChar char="•"/>
-            </a:pPr>
-            <a:r>
-              <a:rPr lang="en-US" sz="1100" dirty="0">
-                <a:solidFill>
-                  <a:srgbClr val="3C4252"/>
-                </a:solidFill>
-              </a:rPr>
-              <a:t>下方日誌會列出 PCB 圖片尺寸、實際輸出路徑、項數與 Total Qty</a:t>
-            </a:r>
-            <a:endParaRPr lang="en-US" sz="1100" dirty="0"/>
-          </a:p>
-          <a:p>
-            <a:pPr marL="342900" indent="-342900">
+              <a:buNone/>
+            </a:pPr>
+            <a:r>
+              <a:rPr lang="en-US" sz="1200" b="1" dirty="0">
+                <a:solidFill>
+                  <a:srgbClr val="D92D20"/>
+                </a:solidFill>
+              </a:rPr>
+              <a:t>② </a:t>
+            </a:r>
+            <a:pPr indent="0" marL="0">
               <a:lnSpc>
                 <a:spcPts val="1600"/>
               </a:lnSpc>
               <a:spcAft>
                 <a:spcPts val="900"/>
               </a:spcAft>
-              <a:buSzPct val="100000"/>
-              <a:buChar char="•"/>
+              <a:buNone/>
             </a:pPr>
             <a:r>
               <a:rPr lang="en-US" sz="1100" dirty="0">
@@ -5655,15 +6728,141 @@
                   <a:srgbClr val="3C4252"/>
                 </a:solidFill>
               </a:rPr>
-              <a:t>「⤓ 下載 xlsx」可另存一份到瀏覽器的下載目錄</a:t>
-            </a:r>
+              <a:t>已經有同名檔時會出現</a:t>
+            </a:r>
+            <a:pPr indent="0" marL="0">
+              <a:lnSpc>
+                <a:spcPts val="1600"/>
+              </a:lnSpc>
+              <a:spcAft>
+                <a:spcPts val="900"/>
+              </a:spcAft>
+              <a:buNone/>
+            </a:pPr>
+            <a:r>
+              <a:rPr lang="en-US" sz="1100" b="1" dirty="0">
+                <a:solidFill>
+                  <a:srgbClr val="3C4252"/>
+                </a:solidFill>
+              </a:rPr>
+              <a:t>黃色警告</a:t>
+            </a:r>
+            <a:pPr indent="0" marL="0">
+              <a:lnSpc>
+                <a:spcPts val="1600"/>
+              </a:lnSpc>
+              <a:spcAft>
+                <a:spcPts val="900"/>
+              </a:spcAft>
+              <a:buNone/>
+            </a:pPr>
             <a:endParaRPr lang="en-US" sz="1100" dirty="0"/>
           </a:p>
-        </p:txBody>
-      </p:sp>
-      <p:sp>
-        <p:nvSpPr>
-          <p:cNvPr id="7" name="warn"/>
+          <a:p>
+            <a:pPr indent="0" marL="0">
+              <a:lnSpc>
+                <a:spcPts val="1600"/>
+              </a:lnSpc>
+              <a:spcAft>
+                <a:spcPts val="900"/>
+              </a:spcAft>
+              <a:buNone/>
+            </a:pPr>
+            <a:r>
+              <a:rPr lang="en-US" sz="1200" b="1" dirty="0">
+                <a:solidFill>
+                  <a:srgbClr val="D92D20"/>
+                </a:solidFill>
+              </a:rPr>
+              <a:t>③ </a:t>
+            </a:r>
+            <a:pPr indent="0" marL="0">
+              <a:lnSpc>
+                <a:spcPts val="1600"/>
+              </a:lnSpc>
+              <a:spcAft>
+                <a:spcPts val="900"/>
+              </a:spcAft>
+              <a:buNone/>
+            </a:pPr>
+            <a:r>
+              <a:rPr lang="en-US" sz="1100" dirty="0">
+                <a:solidFill>
+                  <a:srgbClr val="3C4252"/>
+                </a:solidFill>
+              </a:rPr>
+              <a:t>要勾「確認覆蓋」，「▶ 產出 Excel」才按得下去（沒勾是灰的）</a:t>
+            </a:r>
+            <a:endParaRPr lang="en-US" sz="1100" dirty="0"/>
+          </a:p>
+          <a:p>
+            <a:pPr indent="0" marL="0">
+              <a:lnSpc>
+                <a:spcPts val="1600"/>
+              </a:lnSpc>
+              <a:spcAft>
+                <a:spcPts val="900"/>
+              </a:spcAft>
+              <a:buNone/>
+            </a:pPr>
+            <a:r>
+              <a:rPr lang="en-US" sz="1200" b="1" dirty="0">
+                <a:solidFill>
+                  <a:srgbClr val="D92D20"/>
+                </a:solidFill>
+              </a:rPr>
+              <a:t>④ </a:t>
+            </a:r>
+            <a:pPr indent="0" marL="0">
+              <a:lnSpc>
+                <a:spcPts val="1600"/>
+              </a:lnSpc>
+              <a:spcAft>
+                <a:spcPts val="900"/>
+              </a:spcAft>
+              <a:buNone/>
+            </a:pPr>
+            <a:r>
+              <a:rPr lang="en-US" sz="1100" dirty="0">
+                <a:solidFill>
+                  <a:srgbClr val="3C4252"/>
+                </a:solidFill>
+              </a:rPr>
+              <a:t>下方日誌和 W 案同一套配色：✓ 綠、</a:t>
+            </a:r>
+            <a:pPr indent="0" marL="0">
+              <a:lnSpc>
+                <a:spcPts val="1600"/>
+              </a:lnSpc>
+              <a:spcAft>
+                <a:spcPts val="900"/>
+              </a:spcAft>
+              <a:buNone/>
+            </a:pPr>
+            <a:r>
+              <a:rPr lang="en-US" sz="1100" b="1" dirty="0">
+                <a:solidFill>
+                  <a:srgbClr val="3C4252"/>
+                </a:solidFill>
+              </a:rPr>
+              <a:t>[請人工確認] / [警告] / [提示] 紅</a:t>
+            </a:r>
+            <a:pPr indent="0" marL="0">
+              <a:lnSpc>
+                <a:spcPts val="1600"/>
+              </a:lnSpc>
+              <a:spcAft>
+                <a:spcPts val="900"/>
+              </a:spcAft>
+              <a:buNone/>
+            </a:pPr>
+            <a:endParaRPr lang="en-US" sz="1100" dirty="0"/>
+          </a:p>
+        </p:txBody>
+      </p:sp>
+      <p:sp>
+        <p:nvSpPr>
+          <p:cNvPr id="15" name="warn"/>
           <p:cNvSpPr/>
           <p:nvPr/>
         </p:nvSpPr>
@@ -5690,7 +6889,7 @@
       </p:sp>
       <p:sp>
         <p:nvSpPr>
-          <p:cNvPr id="8" name="Shape 5"/>
+          <p:cNvPr id="16" name="Shape 13"/>
           <p:cNvSpPr/>
           <p:nvPr/>
         </p:nvSpPr>
@@ -5715,7 +6914,7 @@
       </p:sp>
       <p:sp>
         <p:nvSpPr>
-          <p:cNvPr id="9" name="Text 6"/>
+          <p:cNvPr id="17" name="Text 14"/>
           <p:cNvSpPr txBox="1"/>
           <p:nvPr/>
         </p:nvSpPr>
@@ -5751,7 +6950,7 @@
       </p:sp>
       <p:sp>
         <p:nvSpPr>
-          <p:cNvPr id="10" name="Text 7"/>
+          <p:cNvPr id="18" name="Text 15"/>
           <p:cNvSpPr txBox="1"/>
           <p:nvPr/>
         </p:nvSpPr>
@@ -5911,7 +7110,7 @@
       </p:sp>
       <p:pic>
         <p:nvPicPr>
-          <p:cNvPr id="4" name="shot" descr="F:\AI_BOM\docs\sop\shots\C_05_menu.jpg">    </p:cNvPr>
+          <p:cNvPr id="4" name="shot" descr="F:\AI_BOM\docs\sop\shots\S_05_menu.png">    </p:cNvPr>
           <p:cNvPicPr>
             <a:picLocks noChangeAspect="1"/>
           </p:cNvPicPr>
@@ -5962,7 +7161,251 @@
       </p:sp>
       <p:sp>
         <p:nvSpPr>
-          <p:cNvPr id="6" name="Text 3"/>
+          <p:cNvPr id="6" name="Shape 3"/>
+          <p:cNvSpPr/>
+          <p:nvPr/>
+        </p:nvSpPr>
+        <p:spPr>
+          <a:xfrm>
+            <a:off x="5246561" y="1140016"/>
+            <a:ext cx="169164" cy="169164"/>
+          </a:xfrm>
+          <a:prstGeom prst="ellipse">
+            <a:avLst/>
+          </a:prstGeom>
+          <a:solidFill>
+            <a:srgbClr val="D92D20"/>
+          </a:solidFill>
+          <a:ln w="19050">
+            <a:solidFill>
+              <a:srgbClr val="FFFFFF"/>
+            </a:solidFill>
+            <a:prstDash val="solid"/>
+          </a:ln>
+        </p:spPr>
+      </p:sp>
+      <p:sp>
+        <p:nvSpPr>
+          <p:cNvPr id="7" name="Text 4"/>
+          <p:cNvSpPr txBox="1"/>
+          <p:nvPr/>
+        </p:nvSpPr>
+        <p:spPr>
+          <a:xfrm>
+            <a:off x="5161978" y="1055434"/>
+            <a:ext cx="338328" cy="338328"/>
+          </a:xfrm>
+          <a:prstGeom prst="rect">
+            <a:avLst/>
+          </a:prstGeom>
+          <a:noFill/>
+          <a:ln/>
+        </p:spPr>
+        <p:txBody>
+          <a:bodyPr wrap="square" lIns="0" tIns="0" rIns="0" bIns="0" rtlCol="0" anchor="ctr"/>
+          <a:lstStyle/>
+          <a:p>
+            <a:pPr algn="ctr" indent="0" marL="0">
+              <a:buNone/>
+            </a:pPr>
+            <a:r>
+              <a:rPr lang="en-US" sz="850" b="1" dirty="0">
+                <a:solidFill>
+                  <a:srgbClr val="FFFFFF"/>
+                </a:solidFill>
+              </a:rPr>
+              <a:t>1</a:t>
+            </a:r>
+            <a:endParaRPr lang="en-US" sz="850" dirty="0"/>
+          </a:p>
+        </p:txBody>
+      </p:sp>
+      <p:sp>
+        <p:nvSpPr>
+          <p:cNvPr id="8" name="Shape 5"/>
+          <p:cNvSpPr/>
+          <p:nvPr/>
+        </p:nvSpPr>
+        <p:spPr>
+          <a:xfrm>
+            <a:off x="5246561" y="1268476"/>
+            <a:ext cx="169164" cy="169164"/>
+          </a:xfrm>
+          <a:prstGeom prst="ellipse">
+            <a:avLst/>
+          </a:prstGeom>
+          <a:solidFill>
+            <a:srgbClr val="D92D20"/>
+          </a:solidFill>
+          <a:ln w="19050">
+            <a:solidFill>
+              <a:srgbClr val="FFFFFF"/>
+            </a:solidFill>
+            <a:prstDash val="solid"/>
+          </a:ln>
+        </p:spPr>
+      </p:sp>
+      <p:sp>
+        <p:nvSpPr>
+          <p:cNvPr id="9" name="Text 6"/>
+          <p:cNvSpPr txBox="1"/>
+          <p:nvPr/>
+        </p:nvSpPr>
+        <p:spPr>
+          <a:xfrm>
+            <a:off x="5161978" y="1183894"/>
+            <a:ext cx="338328" cy="338328"/>
+          </a:xfrm>
+          <a:prstGeom prst="rect">
+            <a:avLst/>
+          </a:prstGeom>
+          <a:noFill/>
+          <a:ln/>
+        </p:spPr>
+        <p:txBody>
+          <a:bodyPr wrap="square" lIns="0" tIns="0" rIns="0" bIns="0" rtlCol="0" anchor="ctr"/>
+          <a:lstStyle/>
+          <a:p>
+            <a:pPr algn="ctr" indent="0" marL="0">
+              <a:buNone/>
+            </a:pPr>
+            <a:r>
+              <a:rPr lang="en-US" sz="850" b="1" dirty="0">
+                <a:solidFill>
+                  <a:srgbClr val="FFFFFF"/>
+                </a:solidFill>
+              </a:rPr>
+              <a:t>2</a:t>
+            </a:r>
+            <a:endParaRPr lang="en-US" sz="850" dirty="0"/>
+          </a:p>
+        </p:txBody>
+      </p:sp>
+      <p:sp>
+        <p:nvSpPr>
+          <p:cNvPr id="10" name="Shape 7"/>
+          <p:cNvSpPr/>
+          <p:nvPr/>
+        </p:nvSpPr>
+        <p:spPr>
+          <a:xfrm>
+            <a:off x="5658390" y="985107"/>
+            <a:ext cx="169164" cy="169164"/>
+          </a:xfrm>
+          <a:prstGeom prst="ellipse">
+            <a:avLst/>
+          </a:prstGeom>
+          <a:solidFill>
+            <a:srgbClr val="D92D20"/>
+          </a:solidFill>
+          <a:ln w="19050">
+            <a:solidFill>
+              <a:srgbClr val="FFFFFF"/>
+            </a:solidFill>
+            <a:prstDash val="solid"/>
+          </a:ln>
+        </p:spPr>
+      </p:sp>
+      <p:sp>
+        <p:nvSpPr>
+          <p:cNvPr id="11" name="Text 8"/>
+          <p:cNvSpPr txBox="1"/>
+          <p:nvPr/>
+        </p:nvSpPr>
+        <p:spPr>
+          <a:xfrm>
+            <a:off x="5573808" y="900525"/>
+            <a:ext cx="338328" cy="338328"/>
+          </a:xfrm>
+          <a:prstGeom prst="rect">
+            <a:avLst/>
+          </a:prstGeom>
+          <a:noFill/>
+          <a:ln/>
+        </p:spPr>
+        <p:txBody>
+          <a:bodyPr wrap="square" lIns="0" tIns="0" rIns="0" bIns="0" rtlCol="0" anchor="ctr"/>
+          <a:lstStyle/>
+          <a:p>
+            <a:pPr algn="ctr" indent="0" marL="0">
+              <a:buNone/>
+            </a:pPr>
+            <a:r>
+              <a:rPr lang="en-US" sz="850" b="1" dirty="0">
+                <a:solidFill>
+                  <a:srgbClr val="FFFFFF"/>
+                </a:solidFill>
+              </a:rPr>
+              <a:t>3</a:t>
+            </a:r>
+            <a:endParaRPr lang="en-US" sz="850" dirty="0"/>
+          </a:p>
+        </p:txBody>
+      </p:sp>
+      <p:sp>
+        <p:nvSpPr>
+          <p:cNvPr id="12" name="Shape 9"/>
+          <p:cNvSpPr/>
+          <p:nvPr/>
+        </p:nvSpPr>
+        <p:spPr>
+          <a:xfrm>
+            <a:off x="939355" y="3346514"/>
+            <a:ext cx="169164" cy="169164"/>
+          </a:xfrm>
+          <a:prstGeom prst="ellipse">
+            <a:avLst/>
+          </a:prstGeom>
+          <a:solidFill>
+            <a:srgbClr val="D92D20"/>
+          </a:solidFill>
+          <a:ln w="19050">
+            <a:solidFill>
+              <a:srgbClr val="FFFFFF"/>
+            </a:solidFill>
+            <a:prstDash val="solid"/>
+          </a:ln>
+        </p:spPr>
+      </p:sp>
+      <p:sp>
+        <p:nvSpPr>
+          <p:cNvPr id="13" name="Text 10"/>
+          <p:cNvSpPr txBox="1"/>
+          <p:nvPr/>
+        </p:nvSpPr>
+        <p:spPr>
+          <a:xfrm>
+            <a:off x="854773" y="3261932"/>
+            <a:ext cx="338328" cy="338328"/>
+          </a:xfrm>
+          <a:prstGeom prst="rect">
+            <a:avLst/>
+          </a:prstGeom>
+          <a:noFill/>
+          <a:ln/>
+        </p:spPr>
+        <p:txBody>
+          <a:bodyPr wrap="square" lIns="0" tIns="0" rIns="0" bIns="0" rtlCol="0" anchor="ctr"/>
+          <a:lstStyle/>
+          <a:p>
+            <a:pPr algn="ctr" indent="0" marL="0">
+              <a:buNone/>
+            </a:pPr>
+            <a:r>
+              <a:rPr lang="en-US" sz="850" b="1" dirty="0">
+                <a:solidFill>
+                  <a:srgbClr val="FFFFFF"/>
+                </a:solidFill>
+              </a:rPr>
+              <a:t>4</a:t>
+            </a:r>
+            <a:endParaRPr lang="en-US" sz="850" dirty="0"/>
+          </a:p>
+        </p:txBody>
+      </p:sp>
+      <p:sp>
+        <p:nvSpPr>
+          <p:cNvPr id="14" name="Text 11"/>
           <p:cNvSpPr txBox="1"/>
           <p:nvPr/>
         </p:nvSpPr>
@@ -5981,23 +7424,22 @@
           <a:bodyPr wrap="square" lIns="0" tIns="0" rIns="0" bIns="0" rtlCol="0" anchor="ctr"/>
           <a:lstStyle/>
           <a:p>
-            <a:pPr marL="342900" indent="-342900">
+            <a:pPr indent="0" marL="0">
               <a:lnSpc>
                 <a:spcPts val="1600"/>
               </a:lnSpc>
               <a:spcAft>
                 <a:spcPts val="900"/>
               </a:spcAft>
-              <a:buSzPct val="100000"/>
-              <a:buChar char="•"/>
-            </a:pPr>
-            <a:r>
-              <a:rPr lang="en-US" sz="1100" dirty="0">
-                <a:solidFill>
-                  <a:srgbClr val="3C4252"/>
-                </a:solidFill>
-              </a:rPr>
-              <a:t>只剩兩項：</a:t>
+              <a:buNone/>
+            </a:pPr>
+            <a:r>
+              <a:rPr lang="en-US" sz="1200" b="1" dirty="0">
+                <a:solidFill>
+                  <a:srgbClr val="D92D20"/>
+                </a:solidFill>
+              </a:rPr>
+              <a:t>① </a:t>
             </a:r>
             <a:pPr indent="0" marL="0">
               <a:lnSpc>
@@ -6009,12 +7451,12 @@
               <a:buNone/>
             </a:pPr>
             <a:r>
-              <a:rPr lang="en-US" sz="1100" b="1" dirty="0">
+              <a:rPr lang="en-US" sz="1100" dirty="0">
                 <a:solidFill>
                   <a:srgbClr val="3C4252"/>
                 </a:solidFill>
               </a:rPr>
-              <a:t>Print</a:t>
+              <a:t>只剩兩項：</a:t>
             </a:r>
             <a:pPr indent="0" marL="0">
               <a:lnSpc>
@@ -6026,12 +7468,12 @@
               <a:buNone/>
             </a:pPr>
             <a:r>
-              <a:rPr lang="en-US" sz="1100" dirty="0">
+              <a:rPr lang="en-US" sz="1100" b="1" dirty="0">
                 <a:solidFill>
                   <a:srgbClr val="3C4252"/>
                 </a:solidFill>
               </a:rPr>
-              <a:t>（列印目前頁面）、</a:t>
+              <a:t>Print</a:t>
             </a:r>
             <a:pPr indent="0" marL="0">
               <a:lnSpc>
@@ -6043,12 +7485,12 @@
               <a:buNone/>
             </a:pPr>
             <a:r>
-              <a:rPr lang="en-US" sz="1100" b="1" dirty="0">
+              <a:rPr lang="en-US" sz="1100" dirty="0">
                 <a:solidFill>
                   <a:srgbClr val="3C4252"/>
                 </a:solidFill>
               </a:rPr>
-              <a:t>Record screen</a:t>
+              <a:t>（列印目前頁面）、</a:t>
             </a:r>
             <a:pPr indent="0" marL="0">
               <a:lnSpc>
@@ -6060,25 +7502,21 @@
               <a:buNone/>
             </a:pPr>
             <a:r>
-              <a:rPr lang="en-US" sz="1100" dirty="0">
+              <a:rPr lang="en-US" sz="1100" b="1" dirty="0">
                 <a:solidFill>
                   <a:srgbClr val="3C4252"/>
                 </a:solidFill>
               </a:rPr>
-              <a:t>（把操作過程錄成影片）</a:t>
-            </a:r>
-            <a:endParaRPr lang="en-US" sz="1100" dirty="0"/>
-          </a:p>
-          <a:p>
-            <a:pPr marL="342900" indent="-342900">
+              <a:t>Record screen</a:t>
+            </a:r>
+            <a:pPr indent="0" marL="0">
               <a:lnSpc>
                 <a:spcPts val="1600"/>
               </a:lnSpc>
               <a:spcAft>
                 <a:spcPts val="900"/>
               </a:spcAft>
-              <a:buSzPct val="100000"/>
-              <a:buChar char="•"/>
+              <a:buNone/>
             </a:pPr>
             <a:r>
               <a:rPr lang="en-US" sz="1100" dirty="0">
@@ -6086,41 +7524,36 @@
                   <a:srgbClr val="3C4252"/>
                 </a:solidFill>
               </a:rPr>
-              <a:t>Record screen 適合回報問題：錄下操作步驟，存成檔案寄給維護人員</a:t>
+              <a:t>（把操作過程錄成影片）</a:t>
             </a:r>
             <a:endParaRPr lang="en-US" sz="1100" dirty="0"/>
           </a:p>
           <a:p>
-            <a:pPr marL="342900" indent="-342900">
+            <a:pPr indent="0" marL="0">
               <a:lnSpc>
                 <a:spcPts val="1600"/>
               </a:lnSpc>
               <a:spcAft>
                 <a:spcPts val="900"/>
               </a:spcAft>
-              <a:buSzPct val="100000"/>
-              <a:buChar char="•"/>
-            </a:pPr>
-            <a:r>
-              <a:rPr lang="en-US" sz="1100" dirty="0">
-                <a:solidFill>
-                  <a:srgbClr val="3C4252"/>
-                </a:solidFill>
-              </a:rPr>
-              <a:t>Streamlit 的 Deploy 按鈕與開發者選項已經關掉，不會出現</a:t>
-            </a:r>
-            <a:endParaRPr lang="en-US" sz="1100" dirty="0"/>
-          </a:p>
-          <a:p>
-            <a:pPr marL="342900" indent="-342900">
+              <a:buNone/>
+            </a:pPr>
+            <a:r>
+              <a:rPr lang="en-US" sz="1200" b="1" dirty="0">
+                <a:solidFill>
+                  <a:srgbClr val="D92D20"/>
+                </a:solidFill>
+              </a:rPr>
+              <a:t>② </a:t>
+            </a:r>
+            <a:pPr indent="0" marL="0">
               <a:lnSpc>
                 <a:spcPts val="1600"/>
               </a:lnSpc>
               <a:spcAft>
                 <a:spcPts val="900"/>
               </a:spcAft>
-              <a:buSzPct val="100000"/>
-              <a:buChar char="•"/>
+              <a:buNone/>
             </a:pPr>
             <a:r>
               <a:rPr lang="en-US" sz="1100" dirty="0">
@@ -6128,6 +7561,80 @@
                   <a:srgbClr val="3C4252"/>
                 </a:solidFill>
               </a:rPr>
+              <a:t>Record screen 適合回報問題：錄下操作步驟，存成檔案寄給維護人員</a:t>
+            </a:r>
+            <a:endParaRPr lang="en-US" sz="1100" dirty="0"/>
+          </a:p>
+          <a:p>
+            <a:pPr indent="0" marL="0">
+              <a:lnSpc>
+                <a:spcPts val="1600"/>
+              </a:lnSpc>
+              <a:spcAft>
+                <a:spcPts val="900"/>
+              </a:spcAft>
+              <a:buNone/>
+            </a:pPr>
+            <a:r>
+              <a:rPr lang="en-US" sz="1200" b="1" dirty="0">
+                <a:solidFill>
+                  <a:srgbClr val="D92D20"/>
+                </a:solidFill>
+              </a:rPr>
+              <a:t>③ </a:t>
+            </a:r>
+            <a:pPr indent="0" marL="0">
+              <a:lnSpc>
+                <a:spcPts val="1600"/>
+              </a:lnSpc>
+              <a:spcAft>
+                <a:spcPts val="900"/>
+              </a:spcAft>
+              <a:buNone/>
+            </a:pPr>
+            <a:r>
+              <a:rPr lang="en-US" sz="1100" dirty="0">
+                <a:solidFill>
+                  <a:srgbClr val="3C4252"/>
+                </a:solidFill>
+              </a:rPr>
+              <a:t>Streamlit 的 Deploy 按鈕與開發者選項已經關掉，不會出現</a:t>
+            </a:r>
+            <a:endParaRPr lang="en-US" sz="1100" dirty="0"/>
+          </a:p>
+          <a:p>
+            <a:pPr indent="0" marL="0">
+              <a:lnSpc>
+                <a:spcPts val="1600"/>
+              </a:lnSpc>
+              <a:spcAft>
+                <a:spcPts val="900"/>
+              </a:spcAft>
+              <a:buNone/>
+            </a:pPr>
+            <a:r>
+              <a:rPr lang="en-US" sz="1200" b="1" dirty="0">
+                <a:solidFill>
+                  <a:srgbClr val="D92D20"/>
+                </a:solidFill>
+              </a:rPr>
+              <a:t>④ </a:t>
+            </a:r>
+            <a:pPr indent="0" marL="0">
+              <a:lnSpc>
+                <a:spcPts val="1600"/>
+              </a:lnSpc>
+              <a:spcAft>
+                <a:spcPts val="900"/>
+              </a:spcAft>
+              <a:buNone/>
+            </a:pPr>
+            <a:r>
+              <a:rPr lang="en-US" sz="1100" dirty="0">
+                <a:solidFill>
+                  <a:srgbClr val="3C4252"/>
+                </a:solidFill>
+              </a:rPr>
               <a:t>要重抓資料夾裡的檔案，用左側「↺ 重新掃描目錄」</a:t>
             </a:r>
             <a:endParaRPr lang="en-US" sz="1100" dirty="0"/>
@@ -6136,7 +7643,7 @@
       </p:sp>
       <p:sp>
         <p:nvSpPr>
-          <p:cNvPr id="7" name="warn"/>
+          <p:cNvPr id="15" name="warn"/>
           <p:cNvSpPr/>
           <p:nvPr/>
         </p:nvSpPr>
@@ -6163,7 +7670,7 @@
       </p:sp>
       <p:sp>
         <p:nvSpPr>
-          <p:cNvPr id="8" name="Shape 5"/>
+          <p:cNvPr id="16" name="Shape 13"/>
           <p:cNvSpPr/>
           <p:nvPr/>
         </p:nvSpPr>
@@ -6188,7 +7695,7 @@
       </p:sp>
       <p:sp>
         <p:nvSpPr>
-          <p:cNvPr id="9" name="Text 6"/>
+          <p:cNvPr id="17" name="Text 14"/>
           <p:cNvSpPr txBox="1"/>
           <p:nvPr/>
         </p:nvSpPr>
@@ -6224,7 +7731,7 @@
       </p:sp>
       <p:sp>
         <p:nvSpPr>
-          <p:cNvPr id="10" name="Text 7"/>
+          <p:cNvPr id="18" name="Text 15"/>
           <p:cNvSpPr txBox="1"/>
           <p:nvPr/>
         </p:nvSpPr>
@@ -6333,7 +7840,7 @@
                   <a:srgbClr val="1A1C2E"/>
                 </a:solidFill>
               </a:rPr>
-              <a:t>C 案其他頁面與 D 案對照</a:t>
+              <a:t>S 案其他頁面與 W 案對照</a:t>
             </a:r>
             <a:endParaRPr lang="en-US" sz="2800" dirty="0"/>
           </a:p>
@@ -6485,7 +7992,7 @@
                             <a:srgbClr val="FFFFFF"/>
                           </a:solidFill>
                         </a:rPr>
-                        <a:t>C 案</a:t>
+                        <a:t>S 案</a:t>
                       </a:r>
                       <a:endParaRPr lang="en-US" sz="1050" dirty="0"/>
                     </a:p>
@@ -6546,7 +8053,7 @@
                             <a:srgbClr val="FFFFFF"/>
                           </a:solidFill>
                         </a:rPr>
-                        <a:t>D 案</a:t>
+                        <a:t>W 案</a:t>
                       </a:r>
                       <a:endParaRPr lang="en-US" sz="1050" dirty="0"/>
                     </a:p>
@@ -6738,7 +8245,7 @@
                             <a:srgbClr val="3C4252"/>
                           </a:solidFill>
                         </a:rPr>
-                        <a:t>同左（D 案步驟 3）</a:t>
+                        <a:t>同左（W 案步驟 3）</a:t>
                       </a:r>
                       <a:endParaRPr lang="en-US" sz="1050" dirty="0"/>
                     </a:p>
@@ -6930,7 +8437,7 @@
                             <a:srgbClr val="3C4252"/>
                           </a:solidFill>
                         </a:rPr>
-                        <a:t>同左（D 案步驟 4）</a:t>
+                        <a:t>同左（W 案步驟 4）</a:t>
                       </a:r>
                       <a:endParaRPr lang="en-US" sz="1050" dirty="0"/>
                     </a:p>
@@ -7608,7 +9115,7 @@
                   <a:srgbClr val="6B7180"/>
                 </a:solidFill>
               </a:rPr>
-              <a:t>Knowledge 與表頭的操作見 D 案步驟 3、4。</a:t>
+              <a:t>Knowledge 與表頭的操作見 W 案步驟 3、4。</a:t>
             </a:r>
             <a:endParaRPr lang="en-US" sz="1100" dirty="0"/>
           </a:p>
@@ -7705,7 +9212,7 @@
                   <a:srgbClr val="FFFFFF"/>
                 </a:solidFill>
               </a:rPr>
-              <a:t>D 案　原生視窗</a:t>
+              <a:t>W 案　原生視窗</a:t>
             </a:r>
             <a:endParaRPr lang="en-US" sz="3600" dirty="0"/>
           </a:p>
@@ -7862,7 +9369,7 @@
       </p:sp>
       <p:pic>
         <p:nvPicPr>
-          <p:cNvPr id="4" name="shot" descr="F:\AI_BOM\docs\sop\shots\D_01_files.png">    </p:cNvPr>
+          <p:cNvPr id="4" name="shot" descr="F:\AI_BOM\docs\sop\shots\W_01_files.png">    </p:cNvPr>
           <p:cNvPicPr>
             <a:picLocks noChangeAspect="1"/>
           </p:cNvPicPr>
@@ -7913,7 +9420,373 @@
       </p:sp>
       <p:sp>
         <p:nvSpPr>
-          <p:cNvPr id="6" name="Text 3"/>
+          <p:cNvPr id="6" name="Shape 3"/>
+          <p:cNvSpPr/>
+          <p:nvPr/>
+        </p:nvSpPr>
+        <p:spPr>
+          <a:xfrm>
+            <a:off x="5473256" y="1491865"/>
+            <a:ext cx="169164" cy="169164"/>
+          </a:xfrm>
+          <a:prstGeom prst="ellipse">
+            <a:avLst/>
+          </a:prstGeom>
+          <a:solidFill>
+            <a:srgbClr val="D92D20"/>
+          </a:solidFill>
+          <a:ln w="19050">
+            <a:solidFill>
+              <a:srgbClr val="FFFFFF"/>
+            </a:solidFill>
+            <a:prstDash val="solid"/>
+          </a:ln>
+        </p:spPr>
+      </p:sp>
+      <p:sp>
+        <p:nvSpPr>
+          <p:cNvPr id="7" name="Text 4"/>
+          <p:cNvSpPr txBox="1"/>
+          <p:nvPr/>
+        </p:nvSpPr>
+        <p:spPr>
+          <a:xfrm>
+            <a:off x="5388674" y="1407283"/>
+            <a:ext cx="338328" cy="338328"/>
+          </a:xfrm>
+          <a:prstGeom prst="rect">
+            <a:avLst/>
+          </a:prstGeom>
+          <a:noFill/>
+          <a:ln/>
+        </p:spPr>
+        <p:txBody>
+          <a:bodyPr wrap="square" lIns="0" tIns="0" rIns="0" bIns="0" rtlCol="0" anchor="ctr"/>
+          <a:lstStyle/>
+          <a:p>
+            <a:pPr algn="ctr" indent="0" marL="0">
+              <a:buNone/>
+            </a:pPr>
+            <a:r>
+              <a:rPr lang="en-US" sz="850" b="1" dirty="0">
+                <a:solidFill>
+                  <a:srgbClr val="FFFFFF"/>
+                </a:solidFill>
+              </a:rPr>
+              <a:t>1</a:t>
+            </a:r>
+            <a:endParaRPr lang="en-US" sz="850" dirty="0"/>
+          </a:p>
+        </p:txBody>
+      </p:sp>
+      <p:sp>
+        <p:nvSpPr>
+          <p:cNvPr id="8" name="Shape 5"/>
+          <p:cNvSpPr/>
+          <p:nvPr/>
+        </p:nvSpPr>
+        <p:spPr>
+          <a:xfrm>
+            <a:off x="3717786" y="2499241"/>
+            <a:ext cx="169164" cy="169164"/>
+          </a:xfrm>
+          <a:prstGeom prst="ellipse">
+            <a:avLst/>
+          </a:prstGeom>
+          <a:solidFill>
+            <a:srgbClr val="D92D20"/>
+          </a:solidFill>
+          <a:ln w="19050">
+            <a:solidFill>
+              <a:srgbClr val="FFFFFF"/>
+            </a:solidFill>
+            <a:prstDash val="solid"/>
+          </a:ln>
+        </p:spPr>
+      </p:sp>
+      <p:sp>
+        <p:nvSpPr>
+          <p:cNvPr id="9" name="Text 6"/>
+          <p:cNvSpPr txBox="1"/>
+          <p:nvPr/>
+        </p:nvSpPr>
+        <p:spPr>
+          <a:xfrm>
+            <a:off x="3633204" y="2414659"/>
+            <a:ext cx="338328" cy="338328"/>
+          </a:xfrm>
+          <a:prstGeom prst="rect">
+            <a:avLst/>
+          </a:prstGeom>
+          <a:noFill/>
+          <a:ln/>
+        </p:spPr>
+        <p:txBody>
+          <a:bodyPr wrap="square" lIns="0" tIns="0" rIns="0" bIns="0" rtlCol="0" anchor="ctr"/>
+          <a:lstStyle/>
+          <a:p>
+            <a:pPr algn="ctr" indent="0" marL="0">
+              <a:buNone/>
+            </a:pPr>
+            <a:r>
+              <a:rPr lang="en-US" sz="850" b="1" dirty="0">
+                <a:solidFill>
+                  <a:srgbClr val="FFFFFF"/>
+                </a:solidFill>
+              </a:rPr>
+              <a:t>2</a:t>
+            </a:r>
+            <a:endParaRPr lang="en-US" sz="850" dirty="0"/>
+          </a:p>
+        </p:txBody>
+      </p:sp>
+      <p:sp>
+        <p:nvSpPr>
+          <p:cNvPr id="10" name="Shape 7"/>
+          <p:cNvSpPr/>
+          <p:nvPr/>
+        </p:nvSpPr>
+        <p:spPr>
+          <a:xfrm>
+            <a:off x="3717786" y="2771275"/>
+            <a:ext cx="169164" cy="169164"/>
+          </a:xfrm>
+          <a:prstGeom prst="ellipse">
+            <a:avLst/>
+          </a:prstGeom>
+          <a:solidFill>
+            <a:srgbClr val="D92D20"/>
+          </a:solidFill>
+          <a:ln w="19050">
+            <a:solidFill>
+              <a:srgbClr val="FFFFFF"/>
+            </a:solidFill>
+            <a:prstDash val="solid"/>
+          </a:ln>
+        </p:spPr>
+      </p:sp>
+      <p:sp>
+        <p:nvSpPr>
+          <p:cNvPr id="11" name="Text 8"/>
+          <p:cNvSpPr txBox="1"/>
+          <p:nvPr/>
+        </p:nvSpPr>
+        <p:spPr>
+          <a:xfrm>
+            <a:off x="3633204" y="2686693"/>
+            <a:ext cx="338328" cy="338328"/>
+          </a:xfrm>
+          <a:prstGeom prst="rect">
+            <a:avLst/>
+          </a:prstGeom>
+          <a:noFill/>
+          <a:ln/>
+        </p:spPr>
+        <p:txBody>
+          <a:bodyPr wrap="square" lIns="0" tIns="0" rIns="0" bIns="0" rtlCol="0" anchor="ctr"/>
+          <a:lstStyle/>
+          <a:p>
+            <a:pPr algn="ctr" indent="0" marL="0">
+              <a:buNone/>
+            </a:pPr>
+            <a:r>
+              <a:rPr lang="en-US" sz="850" b="1" dirty="0">
+                <a:solidFill>
+                  <a:srgbClr val="FFFFFF"/>
+                </a:solidFill>
+              </a:rPr>
+              <a:t>3</a:t>
+            </a:r>
+            <a:endParaRPr lang="en-US" sz="850" dirty="0"/>
+          </a:p>
+        </p:txBody>
+      </p:sp>
+      <p:sp>
+        <p:nvSpPr>
+          <p:cNvPr id="12" name="Shape 9"/>
+          <p:cNvSpPr/>
+          <p:nvPr/>
+        </p:nvSpPr>
+        <p:spPr>
+          <a:xfrm>
+            <a:off x="2191845" y="3183576"/>
+            <a:ext cx="169164" cy="169164"/>
+          </a:xfrm>
+          <a:prstGeom prst="ellipse">
+            <a:avLst/>
+          </a:prstGeom>
+          <a:solidFill>
+            <a:srgbClr val="D92D20"/>
+          </a:solidFill>
+          <a:ln w="19050">
+            <a:solidFill>
+              <a:srgbClr val="FFFFFF"/>
+            </a:solidFill>
+            <a:prstDash val="solid"/>
+          </a:ln>
+        </p:spPr>
+      </p:sp>
+      <p:sp>
+        <p:nvSpPr>
+          <p:cNvPr id="13" name="Text 10"/>
+          <p:cNvSpPr txBox="1"/>
+          <p:nvPr/>
+        </p:nvSpPr>
+        <p:spPr>
+          <a:xfrm>
+            <a:off x="2107263" y="3098994"/>
+            <a:ext cx="338328" cy="338328"/>
+          </a:xfrm>
+          <a:prstGeom prst="rect">
+            <a:avLst/>
+          </a:prstGeom>
+          <a:noFill/>
+          <a:ln/>
+        </p:spPr>
+        <p:txBody>
+          <a:bodyPr wrap="square" lIns="0" tIns="0" rIns="0" bIns="0" rtlCol="0" anchor="ctr"/>
+          <a:lstStyle/>
+          <a:p>
+            <a:pPr algn="ctr" indent="0" marL="0">
+              <a:buNone/>
+            </a:pPr>
+            <a:r>
+              <a:rPr lang="en-US" sz="850" b="1" dirty="0">
+                <a:solidFill>
+                  <a:srgbClr val="FFFFFF"/>
+                </a:solidFill>
+              </a:rPr>
+              <a:t>4</a:t>
+            </a:r>
+            <a:endParaRPr lang="en-US" sz="850" dirty="0"/>
+          </a:p>
+        </p:txBody>
+      </p:sp>
+      <p:sp>
+        <p:nvSpPr>
+          <p:cNvPr id="14" name="Shape 11"/>
+          <p:cNvSpPr/>
+          <p:nvPr/>
+        </p:nvSpPr>
+        <p:spPr>
+          <a:xfrm>
+            <a:off x="3347990" y="3850910"/>
+            <a:ext cx="169164" cy="169164"/>
+          </a:xfrm>
+          <a:prstGeom prst="ellipse">
+            <a:avLst/>
+          </a:prstGeom>
+          <a:solidFill>
+            <a:srgbClr val="D92D20"/>
+          </a:solidFill>
+          <a:ln w="19050">
+            <a:solidFill>
+              <a:srgbClr val="FFFFFF"/>
+            </a:solidFill>
+            <a:prstDash val="solid"/>
+          </a:ln>
+        </p:spPr>
+      </p:sp>
+      <p:sp>
+        <p:nvSpPr>
+          <p:cNvPr id="15" name="Text 12"/>
+          <p:cNvSpPr txBox="1"/>
+          <p:nvPr/>
+        </p:nvSpPr>
+        <p:spPr>
+          <a:xfrm>
+            <a:off x="3263408" y="3766328"/>
+            <a:ext cx="338328" cy="338328"/>
+          </a:xfrm>
+          <a:prstGeom prst="rect">
+            <a:avLst/>
+          </a:prstGeom>
+          <a:noFill/>
+          <a:ln/>
+        </p:spPr>
+        <p:txBody>
+          <a:bodyPr wrap="square" lIns="0" tIns="0" rIns="0" bIns="0" rtlCol="0" anchor="ctr"/>
+          <a:lstStyle/>
+          <a:p>
+            <a:pPr algn="ctr" indent="0" marL="0">
+              <a:buNone/>
+            </a:pPr>
+            <a:r>
+              <a:rPr lang="en-US" sz="850" b="1" dirty="0">
+                <a:solidFill>
+                  <a:srgbClr val="FFFFFF"/>
+                </a:solidFill>
+              </a:rPr>
+              <a:t>5</a:t>
+            </a:r>
+            <a:endParaRPr lang="en-US" sz="850" dirty="0"/>
+          </a:p>
+        </p:txBody>
+      </p:sp>
+      <p:sp>
+        <p:nvSpPr>
+          <p:cNvPr id="16" name="Shape 13"/>
+          <p:cNvSpPr/>
+          <p:nvPr/>
+        </p:nvSpPr>
+        <p:spPr>
+          <a:xfrm>
+            <a:off x="2357616" y="3328095"/>
+            <a:ext cx="169164" cy="169164"/>
+          </a:xfrm>
+          <a:prstGeom prst="ellipse">
+            <a:avLst/>
+          </a:prstGeom>
+          <a:solidFill>
+            <a:srgbClr val="D92D20"/>
+          </a:solidFill>
+          <a:ln w="19050">
+            <a:solidFill>
+              <a:srgbClr val="FFFFFF"/>
+            </a:solidFill>
+            <a:prstDash val="solid"/>
+          </a:ln>
+        </p:spPr>
+      </p:sp>
+      <p:sp>
+        <p:nvSpPr>
+          <p:cNvPr id="17" name="Text 14"/>
+          <p:cNvSpPr txBox="1"/>
+          <p:nvPr/>
+        </p:nvSpPr>
+        <p:spPr>
+          <a:xfrm>
+            <a:off x="2273034" y="3243513"/>
+            <a:ext cx="338328" cy="338328"/>
+          </a:xfrm>
+          <a:prstGeom prst="rect">
+            <a:avLst/>
+          </a:prstGeom>
+          <a:noFill/>
+          <a:ln/>
+        </p:spPr>
+        <p:txBody>
+          <a:bodyPr wrap="square" lIns="0" tIns="0" rIns="0" bIns="0" rtlCol="0" anchor="ctr"/>
+          <a:lstStyle/>
+          <a:p>
+            <a:pPr algn="ctr" indent="0" marL="0">
+              <a:buNone/>
+            </a:pPr>
+            <a:r>
+              <a:rPr lang="en-US" sz="850" b="1" dirty="0">
+                <a:solidFill>
+                  <a:srgbClr val="FFFFFF"/>
+                </a:solidFill>
+              </a:rPr>
+              <a:t>6</a:t>
+            </a:r>
+            <a:endParaRPr lang="en-US" sz="850" dirty="0"/>
+          </a:p>
+        </p:txBody>
+      </p:sp>
+      <p:sp>
+        <p:nvSpPr>
+          <p:cNvPr id="18" name="Text 15"/>
           <p:cNvSpPr txBox="1"/>
           <p:nvPr/>
         </p:nvSpPr>
@@ -7932,37 +9805,43 @@
           <a:bodyPr wrap="square" lIns="0" tIns="0" rIns="0" bIns="0" rtlCol="0" anchor="ctr"/>
           <a:lstStyle/>
           <a:p>
-            <a:pPr marL="342900" indent="-342900">
+            <a:pPr indent="0" marL="0">
               <a:lnSpc>
                 <a:spcPts val="1600"/>
               </a:lnSpc>
               <a:spcAft>
                 <a:spcPts val="900"/>
               </a:spcAft>
-              <a:buSzPct val="100000"/>
-              <a:buChar char="•"/>
-            </a:pPr>
-            <a:r>
-              <a:rPr lang="en-US" sz="1100" dirty="0">
-                <a:solidFill>
-                  <a:srgbClr val="3C4252"/>
-                </a:solidFill>
-              </a:rPr>
-              <a:t>欄位與 C 案相同；輸入檔按「瀏覽…」，輸出路徑按「變更…」</a:t>
-            </a:r>
-            <a:endParaRPr lang="en-US" sz="1100" dirty="0"/>
-          </a:p>
-          <a:p>
-            <a:pPr marL="342900" indent="-342900">
+              <a:buNone/>
+            </a:pPr>
+            <a:r>
+              <a:rPr lang="en-US" sz="1200" b="1" dirty="0">
+                <a:solidFill>
+                  <a:srgbClr val="D92D20"/>
+                </a:solidFill>
+              </a:rPr>
+              <a:t>① </a:t>
+            </a:r>
+            <a:pPr indent="0" marL="0">
               <a:lnSpc>
                 <a:spcPts val="1600"/>
               </a:lnSpc>
               <a:spcAft>
                 <a:spcPts val="900"/>
               </a:spcAft>
-              <a:buSzPct val="100000"/>
-              <a:buChar char="•"/>
-            </a:pPr>
+              <a:buNone/>
+            </a:pPr>
+            <a:r>
+              <a:rPr lang="en-US" sz="1100" dirty="0">
+                <a:solidFill>
+                  <a:srgbClr val="3C4252"/>
+                </a:solidFill>
+              </a:rPr>
+              <a:t>欄位與 S 案相同；輸入檔按「瀏覽…」，輸出路徑按「變更…」</a:t>
+            </a:r>
+            <a:endParaRPr lang="en-US" sz="1100" dirty="0"/>
+          </a:p>
+          <a:p>
             <a:pPr indent="0" marL="0">
               <a:lnSpc>
                 <a:spcPts val="1600"/>
@@ -7973,12 +9852,12 @@
               <a:buNone/>
             </a:pPr>
             <a:r>
-              <a:rPr lang="en-US" sz="1100" b="1" dirty="0">
-                <a:solidFill>
-                  <a:srgbClr val="3C4252"/>
-                </a:solidFill>
-              </a:rPr>
-              <a:t>Location TOP/BOT 對照表</a:t>
+              <a:rPr lang="en-US" sz="1200" b="1" dirty="0">
+                <a:solidFill>
+                  <a:srgbClr val="D92D20"/>
+                </a:solidFill>
+              </a:rPr>
+              <a:t>② </a:t>
             </a:r>
             <a:pPr indent="0" marL="0">
               <a:lnSpc>
@@ -7989,27 +9868,23 @@
               </a:spcAft>
               <a:buNone/>
             </a:pPr>
-            <a:r>
-              <a:rPr lang="en-US" sz="1100" dirty="0">
-                <a:solidFill>
-                  <a:srgbClr val="3C4252"/>
-                </a:solidFill>
-              </a:rPr>
-              <a:t>：選填，給了就切換成雙面板模式</a:t>
-            </a:r>
-            <a:endParaRPr lang="en-US" sz="1100" dirty="0"/>
-          </a:p>
-          <a:p>
-            <a:pPr marL="342900" indent="-342900">
+            <a:pPr indent="0" marL="0">
               <a:lnSpc>
                 <a:spcPts val="1600"/>
               </a:lnSpc>
               <a:spcAft>
                 <a:spcPts val="900"/>
               </a:spcAft>
-              <a:buSzPct val="100000"/>
-              <a:buChar char="•"/>
-            </a:pPr>
+              <a:buNone/>
+            </a:pPr>
+            <a:r>
+              <a:rPr lang="en-US" sz="1100" b="1" dirty="0">
+                <a:solidFill>
+                  <a:srgbClr val="3C4252"/>
+                </a:solidFill>
+              </a:rPr>
+              <a:t>Location TOP/BOT 對照表</a:t>
+            </a:r>
             <a:pPr indent="0" marL="0">
               <a:lnSpc>
                 <a:spcPts val="1600"/>
@@ -8020,13 +9895,16 @@
               <a:buNone/>
             </a:pPr>
             <a:r>
-              <a:rPr lang="en-US" sz="1100" b="1" dirty="0">
+              <a:rPr lang="en-US" sz="1100" dirty="0">
                 <a:solidFill>
                   <a:srgbClr val="3C4252"/>
                 </a:solidFill>
               </a:rPr>
-              <a:t>PCB 圖片（BOT 面）</a:t>
-            </a:r>
+              <a:t>：選填，給了就切換成雙面板模式</a:t>
+            </a:r>
+            <a:endParaRPr lang="en-US" sz="1100" dirty="0"/>
+          </a:p>
+          <a:p>
             <a:pPr indent="0" marL="0">
               <a:lnSpc>
                 <a:spcPts val="1600"/>
@@ -8037,67 +9915,47 @@
               <a:buNone/>
             </a:pPr>
             <a:r>
-              <a:rPr lang="en-US" sz="1100" dirty="0">
-                <a:solidFill>
-                  <a:srgbClr val="3C4252"/>
-                </a:solidFill>
-              </a:rPr>
-              <a:t>：雙面板時提供兩張，圖片區自動切成上下兩半</a:t>
-            </a:r>
-            <a:endParaRPr lang="en-US" sz="1100" dirty="0"/>
-          </a:p>
-          <a:p>
-            <a:pPr marL="342900" indent="-342900">
+              <a:rPr lang="en-US" sz="1200" b="1" dirty="0">
+                <a:solidFill>
+                  <a:srgbClr val="D92D20"/>
+                </a:solidFill>
+              </a:rPr>
+              <a:t>③ </a:t>
+            </a:r>
+            <a:pPr indent="0" marL="0">
               <a:lnSpc>
                 <a:spcPts val="1600"/>
               </a:lnSpc>
               <a:spcAft>
                 <a:spcPts val="900"/>
               </a:spcAft>
-              <a:buSzPct val="100000"/>
-              <a:buChar char="•"/>
-            </a:pPr>
-            <a:r>
-              <a:rPr lang="en-US" sz="1100" dirty="0">
-                <a:solidFill>
-                  <a:srgbClr val="3C4252"/>
-                </a:solidFill>
-              </a:rPr>
-              <a:t>「替代料拆列」打勾時一列只有一個 P/N；取消勾選會回到 a;b 單列格式</a:t>
-            </a:r>
-            <a:endParaRPr lang="en-US" sz="1100" dirty="0"/>
-          </a:p>
-          <a:p>
-            <a:pPr marL="342900" indent="-342900">
+              <a:buNone/>
+            </a:pPr>
+            <a:pPr indent="0" marL="0">
               <a:lnSpc>
                 <a:spcPts val="1600"/>
               </a:lnSpc>
               <a:spcAft>
                 <a:spcPts val="900"/>
               </a:spcAft>
-              <a:buSzPct val="100000"/>
-              <a:buChar char="•"/>
-            </a:pPr>
-            <a:r>
-              <a:rPr lang="en-US" sz="1100" dirty="0">
+              <a:buNone/>
+            </a:pPr>
+            <a:r>
+              <a:rPr lang="en-US" sz="1100" b="1" dirty="0">
                 <a:solidFill>
                   <a:srgbClr val="3C4252"/>
                 </a:solidFill>
               </a:rPr>
-              <a:t>下方黑色區塊是執行日誌</a:t>
-            </a:r>
-            <a:endParaRPr lang="en-US" sz="1100" dirty="0"/>
-          </a:p>
-          <a:p>
-            <a:pPr marL="342900" indent="-342900">
+              <a:t>PCB 圖片（BOT 面）</a:t>
+            </a:r>
+            <a:pPr indent="0" marL="0">
               <a:lnSpc>
                 <a:spcPts val="1600"/>
               </a:lnSpc>
               <a:spcAft>
                 <a:spcPts val="900"/>
               </a:spcAft>
-              <a:buSzPct val="100000"/>
-              <a:buChar char="•"/>
+              <a:buNone/>
             </a:pPr>
             <a:r>
               <a:rPr lang="en-US" sz="1100" dirty="0">
@@ -8105,6 +9963,117 @@
                   <a:srgbClr val="3C4252"/>
                 </a:solidFill>
               </a:rPr>
+              <a:t>：雙面板時提供兩張，圖片區自動切成上下兩半</a:t>
+            </a:r>
+            <a:endParaRPr lang="en-US" sz="1100" dirty="0"/>
+          </a:p>
+          <a:p>
+            <a:pPr indent="0" marL="0">
+              <a:lnSpc>
+                <a:spcPts val="1600"/>
+              </a:lnSpc>
+              <a:spcAft>
+                <a:spcPts val="900"/>
+              </a:spcAft>
+              <a:buNone/>
+            </a:pPr>
+            <a:r>
+              <a:rPr lang="en-US" sz="1200" b="1" dirty="0">
+                <a:solidFill>
+                  <a:srgbClr val="D92D20"/>
+                </a:solidFill>
+              </a:rPr>
+              <a:t>④ </a:t>
+            </a:r>
+            <a:pPr indent="0" marL="0">
+              <a:lnSpc>
+                <a:spcPts val="1600"/>
+              </a:lnSpc>
+              <a:spcAft>
+                <a:spcPts val="900"/>
+              </a:spcAft>
+              <a:buNone/>
+            </a:pPr>
+            <a:r>
+              <a:rPr lang="en-US" sz="1100" dirty="0">
+                <a:solidFill>
+                  <a:srgbClr val="3C4252"/>
+                </a:solidFill>
+              </a:rPr>
+              <a:t>「替代料拆列」打勾時一列只有一個 P/N；取消勾選會回到 a;b 單列格式</a:t>
+            </a:r>
+            <a:endParaRPr lang="en-US" sz="1100" dirty="0"/>
+          </a:p>
+          <a:p>
+            <a:pPr indent="0" marL="0">
+              <a:lnSpc>
+                <a:spcPts val="1600"/>
+              </a:lnSpc>
+              <a:spcAft>
+                <a:spcPts val="900"/>
+              </a:spcAft>
+              <a:buNone/>
+            </a:pPr>
+            <a:r>
+              <a:rPr lang="en-US" sz="1200" b="1" dirty="0">
+                <a:solidFill>
+                  <a:srgbClr val="D92D20"/>
+                </a:solidFill>
+              </a:rPr>
+              <a:t>⑤ </a:t>
+            </a:r>
+            <a:pPr indent="0" marL="0">
+              <a:lnSpc>
+                <a:spcPts val="1600"/>
+              </a:lnSpc>
+              <a:spcAft>
+                <a:spcPts val="900"/>
+              </a:spcAft>
+              <a:buNone/>
+            </a:pPr>
+            <a:r>
+              <a:rPr lang="en-US" sz="1100" dirty="0">
+                <a:solidFill>
+                  <a:srgbClr val="3C4252"/>
+                </a:solidFill>
+              </a:rPr>
+              <a:t>下方黑色區塊是執行日誌</a:t>
+            </a:r>
+            <a:endParaRPr lang="en-US" sz="1100" dirty="0"/>
+          </a:p>
+          <a:p>
+            <a:pPr indent="0" marL="0">
+              <a:lnSpc>
+                <a:spcPts val="1600"/>
+              </a:lnSpc>
+              <a:spcAft>
+                <a:spcPts val="900"/>
+              </a:spcAft>
+              <a:buNone/>
+            </a:pPr>
+            <a:r>
+              <a:rPr lang="en-US" sz="1200" b="1" dirty="0">
+                <a:solidFill>
+                  <a:srgbClr val="D92D20"/>
+                </a:solidFill>
+              </a:rPr>
+              <a:t>⑥ </a:t>
+            </a:r>
+            <a:pPr indent="0" marL="0">
+              <a:lnSpc>
+                <a:spcPts val="1600"/>
+              </a:lnSpc>
+              <a:spcAft>
+                <a:spcPts val="900"/>
+              </a:spcAft>
+              <a:buNone/>
+            </a:pPr>
+            <a:r>
+              <a:rPr lang="en-US" sz="1100" dirty="0">
+                <a:solidFill>
+                  <a:srgbClr val="3C4252"/>
+                </a:solidFill>
+              </a:rPr>
               <a:t>按「▶ 執行比對」開始</a:t>
             </a:r>
             <a:endParaRPr lang="en-US" sz="1100" dirty="0"/>
@@ -8113,7 +10082,7 @@
       </p:sp>
       <p:sp>
         <p:nvSpPr>
-          <p:cNvPr id="7" name="warn"/>
+          <p:cNvPr id="19" name="warn"/>
           <p:cNvSpPr/>
           <p:nvPr/>
         </p:nvSpPr>
@@ -8140,7 +10109,7 @@
       </p:sp>
       <p:sp>
         <p:nvSpPr>
-          <p:cNvPr id="8" name="Shape 5"/>
+          <p:cNvPr id="20" name="Shape 17"/>
           <p:cNvSpPr/>
           <p:nvPr/>
         </p:nvSpPr>
@@ -8165,7 +10134,7 @@
       </p:sp>
       <p:sp>
         <p:nvSpPr>
-          <p:cNvPr id="9" name="Text 6"/>
+          <p:cNvPr id="21" name="Text 18"/>
           <p:cNvSpPr txBox="1"/>
           <p:nvPr/>
         </p:nvSpPr>
@@ -8201,7 +10170,7 @@
       </p:sp>
       <p:sp>
         <p:nvSpPr>
-          <p:cNvPr id="10" name="Text 7"/>
+          <p:cNvPr id="22" name="Text 19"/>
           <p:cNvSpPr txBox="1"/>
           <p:nvPr/>
         </p:nvSpPr>
@@ -8249,7 +10218,7 @@
                   <a:srgbClr val="6B4413"/>
                 </a:solidFill>
               </a:rPr>
-              <a:t>BOM Matcher v0.10　[run_D_webview.bat]</a:t>
+              <a:t>BOM Matcher v0.10　[run_W_webview.bat]</a:t>
             </a:r>
             <a:endParaRPr lang="en-US" sz="1000" dirty="0"/>
           </a:p>
@@ -8361,7 +10330,7 @@
       </p:sp>
       <p:pic>
         <p:nvPicPr>
-          <p:cNvPr id="4" name="shot" descr="F:\AI_BOM\docs\sop\shots\D_02_rows.png">    </p:cNvPr>
+          <p:cNvPr id="4" name="shot" descr="F:\AI_BOM\docs\sop\shots\W_02_rows.png">    </p:cNvPr>
           <p:cNvPicPr>
             <a:picLocks noChangeAspect="1"/>
           </p:cNvPicPr>
@@ -9108,7 +11077,7 @@
       </p:sp>
       <p:pic>
         <p:nvPicPr>
-          <p:cNvPr id="4" name="shot" descr="F:\AI_BOM\docs\sop\shots\D_03_knowledge.png">    </p:cNvPr>
+          <p:cNvPr id="4" name="shot" descr="F:\AI_BOM\docs\sop\shots\W_03_knowledge.png">    </p:cNvPr>
           <p:cNvPicPr>
             <a:picLocks noChangeAspect="1"/>
           </p:cNvPicPr>
@@ -9159,7 +11128,251 @@
       </p:sp>
       <p:sp>
         <p:nvSpPr>
-          <p:cNvPr id="6" name="Text 3"/>
+          <p:cNvPr id="6" name="Shape 3"/>
+          <p:cNvSpPr/>
+          <p:nvPr/>
+        </p:nvSpPr>
+        <p:spPr>
+          <a:xfrm>
+            <a:off x="1605272" y="1462111"/>
+            <a:ext cx="169164" cy="169164"/>
+          </a:xfrm>
+          <a:prstGeom prst="ellipse">
+            <a:avLst/>
+          </a:prstGeom>
+          <a:solidFill>
+            <a:srgbClr val="D92D20"/>
+          </a:solidFill>
+          <a:ln w="19050">
+            <a:solidFill>
+              <a:srgbClr val="FFFFFF"/>
+            </a:solidFill>
+            <a:prstDash val="solid"/>
+          </a:ln>
+        </p:spPr>
+      </p:sp>
+      <p:sp>
+        <p:nvSpPr>
+          <p:cNvPr id="7" name="Text 4"/>
+          <p:cNvSpPr txBox="1"/>
+          <p:nvPr/>
+        </p:nvSpPr>
+        <p:spPr>
+          <a:xfrm>
+            <a:off x="1520690" y="1377529"/>
+            <a:ext cx="338328" cy="338328"/>
+          </a:xfrm>
+          <a:prstGeom prst="rect">
+            <a:avLst/>
+          </a:prstGeom>
+          <a:noFill/>
+          <a:ln/>
+        </p:spPr>
+        <p:txBody>
+          <a:bodyPr wrap="square" lIns="0" tIns="0" rIns="0" bIns="0" rtlCol="0" anchor="ctr"/>
+          <a:lstStyle/>
+          <a:p>
+            <a:pPr algn="ctr" indent="0" marL="0">
+              <a:buNone/>
+            </a:pPr>
+            <a:r>
+              <a:rPr lang="en-US" sz="850" b="1" dirty="0">
+                <a:solidFill>
+                  <a:srgbClr val="FFFFFF"/>
+                </a:solidFill>
+              </a:rPr>
+              <a:t>1</a:t>
+            </a:r>
+            <a:endParaRPr lang="en-US" sz="850" dirty="0"/>
+          </a:p>
+        </p:txBody>
+      </p:sp>
+      <p:sp>
+        <p:nvSpPr>
+          <p:cNvPr id="8" name="Shape 5"/>
+          <p:cNvSpPr/>
+          <p:nvPr/>
+        </p:nvSpPr>
+        <p:spPr>
+          <a:xfrm>
+            <a:off x="2327862" y="1695891"/>
+            <a:ext cx="169164" cy="169164"/>
+          </a:xfrm>
+          <a:prstGeom prst="ellipse">
+            <a:avLst/>
+          </a:prstGeom>
+          <a:solidFill>
+            <a:srgbClr val="D92D20"/>
+          </a:solidFill>
+          <a:ln w="19050">
+            <a:solidFill>
+              <a:srgbClr val="FFFFFF"/>
+            </a:solidFill>
+            <a:prstDash val="solid"/>
+          </a:ln>
+        </p:spPr>
+      </p:sp>
+      <p:sp>
+        <p:nvSpPr>
+          <p:cNvPr id="9" name="Text 6"/>
+          <p:cNvSpPr txBox="1"/>
+          <p:nvPr/>
+        </p:nvSpPr>
+        <p:spPr>
+          <a:xfrm>
+            <a:off x="2243280" y="1611309"/>
+            <a:ext cx="338328" cy="338328"/>
+          </a:xfrm>
+          <a:prstGeom prst="rect">
+            <a:avLst/>
+          </a:prstGeom>
+          <a:noFill/>
+          <a:ln/>
+        </p:spPr>
+        <p:txBody>
+          <a:bodyPr wrap="square" lIns="0" tIns="0" rIns="0" bIns="0" rtlCol="0" anchor="ctr"/>
+          <a:lstStyle/>
+          <a:p>
+            <a:pPr algn="ctr" indent="0" marL="0">
+              <a:buNone/>
+            </a:pPr>
+            <a:r>
+              <a:rPr lang="en-US" sz="850" b="1" dirty="0">
+                <a:solidFill>
+                  <a:srgbClr val="FFFFFF"/>
+                </a:solidFill>
+              </a:rPr>
+              <a:t>2</a:t>
+            </a:r>
+            <a:endParaRPr lang="en-US" sz="850" dirty="0"/>
+          </a:p>
+        </p:txBody>
+      </p:sp>
+      <p:sp>
+        <p:nvSpPr>
+          <p:cNvPr id="10" name="Shape 7"/>
+          <p:cNvSpPr/>
+          <p:nvPr/>
+        </p:nvSpPr>
+        <p:spPr>
+          <a:xfrm>
+            <a:off x="5443502" y="1457861"/>
+            <a:ext cx="169164" cy="169164"/>
+          </a:xfrm>
+          <a:prstGeom prst="ellipse">
+            <a:avLst/>
+          </a:prstGeom>
+          <a:solidFill>
+            <a:srgbClr val="D92D20"/>
+          </a:solidFill>
+          <a:ln w="19050">
+            <a:solidFill>
+              <a:srgbClr val="FFFFFF"/>
+            </a:solidFill>
+            <a:prstDash val="solid"/>
+          </a:ln>
+        </p:spPr>
+      </p:sp>
+      <p:sp>
+        <p:nvSpPr>
+          <p:cNvPr id="11" name="Text 8"/>
+          <p:cNvSpPr txBox="1"/>
+          <p:nvPr/>
+        </p:nvSpPr>
+        <p:spPr>
+          <a:xfrm>
+            <a:off x="5358920" y="1373279"/>
+            <a:ext cx="338328" cy="338328"/>
+          </a:xfrm>
+          <a:prstGeom prst="rect">
+            <a:avLst/>
+          </a:prstGeom>
+          <a:noFill/>
+          <a:ln/>
+        </p:spPr>
+        <p:txBody>
+          <a:bodyPr wrap="square" lIns="0" tIns="0" rIns="0" bIns="0" rtlCol="0" anchor="ctr"/>
+          <a:lstStyle/>
+          <a:p>
+            <a:pPr algn="ctr" indent="0" marL="0">
+              <a:buNone/>
+            </a:pPr>
+            <a:r>
+              <a:rPr lang="en-US" sz="850" b="1" dirty="0">
+                <a:solidFill>
+                  <a:srgbClr val="FFFFFF"/>
+                </a:solidFill>
+              </a:rPr>
+              <a:t>3</a:t>
+            </a:r>
+            <a:endParaRPr lang="en-US" sz="850" dirty="0"/>
+          </a:p>
+        </p:txBody>
+      </p:sp>
+      <p:sp>
+        <p:nvSpPr>
+          <p:cNvPr id="12" name="Shape 9"/>
+          <p:cNvSpPr/>
+          <p:nvPr/>
+        </p:nvSpPr>
+        <p:spPr>
+          <a:xfrm>
+            <a:off x="2497884" y="2750022"/>
+            <a:ext cx="169164" cy="169164"/>
+          </a:xfrm>
+          <a:prstGeom prst="ellipse">
+            <a:avLst/>
+          </a:prstGeom>
+          <a:solidFill>
+            <a:srgbClr val="D92D20"/>
+          </a:solidFill>
+          <a:ln w="19050">
+            <a:solidFill>
+              <a:srgbClr val="FFFFFF"/>
+            </a:solidFill>
+            <a:prstDash val="solid"/>
+          </a:ln>
+        </p:spPr>
+      </p:sp>
+      <p:sp>
+        <p:nvSpPr>
+          <p:cNvPr id="13" name="Text 10"/>
+          <p:cNvSpPr txBox="1"/>
+          <p:nvPr/>
+        </p:nvSpPr>
+        <p:spPr>
+          <a:xfrm>
+            <a:off x="2413302" y="2665440"/>
+            <a:ext cx="338328" cy="338328"/>
+          </a:xfrm>
+          <a:prstGeom prst="rect">
+            <a:avLst/>
+          </a:prstGeom>
+          <a:noFill/>
+          <a:ln/>
+        </p:spPr>
+        <p:txBody>
+          <a:bodyPr wrap="square" lIns="0" tIns="0" rIns="0" bIns="0" rtlCol="0" anchor="ctr"/>
+          <a:lstStyle/>
+          <a:p>
+            <a:pPr algn="ctr" indent="0" marL="0">
+              <a:buNone/>
+            </a:pPr>
+            <a:r>
+              <a:rPr lang="en-US" sz="850" b="1" dirty="0">
+                <a:solidFill>
+                  <a:srgbClr val="FFFFFF"/>
+                </a:solidFill>
+              </a:rPr>
+              <a:t>4</a:t>
+            </a:r>
+            <a:endParaRPr lang="en-US" sz="850" dirty="0"/>
+          </a:p>
+        </p:txBody>
+      </p:sp>
+      <p:sp>
+        <p:nvSpPr>
+          <p:cNvPr id="14" name="Text 11"/>
           <p:cNvSpPr txBox="1"/>
           <p:nvPr/>
         </p:nvSpPr>
@@ -9178,36 +11391,31 @@
           <a:bodyPr wrap="square" lIns="0" tIns="0" rIns="0" bIns="0" rtlCol="0" anchor="ctr"/>
           <a:lstStyle/>
           <a:p>
-            <a:pPr marL="342900" indent="-342900">
+            <a:pPr indent="0" marL="0">
               <a:lnSpc>
                 <a:spcPts val="1600"/>
               </a:lnSpc>
               <a:spcAft>
                 <a:spcPts val="900"/>
               </a:spcAft>
-              <a:buSzPct val="100000"/>
-              <a:buChar char="•"/>
-            </a:pPr>
-            <a:r>
-              <a:rPr lang="en-US" sz="1100" dirty="0">
-                <a:solidFill>
-                  <a:srgbClr val="3C4252"/>
-                </a:solidFill>
-              </a:rPr>
-              <a:t>列出所有命中 Knowledge 的料件與對應注意事項</a:t>
-            </a:r>
-            <a:endParaRPr lang="en-US" sz="1100" dirty="0"/>
-          </a:p>
-          <a:p>
-            <a:pPr marL="342900" indent="-342900">
+              <a:buNone/>
+            </a:pPr>
+            <a:r>
+              <a:rPr lang="en-US" sz="1200" b="1" dirty="0">
+                <a:solidFill>
+                  <a:srgbClr val="D92D20"/>
+                </a:solidFill>
+              </a:rPr>
+              <a:t>① </a:t>
+            </a:r>
+            <a:pPr indent="0" marL="0">
               <a:lnSpc>
                 <a:spcPts val="1600"/>
               </a:lnSpc>
               <a:spcAft>
                 <a:spcPts val="900"/>
               </a:spcAft>
-              <a:buSzPct val="100000"/>
-              <a:buChar char="•"/>
+              <a:buNone/>
             </a:pPr>
             <a:r>
               <a:rPr lang="en-US" sz="1100" dirty="0">
@@ -9215,41 +11423,36 @@
                   <a:srgbClr val="3C4252"/>
                 </a:solidFill>
               </a:rPr>
-              <a:t>命中條件三選一：P/N 相同、品名是描述的子字串、包裝是描述的子字串</a:t>
+              <a:t>列出所有命中 Knowledge 的料件與對應注意事項</a:t>
             </a:r>
             <a:endParaRPr lang="en-US" sz="1100" dirty="0"/>
           </a:p>
           <a:p>
-            <a:pPr marL="342900" indent="-342900">
+            <a:pPr indent="0" marL="0">
               <a:lnSpc>
                 <a:spcPts val="1600"/>
               </a:lnSpc>
               <a:spcAft>
                 <a:spcPts val="900"/>
               </a:spcAft>
-              <a:buSzPct val="100000"/>
-              <a:buChar char="•"/>
-            </a:pPr>
-            <a:r>
-              <a:rPr lang="en-US" sz="1100" dirty="0">
-                <a:solidFill>
-                  <a:srgbClr val="3C4252"/>
-                </a:solidFill>
-              </a:rPr>
-              <a:t>判斷不適用就按「✕ 忽略此筆」</a:t>
-            </a:r>
-            <a:endParaRPr lang="en-US" sz="1100" dirty="0"/>
-          </a:p>
-          <a:p>
-            <a:pPr marL="342900" indent="-342900">
+              <a:buNone/>
+            </a:pPr>
+            <a:r>
+              <a:rPr lang="en-US" sz="1200" b="1" dirty="0">
+                <a:solidFill>
+                  <a:srgbClr val="D92D20"/>
+                </a:solidFill>
+              </a:rPr>
+              <a:t>② </a:t>
+            </a:r>
+            <a:pPr indent="0" marL="0">
               <a:lnSpc>
                 <a:spcPts val="1600"/>
               </a:lnSpc>
               <a:spcAft>
                 <a:spcPts val="900"/>
               </a:spcAft>
-              <a:buSzPct val="100000"/>
-              <a:buChar char="•"/>
+              <a:buNone/>
             </a:pPr>
             <a:r>
               <a:rPr lang="en-US" sz="1100" dirty="0">
@@ -9257,6 +11460,80 @@
                   <a:srgbClr val="3C4252"/>
                 </a:solidFill>
               </a:rPr>
+              <a:t>命中條件三選一：P/N 相同、品名是描述的子字串、包裝是描述的子字串</a:t>
+            </a:r>
+            <a:endParaRPr lang="en-US" sz="1100" dirty="0"/>
+          </a:p>
+          <a:p>
+            <a:pPr indent="0" marL="0">
+              <a:lnSpc>
+                <a:spcPts val="1600"/>
+              </a:lnSpc>
+              <a:spcAft>
+                <a:spcPts val="900"/>
+              </a:spcAft>
+              <a:buNone/>
+            </a:pPr>
+            <a:r>
+              <a:rPr lang="en-US" sz="1200" b="1" dirty="0">
+                <a:solidFill>
+                  <a:srgbClr val="D92D20"/>
+                </a:solidFill>
+              </a:rPr>
+              <a:t>③ </a:t>
+            </a:r>
+            <a:pPr indent="0" marL="0">
+              <a:lnSpc>
+                <a:spcPts val="1600"/>
+              </a:lnSpc>
+              <a:spcAft>
+                <a:spcPts val="900"/>
+              </a:spcAft>
+              <a:buNone/>
+            </a:pPr>
+            <a:r>
+              <a:rPr lang="en-US" sz="1100" dirty="0">
+                <a:solidFill>
+                  <a:srgbClr val="3C4252"/>
+                </a:solidFill>
+              </a:rPr>
+              <a:t>判斷不適用就按「✕ 忽略此筆」</a:t>
+            </a:r>
+            <a:endParaRPr lang="en-US" sz="1100" dirty="0"/>
+          </a:p>
+          <a:p>
+            <a:pPr indent="0" marL="0">
+              <a:lnSpc>
+                <a:spcPts val="1600"/>
+              </a:lnSpc>
+              <a:spcAft>
+                <a:spcPts val="900"/>
+              </a:spcAft>
+              <a:buNone/>
+            </a:pPr>
+            <a:r>
+              <a:rPr lang="en-US" sz="1200" b="1" dirty="0">
+                <a:solidFill>
+                  <a:srgbClr val="D92D20"/>
+                </a:solidFill>
+              </a:rPr>
+              <a:t>④ </a:t>
+            </a:r>
+            <a:pPr indent="0" marL="0">
+              <a:lnSpc>
+                <a:spcPts val="1600"/>
+              </a:lnSpc>
+              <a:spcAft>
+                <a:spcPts val="900"/>
+              </a:spcAft>
+              <a:buNone/>
+            </a:pPr>
+            <a:r>
+              <a:rPr lang="en-US" sz="1100" dirty="0">
+                <a:solidFill>
+                  <a:srgbClr val="3C4252"/>
+                </a:solidFill>
+              </a:rPr>
               <a:t>忽略後該列不會標橘底，Note 也不會寫進 Excel</a:t>
             </a:r>
             <a:endParaRPr lang="en-US" sz="1100" dirty="0"/>
@@ -9265,7 +11542,7 @@
       </p:sp>
       <p:sp>
         <p:nvSpPr>
-          <p:cNvPr id="7" name="warn"/>
+          <p:cNvPr id="15" name="warn"/>
           <p:cNvSpPr/>
           <p:nvPr/>
         </p:nvSpPr>
@@ -9292,7 +11569,7 @@
       </p:sp>
       <p:sp>
         <p:nvSpPr>
-          <p:cNvPr id="8" name="Shape 5"/>
+          <p:cNvPr id="16" name="Shape 13"/>
           <p:cNvSpPr/>
           <p:nvPr/>
         </p:nvSpPr>
@@ -9317,7 +11594,7 @@
       </p:sp>
       <p:sp>
         <p:nvSpPr>
-          <p:cNvPr id="9" name="Text 6"/>
+          <p:cNvPr id="17" name="Text 14"/>
           <p:cNvSpPr txBox="1"/>
           <p:nvPr/>
         </p:nvSpPr>
@@ -9353,7 +11630,7 @@
       </p:sp>
       <p:sp>
         <p:nvSpPr>
-          <p:cNvPr id="10" name="Text 7"/>
+          <p:cNvPr id="18" name="Text 15"/>
           <p:cNvSpPr txBox="1"/>
           <p:nvPr/>
         </p:nvSpPr>
@@ -10021,7 +12298,7 @@
                   </a:extLst>
                 </a:hlinkClick>
               </a:rPr>
-              <a:t>03　C 案　瀏覽器介面</a:t>
+              <a:t>03　S 案　瀏覽器介面</a:t>
             </a:r>
             <a:endParaRPr lang="en-US" sz="1250" dirty="0"/>
           </a:p>
@@ -10537,7 +12814,7 @@
                   </a:extLst>
                 </a:hlinkClick>
               </a:rPr>
-              <a:t>　　C 案其他頁面與 D 案對照</a:t>
+              <a:t>　　S 案其他頁面與 W 案對照</a:t>
             </a:r>
             <a:endParaRPr lang="en-US" sz="1050" dirty="0"/>
           </a:p>
@@ -10623,7 +12900,7 @@
                   </a:extLst>
                 </a:hlinkClick>
               </a:rPr>
-              <a:t>04　D 案　原生視窗</a:t>
+              <a:t>04　W 案　原生視窗</a:t>
             </a:r>
             <a:endParaRPr lang="en-US" sz="1250" dirty="0"/>
           </a:p>
@@ -12276,7 +14553,7 @@
       </p:sp>
       <p:pic>
         <p:nvPicPr>
-          <p:cNvPr id="4" name="shot" descr="F:\AI_BOM\docs\sop\shots\D_04_header.png">    </p:cNvPr>
+          <p:cNvPr id="4" name="shot" descr="F:\AI_BOM\docs\sop\shots\W_04_header.png">    </p:cNvPr>
           <p:cNvPicPr>
             <a:picLocks noChangeAspect="1"/>
           </p:cNvPicPr>
@@ -12327,7 +14604,251 @@
       </p:sp>
       <p:sp>
         <p:nvSpPr>
-          <p:cNvPr id="6" name="Text 3"/>
+          <p:cNvPr id="6" name="Shape 3"/>
+          <p:cNvSpPr/>
+          <p:nvPr/>
+        </p:nvSpPr>
+        <p:spPr>
+          <a:xfrm>
+            <a:off x="1987820" y="1487614"/>
+            <a:ext cx="169164" cy="169164"/>
+          </a:xfrm>
+          <a:prstGeom prst="ellipse">
+            <a:avLst/>
+          </a:prstGeom>
+          <a:solidFill>
+            <a:srgbClr val="D92D20"/>
+          </a:solidFill>
+          <a:ln w="19050">
+            <a:solidFill>
+              <a:srgbClr val="FFFFFF"/>
+            </a:solidFill>
+            <a:prstDash val="solid"/>
+          </a:ln>
+        </p:spPr>
+      </p:sp>
+      <p:sp>
+        <p:nvSpPr>
+          <p:cNvPr id="7" name="Text 4"/>
+          <p:cNvSpPr txBox="1"/>
+          <p:nvPr/>
+        </p:nvSpPr>
+        <p:spPr>
+          <a:xfrm>
+            <a:off x="1903238" y="1403032"/>
+            <a:ext cx="338328" cy="338328"/>
+          </a:xfrm>
+          <a:prstGeom prst="rect">
+            <a:avLst/>
+          </a:prstGeom>
+          <a:noFill/>
+          <a:ln/>
+        </p:spPr>
+        <p:txBody>
+          <a:bodyPr wrap="square" lIns="0" tIns="0" rIns="0" bIns="0" rtlCol="0" anchor="ctr"/>
+          <a:lstStyle/>
+          <a:p>
+            <a:pPr algn="ctr" indent="0" marL="0">
+              <a:buNone/>
+            </a:pPr>
+            <a:r>
+              <a:rPr lang="en-US" sz="850" b="1" dirty="0">
+                <a:solidFill>
+                  <a:srgbClr val="FFFFFF"/>
+                </a:solidFill>
+              </a:rPr>
+              <a:t>1</a:t>
+            </a:r>
+            <a:endParaRPr lang="en-US" sz="850" dirty="0"/>
+          </a:p>
+        </p:txBody>
+      </p:sp>
+      <p:sp>
+        <p:nvSpPr>
+          <p:cNvPr id="8" name="Shape 5"/>
+          <p:cNvSpPr/>
+          <p:nvPr/>
+        </p:nvSpPr>
+        <p:spPr>
+          <a:xfrm>
+            <a:off x="1987820" y="1853160"/>
+            <a:ext cx="169164" cy="169164"/>
+          </a:xfrm>
+          <a:prstGeom prst="ellipse">
+            <a:avLst/>
+          </a:prstGeom>
+          <a:solidFill>
+            <a:srgbClr val="D92D20"/>
+          </a:solidFill>
+          <a:ln w="19050">
+            <a:solidFill>
+              <a:srgbClr val="FFFFFF"/>
+            </a:solidFill>
+            <a:prstDash val="solid"/>
+          </a:ln>
+        </p:spPr>
+      </p:sp>
+      <p:sp>
+        <p:nvSpPr>
+          <p:cNvPr id="9" name="Text 6"/>
+          <p:cNvSpPr txBox="1"/>
+          <p:nvPr/>
+        </p:nvSpPr>
+        <p:spPr>
+          <a:xfrm>
+            <a:off x="1903238" y="1768578"/>
+            <a:ext cx="338328" cy="338328"/>
+          </a:xfrm>
+          <a:prstGeom prst="rect">
+            <a:avLst/>
+          </a:prstGeom>
+          <a:noFill/>
+          <a:ln/>
+        </p:spPr>
+        <p:txBody>
+          <a:bodyPr wrap="square" lIns="0" tIns="0" rIns="0" bIns="0" rtlCol="0" anchor="ctr"/>
+          <a:lstStyle/>
+          <a:p>
+            <a:pPr algn="ctr" indent="0" marL="0">
+              <a:buNone/>
+            </a:pPr>
+            <a:r>
+              <a:rPr lang="en-US" sz="850" b="1" dirty="0">
+                <a:solidFill>
+                  <a:srgbClr val="FFFFFF"/>
+                </a:solidFill>
+              </a:rPr>
+              <a:t>2</a:t>
+            </a:r>
+            <a:endParaRPr lang="en-US" sz="850" dirty="0"/>
+          </a:p>
+        </p:txBody>
+      </p:sp>
+      <p:sp>
+        <p:nvSpPr>
+          <p:cNvPr id="10" name="Shape 7"/>
+          <p:cNvSpPr/>
+          <p:nvPr/>
+        </p:nvSpPr>
+        <p:spPr>
+          <a:xfrm>
+            <a:off x="1987820" y="2584252"/>
+            <a:ext cx="169164" cy="169164"/>
+          </a:xfrm>
+          <a:prstGeom prst="ellipse">
+            <a:avLst/>
+          </a:prstGeom>
+          <a:solidFill>
+            <a:srgbClr val="D92D20"/>
+          </a:solidFill>
+          <a:ln w="19050">
+            <a:solidFill>
+              <a:srgbClr val="FFFFFF"/>
+            </a:solidFill>
+            <a:prstDash val="solid"/>
+          </a:ln>
+        </p:spPr>
+      </p:sp>
+      <p:sp>
+        <p:nvSpPr>
+          <p:cNvPr id="11" name="Text 8"/>
+          <p:cNvSpPr txBox="1"/>
+          <p:nvPr/>
+        </p:nvSpPr>
+        <p:spPr>
+          <a:xfrm>
+            <a:off x="1903238" y="2499670"/>
+            <a:ext cx="338328" cy="338328"/>
+          </a:xfrm>
+          <a:prstGeom prst="rect">
+            <a:avLst/>
+          </a:prstGeom>
+          <a:noFill/>
+          <a:ln/>
+        </p:spPr>
+        <p:txBody>
+          <a:bodyPr wrap="square" lIns="0" tIns="0" rIns="0" bIns="0" rtlCol="0" anchor="ctr"/>
+          <a:lstStyle/>
+          <a:p>
+            <a:pPr algn="ctr" indent="0" marL="0">
+              <a:buNone/>
+            </a:pPr>
+            <a:r>
+              <a:rPr lang="en-US" sz="850" b="1" dirty="0">
+                <a:solidFill>
+                  <a:srgbClr val="FFFFFF"/>
+                </a:solidFill>
+              </a:rPr>
+              <a:t>3</a:t>
+            </a:r>
+            <a:endParaRPr lang="en-US" sz="850" dirty="0"/>
+          </a:p>
+        </p:txBody>
+      </p:sp>
+      <p:sp>
+        <p:nvSpPr>
+          <p:cNvPr id="12" name="Shape 9"/>
+          <p:cNvSpPr/>
+          <p:nvPr/>
+        </p:nvSpPr>
+        <p:spPr>
+          <a:xfrm>
+            <a:off x="3858054" y="2949797"/>
+            <a:ext cx="169164" cy="169164"/>
+          </a:xfrm>
+          <a:prstGeom prst="ellipse">
+            <a:avLst/>
+          </a:prstGeom>
+          <a:solidFill>
+            <a:srgbClr val="D92D20"/>
+          </a:solidFill>
+          <a:ln w="19050">
+            <a:solidFill>
+              <a:srgbClr val="FFFFFF"/>
+            </a:solidFill>
+            <a:prstDash val="solid"/>
+          </a:ln>
+        </p:spPr>
+      </p:sp>
+      <p:sp>
+        <p:nvSpPr>
+          <p:cNvPr id="13" name="Text 10"/>
+          <p:cNvSpPr txBox="1"/>
+          <p:nvPr/>
+        </p:nvSpPr>
+        <p:spPr>
+          <a:xfrm>
+            <a:off x="3773472" y="2865215"/>
+            <a:ext cx="338328" cy="338328"/>
+          </a:xfrm>
+          <a:prstGeom prst="rect">
+            <a:avLst/>
+          </a:prstGeom>
+          <a:noFill/>
+          <a:ln/>
+        </p:spPr>
+        <p:txBody>
+          <a:bodyPr wrap="square" lIns="0" tIns="0" rIns="0" bIns="0" rtlCol="0" anchor="ctr"/>
+          <a:lstStyle/>
+          <a:p>
+            <a:pPr algn="ctr" indent="0" marL="0">
+              <a:buNone/>
+            </a:pPr>
+            <a:r>
+              <a:rPr lang="en-US" sz="850" b="1" dirty="0">
+                <a:solidFill>
+                  <a:srgbClr val="FFFFFF"/>
+                </a:solidFill>
+              </a:rPr>
+              <a:t>4</a:t>
+            </a:r>
+            <a:endParaRPr lang="en-US" sz="850" dirty="0"/>
+          </a:p>
+        </p:txBody>
+      </p:sp>
+      <p:sp>
+        <p:nvSpPr>
+          <p:cNvPr id="14" name="Text 11"/>
           <p:cNvSpPr txBox="1"/>
           <p:nvPr/>
         </p:nvSpPr>
@@ -12346,36 +14867,31 @@
           <a:bodyPr wrap="square" lIns="0" tIns="0" rIns="0" bIns="0" rtlCol="0" anchor="ctr"/>
           <a:lstStyle/>
           <a:p>
-            <a:pPr marL="342900" indent="-342900">
+            <a:pPr indent="0" marL="0">
               <a:lnSpc>
                 <a:spcPts val="1600"/>
               </a:lnSpc>
               <a:spcAft>
                 <a:spcPts val="900"/>
               </a:spcAft>
-              <a:buSzPct val="100000"/>
-              <a:buChar char="•"/>
-            </a:pPr>
-            <a:r>
-              <a:rPr lang="en-US" sz="1100" dirty="0">
-                <a:solidFill>
-                  <a:srgbClr val="3C4252"/>
-                </a:solidFill>
-              </a:rPr>
-              <a:t>對應輸出 Excel 的 rows 3–8</a:t>
-            </a:r>
-            <a:endParaRPr lang="en-US" sz="1100" dirty="0"/>
-          </a:p>
-          <a:p>
-            <a:pPr marL="342900" indent="-342900">
+              <a:buNone/>
+            </a:pPr>
+            <a:r>
+              <a:rPr lang="en-US" sz="1200" b="1" dirty="0">
+                <a:solidFill>
+                  <a:srgbClr val="D92D20"/>
+                </a:solidFill>
+              </a:rPr>
+              <a:t>① </a:t>
+            </a:r>
+            <a:pPr indent="0" marL="0">
               <a:lnSpc>
                 <a:spcPts val="1600"/>
               </a:lnSpc>
               <a:spcAft>
                 <a:spcPts val="900"/>
               </a:spcAft>
-              <a:buSzPct val="100000"/>
-              <a:buChar char="•"/>
+              <a:buNone/>
             </a:pPr>
             <a:r>
               <a:rPr lang="en-US" sz="1100" dirty="0">
@@ -12383,41 +14899,110 @@
                   <a:srgbClr val="3C4252"/>
                 </a:solidFill>
               </a:rPr>
-              <a:t>PCB板號 / PCB料號 / RC/EC NO. / PCB供應商 / PCB 規格</a:t>
+              <a:t>對應輸出 Excel 的 rows 3–8</a:t>
             </a:r>
             <a:endParaRPr lang="en-US" sz="1100" dirty="0"/>
           </a:p>
           <a:p>
-            <a:pPr marL="342900" indent="-342900">
+            <a:pPr indent="0" marL="0">
               <a:lnSpc>
                 <a:spcPts val="1600"/>
               </a:lnSpc>
               <a:spcAft>
                 <a:spcPts val="900"/>
               </a:spcAft>
-              <a:buSzPct val="100000"/>
-              <a:buChar char="•"/>
-            </a:pPr>
-            <a:r>
-              <a:rPr lang="en-US" sz="1100" dirty="0">
-                <a:solidFill>
-                  <a:srgbClr val="3C4252"/>
-                </a:solidFill>
-              </a:rPr>
-              <a:t>發行序號 / 發行(改版)日期 / 目前版次 / Support IC Type</a:t>
-            </a:r>
-            <a:endParaRPr lang="en-US" sz="1100" dirty="0"/>
-          </a:p>
-          <a:p>
-            <a:pPr marL="342900" indent="-342900">
+              <a:buNone/>
+            </a:pPr>
+            <a:r>
+              <a:rPr lang="en-US" sz="1200" b="1" dirty="0">
+                <a:solidFill>
+                  <a:srgbClr val="D92D20"/>
+                </a:solidFill>
+              </a:rPr>
+              <a:t>② </a:t>
+            </a:r>
+            <a:pPr indent="0" marL="0">
               <a:lnSpc>
                 <a:spcPts val="1600"/>
               </a:lnSpc>
               <a:spcAft>
                 <a:spcPts val="900"/>
               </a:spcAft>
-              <a:buSzPct val="100000"/>
-              <a:buChar char="•"/>
+              <a:buNone/>
+            </a:pPr>
+            <a:r>
+              <a:rPr lang="en-US" sz="1100" dirty="0">
+                <a:solidFill>
+                  <a:srgbClr val="3C4252"/>
+                </a:solidFill>
+              </a:rPr>
+              <a:t>PCB板號 / PCB料號 / RC/EC NO. / PCB供應商 / PCB 規格</a:t>
+            </a:r>
+            <a:endParaRPr lang="en-US" sz="1100" dirty="0"/>
+          </a:p>
+          <a:p>
+            <a:pPr indent="0" marL="0">
+              <a:lnSpc>
+                <a:spcPts val="1600"/>
+              </a:lnSpc>
+              <a:spcAft>
+                <a:spcPts val="900"/>
+              </a:spcAft>
+              <a:buNone/>
+            </a:pPr>
+            <a:r>
+              <a:rPr lang="en-US" sz="1200" b="1" dirty="0">
+                <a:solidFill>
+                  <a:srgbClr val="D92D20"/>
+                </a:solidFill>
+              </a:rPr>
+              <a:t>③ </a:t>
+            </a:r>
+            <a:pPr indent="0" marL="0">
+              <a:lnSpc>
+                <a:spcPts val="1600"/>
+              </a:lnSpc>
+              <a:spcAft>
+                <a:spcPts val="900"/>
+              </a:spcAft>
+              <a:buNone/>
+            </a:pPr>
+            <a:r>
+              <a:rPr lang="en-US" sz="1100" dirty="0">
+                <a:solidFill>
+                  <a:srgbClr val="3C4252"/>
+                </a:solidFill>
+              </a:rPr>
+              <a:t>發行序號 / 發行(改版)日期 / 目前版次 / Support IC Type</a:t>
+            </a:r>
+            <a:endParaRPr lang="en-US" sz="1100" dirty="0"/>
+          </a:p>
+          <a:p>
+            <a:pPr indent="0" marL="0">
+              <a:lnSpc>
+                <a:spcPts val="1600"/>
+              </a:lnSpc>
+              <a:spcAft>
+                <a:spcPts val="900"/>
+              </a:spcAft>
+              <a:buNone/>
+            </a:pPr>
+            <a:r>
+              <a:rPr lang="en-US" sz="1200" b="1" dirty="0">
+                <a:solidFill>
+                  <a:srgbClr val="D92D20"/>
+                </a:solidFill>
+              </a:rPr>
+              <a:t>④ </a:t>
+            </a:r>
+            <a:pPr indent="0" marL="0">
+              <a:lnSpc>
+                <a:spcPts val="1600"/>
+              </a:lnSpc>
+              <a:spcAft>
+                <a:spcPts val="900"/>
+              </a:spcAft>
+              <a:buNone/>
             </a:pPr>
             <a:r>
               <a:rPr lang="en-US" sz="1100" dirty="0">
@@ -12537,7 +15122,7 @@
       </p:sp>
       <p:pic>
         <p:nvPicPr>
-          <p:cNvPr id="4" name="shot" descr="F:\AI_BOM\docs\sop\shots\D_05_export.png">    </p:cNvPr>
+          <p:cNvPr id="4" name="shot" descr="F:\AI_BOM\docs\sop\shots\W_05_export.png">    </p:cNvPr>
           <p:cNvPicPr>
             <a:picLocks noChangeAspect="1"/>
           </p:cNvPicPr>
@@ -12588,7 +15173,251 @@
       </p:sp>
       <p:sp>
         <p:nvSpPr>
-          <p:cNvPr id="6" name="Text 3"/>
+          <p:cNvPr id="6" name="Shape 3"/>
+          <p:cNvSpPr/>
+          <p:nvPr/>
+        </p:nvSpPr>
+        <p:spPr>
+          <a:xfrm>
+            <a:off x="3390495" y="1542871"/>
+            <a:ext cx="169164" cy="169164"/>
+          </a:xfrm>
+          <a:prstGeom prst="ellipse">
+            <a:avLst/>
+          </a:prstGeom>
+          <a:solidFill>
+            <a:srgbClr val="D92D20"/>
+          </a:solidFill>
+          <a:ln w="19050">
+            <a:solidFill>
+              <a:srgbClr val="FFFFFF"/>
+            </a:solidFill>
+            <a:prstDash val="solid"/>
+          </a:ln>
+        </p:spPr>
+      </p:sp>
+      <p:sp>
+        <p:nvSpPr>
+          <p:cNvPr id="7" name="Text 4"/>
+          <p:cNvSpPr txBox="1"/>
+          <p:nvPr/>
+        </p:nvSpPr>
+        <p:spPr>
+          <a:xfrm>
+            <a:off x="3305913" y="1458289"/>
+            <a:ext cx="338328" cy="338328"/>
+          </a:xfrm>
+          <a:prstGeom prst="rect">
+            <a:avLst/>
+          </a:prstGeom>
+          <a:noFill/>
+          <a:ln/>
+        </p:spPr>
+        <p:txBody>
+          <a:bodyPr wrap="square" lIns="0" tIns="0" rIns="0" bIns="0" rtlCol="0" anchor="ctr"/>
+          <a:lstStyle/>
+          <a:p>
+            <a:pPr algn="ctr" indent="0" marL="0">
+              <a:buNone/>
+            </a:pPr>
+            <a:r>
+              <a:rPr lang="en-US" sz="850" b="1" dirty="0">
+                <a:solidFill>
+                  <a:srgbClr val="FFFFFF"/>
+                </a:solidFill>
+              </a:rPr>
+              <a:t>1</a:t>
+            </a:r>
+            <a:endParaRPr lang="en-US" sz="850" dirty="0"/>
+          </a:p>
+        </p:txBody>
+      </p:sp>
+      <p:sp>
+        <p:nvSpPr>
+          <p:cNvPr id="8" name="Shape 5"/>
+          <p:cNvSpPr/>
+          <p:nvPr/>
+        </p:nvSpPr>
+        <p:spPr>
+          <a:xfrm>
+            <a:off x="1669030" y="1882914"/>
+            <a:ext cx="169164" cy="169164"/>
+          </a:xfrm>
+          <a:prstGeom prst="ellipse">
+            <a:avLst/>
+          </a:prstGeom>
+          <a:solidFill>
+            <a:srgbClr val="D92D20"/>
+          </a:solidFill>
+          <a:ln w="19050">
+            <a:solidFill>
+              <a:srgbClr val="FFFFFF"/>
+            </a:solidFill>
+            <a:prstDash val="solid"/>
+          </a:ln>
+        </p:spPr>
+      </p:sp>
+      <p:sp>
+        <p:nvSpPr>
+          <p:cNvPr id="9" name="Text 6"/>
+          <p:cNvSpPr txBox="1"/>
+          <p:nvPr/>
+        </p:nvSpPr>
+        <p:spPr>
+          <a:xfrm>
+            <a:off x="1584448" y="1798332"/>
+            <a:ext cx="338328" cy="338328"/>
+          </a:xfrm>
+          <a:prstGeom prst="rect">
+            <a:avLst/>
+          </a:prstGeom>
+          <a:noFill/>
+          <a:ln/>
+        </p:spPr>
+        <p:txBody>
+          <a:bodyPr wrap="square" lIns="0" tIns="0" rIns="0" bIns="0" rtlCol="0" anchor="ctr"/>
+          <a:lstStyle/>
+          <a:p>
+            <a:pPr algn="ctr" indent="0" marL="0">
+              <a:buNone/>
+            </a:pPr>
+            <a:r>
+              <a:rPr lang="en-US" sz="850" b="1" dirty="0">
+                <a:solidFill>
+                  <a:srgbClr val="FFFFFF"/>
+                </a:solidFill>
+              </a:rPr>
+              <a:t>2</a:t>
+            </a:r>
+            <a:endParaRPr lang="en-US" sz="850" dirty="0"/>
+          </a:p>
+        </p:txBody>
+      </p:sp>
+      <p:sp>
+        <p:nvSpPr>
+          <p:cNvPr id="10" name="Shape 7"/>
+          <p:cNvSpPr/>
+          <p:nvPr/>
+        </p:nvSpPr>
+        <p:spPr>
+          <a:xfrm>
+            <a:off x="2166342" y="1882914"/>
+            <a:ext cx="169164" cy="169164"/>
+          </a:xfrm>
+          <a:prstGeom prst="ellipse">
+            <a:avLst/>
+          </a:prstGeom>
+          <a:solidFill>
+            <a:srgbClr val="D92D20"/>
+          </a:solidFill>
+          <a:ln w="19050">
+            <a:solidFill>
+              <a:srgbClr val="FFFFFF"/>
+            </a:solidFill>
+            <a:prstDash val="solid"/>
+          </a:ln>
+        </p:spPr>
+      </p:sp>
+      <p:sp>
+        <p:nvSpPr>
+          <p:cNvPr id="11" name="Text 8"/>
+          <p:cNvSpPr txBox="1"/>
+          <p:nvPr/>
+        </p:nvSpPr>
+        <p:spPr>
+          <a:xfrm>
+            <a:off x="2081760" y="1798332"/>
+            <a:ext cx="338328" cy="338328"/>
+          </a:xfrm>
+          <a:prstGeom prst="rect">
+            <a:avLst/>
+          </a:prstGeom>
+          <a:noFill/>
+          <a:ln/>
+        </p:spPr>
+        <p:txBody>
+          <a:bodyPr wrap="square" lIns="0" tIns="0" rIns="0" bIns="0" rtlCol="0" anchor="ctr"/>
+          <a:lstStyle/>
+          <a:p>
+            <a:pPr algn="ctr" indent="0" marL="0">
+              <a:buNone/>
+            </a:pPr>
+            <a:r>
+              <a:rPr lang="en-US" sz="850" b="1" dirty="0">
+                <a:solidFill>
+                  <a:srgbClr val="FFFFFF"/>
+                </a:solidFill>
+              </a:rPr>
+              <a:t>3</a:t>
+            </a:r>
+            <a:endParaRPr lang="en-US" sz="850" dirty="0"/>
+          </a:p>
+        </p:txBody>
+      </p:sp>
+      <p:sp>
+        <p:nvSpPr>
+          <p:cNvPr id="12" name="Shape 9"/>
+          <p:cNvSpPr/>
+          <p:nvPr/>
+        </p:nvSpPr>
+        <p:spPr>
+          <a:xfrm>
+            <a:off x="2412873" y="2150697"/>
+            <a:ext cx="169164" cy="169164"/>
+          </a:xfrm>
+          <a:prstGeom prst="ellipse">
+            <a:avLst/>
+          </a:prstGeom>
+          <a:solidFill>
+            <a:srgbClr val="D92D20"/>
+          </a:solidFill>
+          <a:ln w="19050">
+            <a:solidFill>
+              <a:srgbClr val="FFFFFF"/>
+            </a:solidFill>
+            <a:prstDash val="solid"/>
+          </a:ln>
+        </p:spPr>
+      </p:sp>
+      <p:sp>
+        <p:nvSpPr>
+          <p:cNvPr id="13" name="Text 10"/>
+          <p:cNvSpPr txBox="1"/>
+          <p:nvPr/>
+        </p:nvSpPr>
+        <p:spPr>
+          <a:xfrm>
+            <a:off x="2328291" y="2066115"/>
+            <a:ext cx="338328" cy="338328"/>
+          </a:xfrm>
+          <a:prstGeom prst="rect">
+            <a:avLst/>
+          </a:prstGeom>
+          <a:noFill/>
+          <a:ln/>
+        </p:spPr>
+        <p:txBody>
+          <a:bodyPr wrap="square" lIns="0" tIns="0" rIns="0" bIns="0" rtlCol="0" anchor="ctr"/>
+          <a:lstStyle/>
+          <a:p>
+            <a:pPr algn="ctr" indent="0" marL="0">
+              <a:buNone/>
+            </a:pPr>
+            <a:r>
+              <a:rPr lang="en-US" sz="850" b="1" dirty="0">
+                <a:solidFill>
+                  <a:srgbClr val="FFFFFF"/>
+                </a:solidFill>
+              </a:rPr>
+              <a:t>4</a:t>
+            </a:r>
+            <a:endParaRPr lang="en-US" sz="850" dirty="0"/>
+          </a:p>
+        </p:txBody>
+      </p:sp>
+      <p:sp>
+        <p:nvSpPr>
+          <p:cNvPr id="14" name="Text 11"/>
           <p:cNvSpPr txBox="1"/>
           <p:nvPr/>
         </p:nvSpPr>
@@ -12607,36 +15436,31 @@
           <a:bodyPr wrap="square" lIns="0" tIns="0" rIns="0" bIns="0" rtlCol="0" anchor="ctr"/>
           <a:lstStyle/>
           <a:p>
-            <a:pPr marL="342900" indent="-342900">
+            <a:pPr indent="0" marL="0">
               <a:lnSpc>
                 <a:spcPts val="1600"/>
               </a:lnSpc>
               <a:spcAft>
                 <a:spcPts val="900"/>
               </a:spcAft>
-              <a:buSzPct val="100000"/>
-              <a:buChar char="•"/>
-            </a:pPr>
-            <a:r>
-              <a:rPr lang="en-US" sz="1100" dirty="0">
-                <a:solidFill>
-                  <a:srgbClr val="3C4252"/>
-                </a:solidFill>
-              </a:rPr>
-              <a:t>確認輸出路徑後按「▶ 產出 Excel」</a:t>
-            </a:r>
-            <a:endParaRPr lang="en-US" sz="1100" dirty="0"/>
-          </a:p>
-          <a:p>
-            <a:pPr marL="342900" indent="-342900">
+              <a:buNone/>
+            </a:pPr>
+            <a:r>
+              <a:rPr lang="en-US" sz="1200" b="1" dirty="0">
+                <a:solidFill>
+                  <a:srgbClr val="D92D20"/>
+                </a:solidFill>
+              </a:rPr>
+              <a:t>① </a:t>
+            </a:r>
+            <a:pPr indent="0" marL="0">
               <a:lnSpc>
                 <a:spcPts val="1600"/>
               </a:lnSpc>
               <a:spcAft>
                 <a:spcPts val="900"/>
               </a:spcAft>
-              <a:buSzPct val="100000"/>
-              <a:buChar char="•"/>
+              <a:buNone/>
             </a:pPr>
             <a:r>
               <a:rPr lang="en-US" sz="1100" dirty="0">
@@ -12644,41 +15468,36 @@
                   <a:srgbClr val="3C4252"/>
                 </a:solidFill>
               </a:rPr>
-              <a:t>同名檔已經存在時會跳出確認視窗，按「取消」就不產出</a:t>
+              <a:t>輸出路徑可以直接在這裡改，或按右邊的「變更…」</a:t>
             </a:r>
             <a:endParaRPr lang="en-US" sz="1100" dirty="0"/>
           </a:p>
           <a:p>
-            <a:pPr marL="342900" indent="-342900">
+            <a:pPr indent="0" marL="0">
               <a:lnSpc>
                 <a:spcPts val="1600"/>
               </a:lnSpc>
               <a:spcAft>
                 <a:spcPts val="900"/>
               </a:spcAft>
-              <a:buSzPct val="100000"/>
-              <a:buChar char="•"/>
-            </a:pPr>
-            <a:r>
-              <a:rPr lang="en-US" sz="1100" dirty="0">
-                <a:solidFill>
-                  <a:srgbClr val="3C4252"/>
-                </a:solidFill>
-              </a:rPr>
-              <a:t>「開啟輸出資料夾」會直接叫出檔案總管</a:t>
-            </a:r>
-            <a:endParaRPr lang="en-US" sz="1100" dirty="0"/>
-          </a:p>
-          <a:p>
-            <a:pPr marL="342900" indent="-342900">
+              <a:buNone/>
+            </a:pPr>
+            <a:r>
+              <a:rPr lang="en-US" sz="1200" b="1" dirty="0">
+                <a:solidFill>
+                  <a:srgbClr val="D92D20"/>
+                </a:solidFill>
+              </a:rPr>
+              <a:t>② </a:t>
+            </a:r>
+            <a:pPr indent="0" marL="0">
               <a:lnSpc>
                 <a:spcPts val="1600"/>
               </a:lnSpc>
               <a:spcAft>
                 <a:spcPts val="900"/>
               </a:spcAft>
-              <a:buSzPct val="100000"/>
-              <a:buChar char="•"/>
+              <a:buNone/>
             </a:pPr>
             <a:r>
               <a:rPr lang="en-US" sz="1100" dirty="0">
@@ -12686,9 +15505,227 @@
                   <a:srgbClr val="3C4252"/>
                 </a:solidFill>
               </a:rPr>
-              <a:t>檔案設定與比對結果頁的右上角也有「▶ 產出 E-BOM」，不必切到這一頁</a:t>
+              <a:t>確認無誤後按「▶ 產出 Excel」</a:t>
             </a:r>
             <a:endParaRPr lang="en-US" sz="1100" dirty="0"/>
+          </a:p>
+          <a:p>
+            <a:pPr indent="0" marL="0">
+              <a:lnSpc>
+                <a:spcPts val="1600"/>
+              </a:lnSpc>
+              <a:spcAft>
+                <a:spcPts val="900"/>
+              </a:spcAft>
+              <a:buNone/>
+            </a:pPr>
+            <a:r>
+              <a:rPr lang="en-US" sz="1200" b="1" dirty="0">
+                <a:solidFill>
+                  <a:srgbClr val="D92D20"/>
+                </a:solidFill>
+              </a:rPr>
+              <a:t>③ </a:t>
+            </a:r>
+            <a:pPr indent="0" marL="0">
+              <a:lnSpc>
+                <a:spcPts val="1600"/>
+              </a:lnSpc>
+              <a:spcAft>
+                <a:spcPts val="900"/>
+              </a:spcAft>
+              <a:buNone/>
+            </a:pPr>
+            <a:r>
+              <a:rPr lang="en-US" sz="1100" dirty="0">
+                <a:solidFill>
+                  <a:srgbClr val="3C4252"/>
+                </a:solidFill>
+              </a:rPr>
+              <a:t>「開啟輸出資料夾」會直接叫出檔案總管</a:t>
+            </a:r>
+            <a:endParaRPr lang="en-US" sz="1100" dirty="0"/>
+          </a:p>
+          <a:p>
+            <a:pPr indent="0" marL="0">
+              <a:lnSpc>
+                <a:spcPts val="1600"/>
+              </a:lnSpc>
+              <a:spcAft>
+                <a:spcPts val="900"/>
+              </a:spcAft>
+              <a:buNone/>
+            </a:pPr>
+            <a:r>
+              <a:rPr lang="en-US" sz="1200" b="1" dirty="0">
+                <a:solidFill>
+                  <a:srgbClr val="D92D20"/>
+                </a:solidFill>
+              </a:rPr>
+              <a:t>④ </a:t>
+            </a:r>
+            <a:pPr indent="0" marL="0">
+              <a:lnSpc>
+                <a:spcPts val="1600"/>
+              </a:lnSpc>
+              <a:spcAft>
+                <a:spcPts val="900"/>
+              </a:spcAft>
+              <a:buNone/>
+            </a:pPr>
+            <a:r>
+              <a:rPr lang="en-US" sz="1100" dirty="0">
+                <a:solidFill>
+                  <a:srgbClr val="3C4252"/>
+                </a:solidFill>
+              </a:rPr>
+              <a:t>同名檔會先跳確認視窗；按「取消」就不產出，確定覆蓋時日誌會留下紀錄</a:t>
+            </a:r>
+            <a:endParaRPr lang="en-US" sz="1100" dirty="0"/>
+          </a:p>
+        </p:txBody>
+      </p:sp>
+      <p:sp>
+        <p:nvSpPr>
+          <p:cNvPr id="15" name="warn"/>
+          <p:cNvSpPr/>
+          <p:nvPr/>
+        </p:nvSpPr>
+        <p:spPr>
+          <a:xfrm>
+            <a:off x="6172200" y="3383280"/>
+            <a:ext cx="2514600" cy="1298448"/>
+          </a:xfrm>
+          <a:prstGeom prst="roundRect">
+            <a:avLst>
+              <a:gd name="adj" fmla="val 4225"/>
+            </a:avLst>
+          </a:prstGeom>
+          <a:solidFill>
+            <a:srgbClr val="FFF6EC"/>
+          </a:solidFill>
+          <a:ln w="12700">
+            <a:solidFill>
+              <a:srgbClr val="F0D3AE"/>
+            </a:solidFill>
+            <a:prstDash val="solid"/>
+          </a:ln>
+        </p:spPr>
+      </p:sp>
+      <p:sp>
+        <p:nvSpPr>
+          <p:cNvPr id="16" name="Shape 13"/>
+          <p:cNvSpPr/>
+          <p:nvPr/>
+        </p:nvSpPr>
+        <p:spPr>
+          <a:xfrm>
+            <a:off x="6300216" y="3529584"/>
+            <a:ext cx="118872" cy="118872"/>
+          </a:xfrm>
+          <a:prstGeom prst="ellipse">
+            <a:avLst/>
+          </a:prstGeom>
+          <a:solidFill>
+            <a:srgbClr val="E8863A"/>
+          </a:solidFill>
+          <a:ln w="12700">
+            <a:solidFill>
+              <a:srgbClr val="E8863A"/>
+            </a:solidFill>
+            <a:prstDash val="solid"/>
+          </a:ln>
+        </p:spPr>
+      </p:sp>
+      <p:sp>
+        <p:nvSpPr>
+          <p:cNvPr id="17" name="Text 14"/>
+          <p:cNvSpPr txBox="1"/>
+          <p:nvPr/>
+        </p:nvSpPr>
+        <p:spPr>
+          <a:xfrm>
+            <a:off x="6473952" y="3465576"/>
+            <a:ext cx="2057400" cy="228600"/>
+          </a:xfrm>
+          <a:prstGeom prst="rect">
+            <a:avLst/>
+          </a:prstGeom>
+          <a:noFill/>
+          <a:ln/>
+        </p:spPr>
+        <p:txBody>
+          <a:bodyPr wrap="square" lIns="0" tIns="0" rIns="0" bIns="0" rtlCol="0" anchor="ctr"/>
+          <a:lstStyle/>
+          <a:p>
+            <a:pPr indent="0" marL="0">
+              <a:buNone/>
+            </a:pPr>
+            <a:r>
+              <a:rPr lang="en-US" sz="1050" b="1" dirty="0">
+                <a:solidFill>
+                  <a:srgbClr val="6B4413"/>
+                </a:solidFill>
+              </a:rPr>
+              <a:t>注意</a:t>
+            </a:r>
+            <a:endParaRPr lang="en-US" sz="1050" dirty="0"/>
+          </a:p>
+        </p:txBody>
+      </p:sp>
+      <p:sp>
+        <p:nvSpPr>
+          <p:cNvPr id="18" name="Text 15"/>
+          <p:cNvSpPr txBox="1"/>
+          <p:nvPr/>
+        </p:nvSpPr>
+        <p:spPr>
+          <a:xfrm>
+            <a:off x="6300216" y="3730752"/>
+            <a:ext cx="2258568" cy="896112"/>
+          </a:xfrm>
+          <a:prstGeom prst="rect">
+            <a:avLst/>
+          </a:prstGeom>
+          <a:noFill/>
+          <a:ln/>
+        </p:spPr>
+        <p:txBody>
+          <a:bodyPr wrap="square" lIns="0" tIns="0" rIns="0" bIns="0" rtlCol="0" anchor="ctr"/>
+          <a:lstStyle/>
+          <a:p>
+            <a:pPr indent="0" marL="0">
+              <a:lnSpc>
+                <a:spcPts val="1400"/>
+              </a:lnSpc>
+              <a:buNone/>
+            </a:pPr>
+            <a:r>
+              <a:rPr lang="en-US" sz="1000" dirty="0">
+                <a:solidFill>
+                  <a:srgbClr val="6B4413"/>
+                </a:solidFill>
+              </a:rPr>
+              <a:t>檔案設定與比對結果頁的右上角也有「▶ 產出 E-BOM」，</a:t>
+            </a:r>
+            <a:endParaRPr lang="en-US" sz="1000" dirty="0"/>
+          </a:p>
+          <a:p>
+            <a:pPr indent="0" marL="0">
+              <a:lnSpc>
+                <a:spcPts val="1400"/>
+              </a:lnSpc>
+              <a:buNone/>
+            </a:pPr>
+            <a:r>
+              <a:rPr lang="en-US" sz="1000" dirty="0">
+                <a:solidFill>
+                  <a:srgbClr val="6B4413"/>
+                </a:solidFill>
+              </a:rPr>
+              <a:t>不必切到這一頁也能產出。</a:t>
+            </a:r>
+            <a:endParaRPr lang="en-US" sz="1000" dirty="0"/>
           </a:p>
         </p:txBody>
       </p:sp>
@@ -12940,7 +15977,7 @@
       </p:sp>
       <p:pic>
         <p:nvPicPr>
-          <p:cNvPr id="4" name="shot" descr="F:\AI_BOM\docs\sop\shots\D_06_unknown.png">    </p:cNvPr>
+          <p:cNvPr id="4" name="shot" descr="F:\AI_BOM\docs\sop\shots\W_06_unknown.png">    </p:cNvPr>
           <p:cNvPicPr>
             <a:picLocks noChangeAspect="1"/>
           </p:cNvPicPr>
@@ -14629,7 +17666,7 @@
       </p:sp>
       <p:pic>
         <p:nvPicPr>
-          <p:cNvPr id="4" name="shot" descr="F:\AI_BOM\docs\sop\shots\D_07_r8.png">    </p:cNvPr>
+          <p:cNvPr id="4" name="shot" descr="F:\AI_BOM\docs\sop\shots\W_07_r8.png">    </p:cNvPr>
           <p:cNvPicPr>
             <a:picLocks noChangeAspect="1"/>
           </p:cNvPicPr>
@@ -18798,7 +21835,7 @@
                   <a:srgbClr val="3C4252"/>
                 </a:solidFill>
               </a:rPr>
-              <a:t>C 案的 .py 必須用 streamlit 啟動，一律走 run_C_streamlit.bat。</a:t>
+              <a:t>S 案的 .py 必須用 streamlit 啟動，一律走 run_S_streamlit.bat。</a:t>
             </a:r>
             <a:endParaRPr lang="en-US" sz="1050" dirty="0"/>
           </a:p>
@@ -18872,7 +21909,7 @@
                   <a:srgbClr val="1A1C2E"/>
                 </a:solidFill>
               </a:rPr>
-              <a:t>C 案瀏覽器打不開</a:t>
+              <a:t>S 案瀏覽器打不開</a:t>
             </a:r>
             <a:endParaRPr lang="en-US" sz="1200" dirty="0"/>
           </a:p>
@@ -18985,7 +22022,7 @@
                   <a:srgbClr val="1A1C2E"/>
                 </a:solidFill>
               </a:rPr>
-              <a:t>D 案視窗開不起來</a:t>
+              <a:t>W 案視窗開不起來</a:t>
             </a:r>
             <a:endParaRPr lang="en-US" sz="1200" dirty="0"/>
           </a:p>
@@ -19024,7 +22061,7 @@
                   <a:srgbClr val="3C4252"/>
                 </a:solidFill>
               </a:rPr>
-              <a:t>用 run_D_webview_debug.bat 看訊息，多半是缺 Edge WebView2 Runtime。</a:t>
+              <a:t>用 run_W_webview_debug.bat 看訊息，多半是缺 Edge WebView2 Runtime。</a:t>
             </a:r>
             <a:endParaRPr lang="en-US" sz="1050" dirty="0"/>
           </a:p>
@@ -21056,7 +24093,7 @@
                   <a:srgbClr val="6B7180"/>
                 </a:solidFill>
               </a:rPr>
-              <a:t>三種介面（CLI / C 案 / D 案）共用同一份核心邏輯，</a:t>
+              <a:t>三種介面（CLI / S 案 / W 案）共用同一份核心邏輯，</a:t>
             </a:r>
             <a:endParaRPr lang="en-US" sz="1100" dirty="0"/>
           </a:p>
@@ -21499,7 +24536,7 @@
                   <a:srgbClr val="FFFFFF"/>
                 </a:solidFill>
               </a:rPr>
-              <a:t>run_C_streamlit.bat</a:t>
+              <a:t>run_S_streamlit.bat</a:t>
             </a:r>
             <a:endParaRPr lang="en-US" sz="1200" dirty="0"/>
           </a:p>
@@ -21535,7 +24572,7 @@
                   <a:srgbClr val="E6E7F5"/>
                 </a:solidFill>
               </a:rPr>
-              <a:t>C 案．瀏覽器</a:t>
+              <a:t>S 案．瀏覽器</a:t>
             </a:r>
             <a:endParaRPr lang="en-US" sz="1000" dirty="0"/>
           </a:p>
@@ -21731,7 +24768,7 @@
                   <a:srgbClr val="FFFFFF"/>
                 </a:solidFill>
               </a:rPr>
-              <a:t>run_D_webview.bat</a:t>
+              <a:t>run_W_webview.bat</a:t>
             </a:r>
             <a:endParaRPr lang="en-US" sz="1200" dirty="0"/>
           </a:p>
@@ -21767,7 +24804,7 @@
                   <a:srgbClr val="E6E7F5"/>
                 </a:solidFill>
               </a:rPr>
-              <a:t>D 案．原生視窗</a:t>
+              <a:t>W 案．原生視窗</a:t>
             </a:r>
             <a:endParaRPr lang="en-US" sz="1000" dirty="0"/>
           </a:p>
@@ -23301,7 +26338,7 @@
                   <a:srgbClr val="3C4252"/>
                 </a:solidFill>
               </a:rPr>
-              <a:t>[OK] 核心 / [OK] C 案 / [OK] D 案。</a:t>
+              <a:t>[OK] 核心 / [OK] S 案 / [OK] W 案。</a:t>
             </a:r>
             <a:endParaRPr lang="en-US" sz="1150" dirty="0"/>
           </a:p>
@@ -23415,7 +26452,7 @@
                   <a:srgbClr val="FFFFFF"/>
                 </a:solidFill>
               </a:rPr>
-              <a:t>C 案　瀏覽器介面</a:t>
+              <a:t>S 案　瀏覽器介面</a:t>
             </a:r>
             <a:endParaRPr lang="en-US" sz="3600" dirty="0"/>
           </a:p>

--- a/docs/BOM_Matcher_v0.10_操作SOP.pptx
+++ b/docs/BOM_Matcher_v0.10_操作SOP.pptx
@@ -139,27 +139,27 @@
   <p:extLst>
     <p:ext uri="{521415D9-36F7-43E2-AB2F-B90AF26B5E84}">
       <p14:sectionLst xmlns:p14="http://schemas.microsoft.com/office/powerpoint/2010/main">
-        <p14:section name="封面" id="{49a84f9b-7d32-5aa3-c1a0-d2ff847c5c7b}">
+        <p14:section name="封面" id="{c682a2e2-5c99-f3a5-3a09-dea505b4751f}">
           <p14:sldIdLst>
             <p14:sldId id="256"/>
             <p14:sldId id="257"/>
           </p14:sldIdLst>
         </p14:section>
-        <p14:section name="認識工具" id="{31ef7901-17ad-2dac-842c-bc67686310bb}">
+        <p14:section name="認識工具" id="{2f0d8e6f-340b-cfe7-3d1f-2702f6a140ce}">
           <p14:sldIdLst>
             <p14:sldId id="258"/>
             <p14:sldId id="259"/>
             <p14:sldId id="260"/>
           </p14:sldIdLst>
         </p14:section>
-        <p14:section name="安裝" id="{98b32cfd-1a7f-e9b4-cf9d-1d3958180ec8}">
+        <p14:section name="安裝" id="{7785d774-e134-7944-b8ff-2616be0357e3}">
           <p14:sldIdLst>
             <p14:sldId id="261"/>
             <p14:sldId id="262"/>
             <p14:sldId id="263"/>
           </p14:sldIdLst>
         </p14:section>
-        <p14:section name="S 案操作" id="{2873f4a4-e31b-0ce3-b93d-d0fca210af32}">
+        <p14:section name="S 案操作" id="{5c91dceb-53c8-efa1-1ebc-4c71dfece688}">
           <p14:sldIdLst>
             <p14:sldId id="264"/>
             <p14:sldId id="265"/>
@@ -170,7 +170,7 @@
             <p14:sldId id="270"/>
           </p14:sldIdLst>
         </p14:section>
-        <p14:section name="W 案操作" id="{7935effb-ecb6-2578-17f9-44610cd58f2d}">
+        <p14:section name="W 案操作" id="{15d0883b-572f-993a-8a88-7a8948a00564}">
           <p14:sldIdLst>
             <p14:sldId id="271"/>
             <p14:sldId id="272"/>
@@ -180,28 +180,28 @@
             <p14:sldId id="276"/>
           </p14:sldIdLst>
         </p14:section>
-        <p14:section name="雙面板" id="{ba7dd8f6-4591-6b20-5bd7-b4835baa987f}">
+        <p14:section name="雙面板" id="{4cf6dc6f-7f94-23d7-3042-3fcd30d36c65}">
           <p14:sldIdLst>
             <p14:sldId id="277"/>
             <p14:sldId id="278"/>
             <p14:sldId id="279"/>
           </p14:sldIdLst>
         </p14:section>
-        <p14:section name="降壓選料" id="{c824c9e2-087e-6841-c27f-d3219ef50d28}">
+        <p14:section name="降壓選料" id="{a2867668-75b2-83bd-e434-ca686b85f94a}">
           <p14:sldIdLst>
             <p14:sldId id="280"/>
             <p14:sldId id="281"/>
             <p14:sldId id="282"/>
           </p14:sldIdLst>
         </p14:section>
-        <p14:section name="看懂輸出" id="{07cdcfcd-6422-4a2d-eefb-082ad28b08f3}">
+        <p14:section name="看懂輸出" id="{0df4226d-978d-7d54-35db-0fe52640be84}">
           <p14:sldIdLst>
             <p14:sldId id="283"/>
             <p14:sldId id="284"/>
             <p14:sldId id="285"/>
           </p14:sldIdLst>
         </p14:section>
-        <p14:section name="疑難排解" id="{70a4ef6e-5794-b23e-5363-66ba2079cfe9}">
+        <p14:section name="疑難排解" id="{542103d9-6952-5324-8854-1728a2e62dfc}">
           <p14:sldIdLst>
             <p14:sldId id="286"/>
             <p14:sldId id="287"/>
@@ -1404,7 +1404,7 @@
           <a:p>
             <a:r>
               <a:rPr lang="en-US" dirty="0"/>
-              <a:t>點任何一列，右側會顯示該料件的 Footprint、RC/EC、P/N、Qty、比對狀態　未命中的列顯示「— 無命中 —」，直接在格子裡補料號　表格上方的篩選鈕：全部 / 未命中 / NC / 替代料 / Knowledge / 需確認 / Location 未知，右邊還有搜尋框　色系與輸出 Excel 相同（畫面較淡）；R8 用紅點標示，Excel 是紫底</a:t>
+              <a:t>表格上方的篩選鈕：全部 / 未命中 / NC / 替代料 / Knowledge / 需確認 / Location 未知，右邊還有搜尋框　點任何一列，右側會顯示該料件的 Footprint、RC/EC、P/N、Qty、比對狀態　未命中的列顯示「— 無命中 —」，直接在格子裡補料號　Location 欄放不下全部點位時，滑鼠移上去會跳出氣泡，列出完整清單與個數　下方「執行日誌」整列寬，可收合；[請人工確認] / [警告] / [提示] 是紅字</a:t>
             </a:r>
             <a:endParaRPr lang="en-US" dirty="0"/>
           </a:p>
@@ -10387,7 +10387,7 @@
         </p:nvSpPr>
         <p:spPr>
           <a:xfrm>
-            <a:off x="1647777" y="2273963"/>
+            <a:off x="1647777" y="1976426"/>
             <a:ext cx="169164" cy="169164"/>
           </a:xfrm>
           <a:prstGeom prst="ellipse">
@@ -10412,7 +10412,7 @@
         </p:nvSpPr>
         <p:spPr>
           <a:xfrm>
-            <a:off x="1563195" y="2189381"/>
+            <a:off x="1563195" y="1891844"/>
             <a:ext cx="338328" cy="338328"/>
           </a:xfrm>
           <a:prstGeom prst="rect">
@@ -10448,7 +10448,7 @@
         </p:nvSpPr>
         <p:spPr>
           <a:xfrm>
-            <a:off x="2030325" y="2818031"/>
+            <a:off x="1647777" y="2273963"/>
             <a:ext cx="169164" cy="169164"/>
           </a:xfrm>
           <a:prstGeom prst="ellipse">
@@ -10473,7 +10473,7 @@
         </p:nvSpPr>
         <p:spPr>
           <a:xfrm>
-            <a:off x="1945743" y="2733449"/>
+            <a:off x="1563195" y="2189381"/>
             <a:ext cx="338328" cy="338328"/>
           </a:xfrm>
           <a:prstGeom prst="rect">
@@ -10509,7 +10509,7 @@
         </p:nvSpPr>
         <p:spPr>
           <a:xfrm>
-            <a:off x="1647777" y="1976426"/>
+            <a:off x="2030325" y="2818031"/>
             <a:ext cx="169164" cy="169164"/>
           </a:xfrm>
           <a:prstGeom prst="ellipse">
@@ -10534,7 +10534,7 @@
         </p:nvSpPr>
         <p:spPr>
           <a:xfrm>
-            <a:off x="1563195" y="1891844"/>
+            <a:off x="1945743" y="2733449"/>
             <a:ext cx="338328" cy="338328"/>
           </a:xfrm>
           <a:prstGeom prst="rect">
@@ -10570,7 +10570,7 @@
         </p:nvSpPr>
         <p:spPr>
           <a:xfrm>
-            <a:off x="1647777" y="4237708"/>
+            <a:off x="3347990" y="2273963"/>
             <a:ext cx="169164" cy="169164"/>
           </a:xfrm>
           <a:prstGeom prst="ellipse">
@@ -10595,7 +10595,7 @@
         </p:nvSpPr>
         <p:spPr>
           <a:xfrm>
-            <a:off x="1563195" y="4153126"/>
+            <a:off x="3263408" y="2189381"/>
             <a:ext cx="338328" cy="338328"/>
           </a:xfrm>
           <a:prstGeom prst="rect">
@@ -10625,7 +10625,68 @@
       </p:sp>
       <p:sp>
         <p:nvSpPr>
-          <p:cNvPr id="14" name="Text 11"/>
+          <p:cNvPr id="14" name="Shape 11"/>
+          <p:cNvSpPr/>
+          <p:nvPr/>
+        </p:nvSpPr>
+        <p:spPr>
+          <a:xfrm>
+            <a:off x="1605272" y="3128320"/>
+            <a:ext cx="169164" cy="169164"/>
+          </a:xfrm>
+          <a:prstGeom prst="ellipse">
+            <a:avLst/>
+          </a:prstGeom>
+          <a:solidFill>
+            <a:srgbClr val="D92D20"/>
+          </a:solidFill>
+          <a:ln w="19050">
+            <a:solidFill>
+              <a:srgbClr val="FFFFFF"/>
+            </a:solidFill>
+            <a:prstDash val="solid"/>
+          </a:ln>
+        </p:spPr>
+      </p:sp>
+      <p:sp>
+        <p:nvSpPr>
+          <p:cNvPr id="15" name="Text 12"/>
+          <p:cNvSpPr txBox="1"/>
+          <p:nvPr/>
+        </p:nvSpPr>
+        <p:spPr>
+          <a:xfrm>
+            <a:off x="1520690" y="3043738"/>
+            <a:ext cx="338328" cy="338328"/>
+          </a:xfrm>
+          <a:prstGeom prst="rect">
+            <a:avLst/>
+          </a:prstGeom>
+          <a:noFill/>
+          <a:ln/>
+        </p:spPr>
+        <p:txBody>
+          <a:bodyPr wrap="square" lIns="0" tIns="0" rIns="0" bIns="0" rtlCol="0" anchor="ctr"/>
+          <a:lstStyle/>
+          <a:p>
+            <a:pPr algn="ctr" indent="0" marL="0">
+              <a:buNone/>
+            </a:pPr>
+            <a:r>
+              <a:rPr lang="en-US" sz="850" b="1" dirty="0">
+                <a:solidFill>
+                  <a:srgbClr val="FFFFFF"/>
+                </a:solidFill>
+              </a:rPr>
+              <a:t>5</a:t>
+            </a:r>
+            <a:endParaRPr lang="en-US" sz="850" dirty="0"/>
+          </a:p>
+        </p:txBody>
+      </p:sp>
+      <p:sp>
+        <p:nvSpPr>
+          <p:cNvPr id="16" name="Text 13"/>
           <p:cNvSpPr txBox="1"/>
           <p:nvPr/>
         </p:nvSpPr>
@@ -10676,11 +10737,8 @@
                   <a:srgbClr val="3C4252"/>
                 </a:solidFill>
               </a:rPr>
-              <a:t>點任何一列，右側會顯示該料件的 Footprint、RC/EC、P/N、Qty、比對狀態</a:t>
-            </a:r>
-            <a:endParaRPr lang="en-US" sz="1100" dirty="0"/>
-          </a:p>
-          <a:p>
+              <a:t>表格上方的</a:t>
+            </a:r>
             <a:pPr indent="0" marL="0">
               <a:lnSpc>
                 <a:spcPts val="1600"/>
@@ -10691,12 +10749,12 @@
               <a:buNone/>
             </a:pPr>
             <a:r>
-              <a:rPr lang="en-US" sz="1200" b="1" dirty="0">
-                <a:solidFill>
-                  <a:srgbClr val="D92D20"/>
-                </a:solidFill>
-              </a:rPr>
-              <a:t>② </a:t>
+              <a:rPr lang="en-US" sz="1100" b="1" dirty="0">
+                <a:solidFill>
+                  <a:srgbClr val="3C4252"/>
+                </a:solidFill>
+              </a:rPr>
+              <a:t>篩選鈕</a:t>
             </a:r>
             <a:pPr indent="0" marL="0">
               <a:lnSpc>
@@ -10713,7 +10771,7 @@
                   <a:srgbClr val="3C4252"/>
                 </a:solidFill>
               </a:rPr>
-              <a:t>未命中的列顯示「— 無命中 —」，直接在格子裡補料號</a:t>
+              <a:t>：全部 / 未命中 / NC / 替代料 / Knowledge / 需確認 / Location 未知，右邊還有搜尋框</a:t>
             </a:r>
             <a:endParaRPr lang="en-US" sz="1100" dirty="0"/>
           </a:p>
@@ -10733,7 +10791,7 @@
                   <a:srgbClr val="D92D20"/>
                 </a:solidFill>
               </a:rPr>
-              <a:t>③ </a:t>
+              <a:t>② </a:t>
             </a:r>
             <a:pPr indent="0" marL="0">
               <a:lnSpc>
@@ -10750,8 +10808,11 @@
                   <a:srgbClr val="3C4252"/>
                 </a:solidFill>
               </a:rPr>
-              <a:t>表格上方的</a:t>
-            </a:r>
+              <a:t>點任何一列，右側會顯示該料件的 Footprint、RC/EC、P/N、Qty、比對狀態</a:t>
+            </a:r>
+            <a:endParaRPr lang="en-US" sz="1100" dirty="0"/>
+          </a:p>
+          <a:p>
             <a:pPr indent="0" marL="0">
               <a:lnSpc>
                 <a:spcPts val="1600"/>
@@ -10762,12 +10823,12 @@
               <a:buNone/>
             </a:pPr>
             <a:r>
-              <a:rPr lang="en-US" sz="1100" b="1" dirty="0">
-                <a:solidFill>
-                  <a:srgbClr val="3C4252"/>
-                </a:solidFill>
-              </a:rPr>
-              <a:t>篩選鈕</a:t>
+              <a:rPr lang="en-US" sz="1200" b="1" dirty="0">
+                <a:solidFill>
+                  <a:srgbClr val="D92D20"/>
+                </a:solidFill>
+              </a:rPr>
+              <a:t>③ </a:t>
             </a:r>
             <a:pPr indent="0" marL="0">
               <a:lnSpc>
@@ -10784,7 +10845,7 @@
                   <a:srgbClr val="3C4252"/>
                 </a:solidFill>
               </a:rPr>
-              <a:t>：全部 / 未命中 / NC / 替代料 / Knowledge / 需確認 / Location 未知，右邊還有搜尋框</a:t>
+              <a:t>未命中的列顯示「— 無命中 —」，直接在格子裡補料號</a:t>
             </a:r>
             <a:endParaRPr lang="en-US" sz="1100" dirty="0"/>
           </a:p>
@@ -10821,15 +10882,120 @@
                   <a:srgbClr val="3C4252"/>
                 </a:solidFill>
               </a:rPr>
-              <a:t>色系與輸出 Excel 相同（畫面較淡）；R8 用紅點標示，Excel 是紫底</a:t>
+              <a:t>Location 欄放不下全部點位時，</a:t>
+            </a:r>
+            <a:pPr indent="0" marL="0">
+              <a:lnSpc>
+                <a:spcPts val="1600"/>
+              </a:lnSpc>
+              <a:spcAft>
+                <a:spcPts val="900"/>
+              </a:spcAft>
+              <a:buNone/>
+            </a:pPr>
+            <a:r>
+              <a:rPr lang="en-US" sz="1100" b="1" dirty="0">
+                <a:solidFill>
+                  <a:srgbClr val="3C4252"/>
+                </a:solidFill>
+              </a:rPr>
+              <a:t>滑鼠移上去會跳出氣泡</a:t>
+            </a:r>
+            <a:pPr indent="0" marL="0">
+              <a:lnSpc>
+                <a:spcPts val="1600"/>
+              </a:lnSpc>
+              <a:spcAft>
+                <a:spcPts val="900"/>
+              </a:spcAft>
+              <a:buNone/>
+            </a:pPr>
+            <a:r>
+              <a:rPr lang="en-US" sz="1100" dirty="0">
+                <a:solidFill>
+                  <a:srgbClr val="3C4252"/>
+                </a:solidFill>
+              </a:rPr>
+              <a:t>，列出完整清單與個數</a:t>
             </a:r>
             <a:endParaRPr lang="en-US" sz="1100" dirty="0"/>
           </a:p>
-        </p:txBody>
-      </p:sp>
-      <p:sp>
-        <p:nvSpPr>
-          <p:cNvPr id="15" name="warn"/>
+          <a:p>
+            <a:pPr indent="0" marL="0">
+              <a:lnSpc>
+                <a:spcPts val="1600"/>
+              </a:lnSpc>
+              <a:spcAft>
+                <a:spcPts val="900"/>
+              </a:spcAft>
+              <a:buNone/>
+            </a:pPr>
+            <a:r>
+              <a:rPr lang="en-US" sz="1200" b="1" dirty="0">
+                <a:solidFill>
+                  <a:srgbClr val="D92D20"/>
+                </a:solidFill>
+              </a:rPr>
+              <a:t>⑤ </a:t>
+            </a:r>
+            <a:pPr indent="0" marL="0">
+              <a:lnSpc>
+                <a:spcPts val="1600"/>
+              </a:lnSpc>
+              <a:spcAft>
+                <a:spcPts val="900"/>
+              </a:spcAft>
+              <a:buNone/>
+            </a:pPr>
+            <a:r>
+              <a:rPr lang="en-US" sz="1100" dirty="0">
+                <a:solidFill>
+                  <a:srgbClr val="3C4252"/>
+                </a:solidFill>
+              </a:rPr>
+              <a:t>下方「</a:t>
+            </a:r>
+            <a:pPr indent="0" marL="0">
+              <a:lnSpc>
+                <a:spcPts val="1600"/>
+              </a:lnSpc>
+              <a:spcAft>
+                <a:spcPts val="900"/>
+              </a:spcAft>
+              <a:buNone/>
+            </a:pPr>
+            <a:r>
+              <a:rPr lang="en-US" sz="1100" b="1" dirty="0">
+                <a:solidFill>
+                  <a:srgbClr val="3C4252"/>
+                </a:solidFill>
+              </a:rPr>
+              <a:t>執行日誌</a:t>
+            </a:r>
+            <a:pPr indent="0" marL="0">
+              <a:lnSpc>
+                <a:spcPts val="1600"/>
+              </a:lnSpc>
+              <a:spcAft>
+                <a:spcPts val="900"/>
+              </a:spcAft>
+              <a:buNone/>
+            </a:pPr>
+            <a:r>
+              <a:rPr lang="en-US" sz="1100" dirty="0">
+                <a:solidFill>
+                  <a:srgbClr val="3C4252"/>
+                </a:solidFill>
+              </a:rPr>
+              <a:t>」整列寬，可收合；[請人工確認] / [警告] / [提示] 是紅字</a:t>
+            </a:r>
+            <a:endParaRPr lang="en-US" sz="1100" dirty="0"/>
+          </a:p>
+        </p:txBody>
+      </p:sp>
+      <p:sp>
+        <p:nvSpPr>
+          <p:cNvPr id="17" name="warn"/>
           <p:cNvSpPr/>
           <p:nvPr/>
         </p:nvSpPr>
@@ -10856,7 +11022,7 @@
       </p:sp>
       <p:sp>
         <p:nvSpPr>
-          <p:cNvPr id="16" name="Shape 13"/>
+          <p:cNvPr id="18" name="Shape 15"/>
           <p:cNvSpPr/>
           <p:nvPr/>
         </p:nvSpPr>
@@ -10881,7 +11047,7 @@
       </p:sp>
       <p:sp>
         <p:nvSpPr>
-          <p:cNvPr id="17" name="Text 14"/>
+          <p:cNvPr id="19" name="Text 16"/>
           <p:cNvSpPr txBox="1"/>
           <p:nvPr/>
         </p:nvSpPr>
@@ -10917,7 +11083,7 @@
       </p:sp>
       <p:sp>
         <p:nvSpPr>
-          <p:cNvPr id="18" name="Text 15"/>
+          <p:cNvPr id="20" name="Text 17"/>
           <p:cNvSpPr txBox="1"/>
           <p:nvPr/>
         </p:nvSpPr>

--- a/docs/BOM_Matcher_v0.10_操作SOP.pptx
+++ b/docs/BOM_Matcher_v0.10_操作SOP.pptx
@@ -139,27 +139,27 @@
   <p:extLst>
     <p:ext uri="{521415D9-36F7-43E2-AB2F-B90AF26B5E84}">
       <p14:sectionLst xmlns:p14="http://schemas.microsoft.com/office/powerpoint/2010/main">
-        <p14:section name="封面" id="{c682a2e2-5c99-f3a5-3a09-dea505b4751f}">
+        <p14:section name="封面" id="{594fb553-3147-d913-d485-1705a92ae6c5}">
           <p14:sldIdLst>
             <p14:sldId id="256"/>
             <p14:sldId id="257"/>
           </p14:sldIdLst>
         </p14:section>
-        <p14:section name="認識工具" id="{2f0d8e6f-340b-cfe7-3d1f-2702f6a140ce}">
+        <p14:section name="認識工具" id="{9cc9ce74-c960-03f6-f3a0-649197dcd52e}">
           <p14:sldIdLst>
             <p14:sldId id="258"/>
             <p14:sldId id="259"/>
             <p14:sldId id="260"/>
           </p14:sldIdLst>
         </p14:section>
-        <p14:section name="安裝" id="{7785d774-e134-7944-b8ff-2616be0357e3}">
+        <p14:section name="安裝" id="{2df34045-c8ec-c341-bbfc-bfe8603bf01a}">
           <p14:sldIdLst>
             <p14:sldId id="261"/>
             <p14:sldId id="262"/>
             <p14:sldId id="263"/>
           </p14:sldIdLst>
         </p14:section>
-        <p14:section name="S 案操作" id="{5c91dceb-53c8-efa1-1ebc-4c71dfece688}">
+        <p14:section name="S 案操作" id="{19eec0ab-6b6f-b5ef-6405-cdb950078810}">
           <p14:sldIdLst>
             <p14:sldId id="264"/>
             <p14:sldId id="265"/>
@@ -170,7 +170,7 @@
             <p14:sldId id="270"/>
           </p14:sldIdLst>
         </p14:section>
-        <p14:section name="W 案操作" id="{15d0883b-572f-993a-8a88-7a8948a00564}">
+        <p14:section name="W 案操作" id="{75a0fecb-2c70-d113-3301-cfa21a68fa39}">
           <p14:sldIdLst>
             <p14:sldId id="271"/>
             <p14:sldId id="272"/>
@@ -180,28 +180,28 @@
             <p14:sldId id="276"/>
           </p14:sldIdLst>
         </p14:section>
-        <p14:section name="雙面板" id="{4cf6dc6f-7f94-23d7-3042-3fcd30d36c65}">
+        <p14:section name="雙面板" id="{e3764f58-83f7-ea2d-89bf-ac463b216f1b}">
           <p14:sldIdLst>
             <p14:sldId id="277"/>
             <p14:sldId id="278"/>
             <p14:sldId id="279"/>
           </p14:sldIdLst>
         </p14:section>
-        <p14:section name="降壓選料" id="{a2867668-75b2-83bd-e434-ca686b85f94a}">
+        <p14:section name="降壓選料" id="{686635fd-8d48-8f0a-058b-40925223b771}">
           <p14:sldIdLst>
             <p14:sldId id="280"/>
             <p14:sldId id="281"/>
             <p14:sldId id="282"/>
           </p14:sldIdLst>
         </p14:section>
-        <p14:section name="看懂輸出" id="{0df4226d-978d-7d54-35db-0fe52640be84}">
+        <p14:section name="看懂輸出" id="{6609de68-67c7-f6d0-4ee7-5888859be33a}">
           <p14:sldIdLst>
             <p14:sldId id="283"/>
             <p14:sldId id="284"/>
             <p14:sldId id="285"/>
           </p14:sldIdLst>
         </p14:section>
-        <p14:section name="疑難排解" id="{542103d9-6952-5324-8854-1728a2e62dfc}">
+        <p14:section name="疑難排解" id="{5b266d42-bfbe-fc96-3f52-78b786c7fe05}">
           <p14:sldIdLst>
             <p14:sldId id="286"/>
             <p14:sldId id="287"/>
@@ -1404,7 +1404,7 @@
           <a:p>
             <a:r>
               <a:rPr lang="en-US" dirty="0"/>
-              <a:t>表格上方的篩選鈕：全部 / 未命中 / NC / 替代料 / Knowledge / 需確認 / Location 未知，右邊還有搜尋框　點任何一列，右側會顯示該料件的 Footprint、RC/EC、P/N、Qty、比對狀態　未命中的列顯示「— 無命中 —」，直接在格子裡補料號　Location 欄放不下全部點位時，滑鼠移上去會跳出氣泡，列出完整清單與個數　下方「執行日誌」整列寬，可收合；[請人工確認] / [警告] / [提示] 是紅字</a:t>
+              <a:t>表格上方的篩選鈕：全部 / 未命中 / NC / 替代料 / Knowledge / 需確認 / Location 未知，右邊還有搜尋框　所有欄位都在表格裡改：RC/EC 是下拉，其餘直接點進格子打字　未命中的列顯示「— 無命中 —」，直接在格子裡補料號　滑過 Description 會跳氣泡，顯示 Footprint、原始 Part、比對狀態與完整描述　Location 欄放不下時一樣跳氣泡，列出完整清單與個數　下方「執行日誌」整列寬，可收合；[請人工確認] / [警告] / [提示] 是紅字</a:t>
             </a:r>
             <a:endParaRPr lang="en-US" dirty="0"/>
           </a:p>
@@ -10387,7 +10387,7 @@
         </p:nvSpPr>
         <p:spPr>
           <a:xfrm>
-            <a:off x="1647777" y="1976426"/>
+            <a:off x="1647777" y="1865912"/>
             <a:ext cx="169164" cy="169164"/>
           </a:xfrm>
           <a:prstGeom prst="ellipse">
@@ -10412,7 +10412,7 @@
         </p:nvSpPr>
         <p:spPr>
           <a:xfrm>
-            <a:off x="1563195" y="1891844"/>
+            <a:off x="1563195" y="1781330"/>
             <a:ext cx="338328" cy="338328"/>
           </a:xfrm>
           <a:prstGeom prst="rect">
@@ -10448,7 +10448,7 @@
         </p:nvSpPr>
         <p:spPr>
           <a:xfrm>
-            <a:off x="1647777" y="2273963"/>
+            <a:off x="1724287" y="2167700"/>
             <a:ext cx="169164" cy="169164"/>
           </a:xfrm>
           <a:prstGeom prst="ellipse">
@@ -10473,7 +10473,7 @@
         </p:nvSpPr>
         <p:spPr>
           <a:xfrm>
-            <a:off x="1563195" y="2189381"/>
+            <a:off x="1639705" y="2083118"/>
             <a:ext cx="338328" cy="338328"/>
           </a:xfrm>
           <a:prstGeom prst="rect">
@@ -10509,7 +10509,7 @@
         </p:nvSpPr>
         <p:spPr>
           <a:xfrm>
-            <a:off x="2030325" y="2818031"/>
+            <a:off x="2030325" y="2711767"/>
             <a:ext cx="169164" cy="169164"/>
           </a:xfrm>
           <a:prstGeom prst="ellipse">
@@ -10534,7 +10534,7 @@
         </p:nvSpPr>
         <p:spPr>
           <a:xfrm>
-            <a:off x="1945743" y="2733449"/>
+            <a:off x="1945743" y="2627186"/>
             <a:ext cx="338328" cy="338328"/>
           </a:xfrm>
           <a:prstGeom prst="rect">
@@ -10570,7 +10570,7 @@
         </p:nvSpPr>
         <p:spPr>
           <a:xfrm>
-            <a:off x="3347990" y="2273963"/>
+            <a:off x="2837926" y="2167700"/>
             <a:ext cx="169164" cy="169164"/>
           </a:xfrm>
           <a:prstGeom prst="ellipse">
@@ -10595,7 +10595,7 @@
         </p:nvSpPr>
         <p:spPr>
           <a:xfrm>
-            <a:off x="3263408" y="2189381"/>
+            <a:off x="2753344" y="2083118"/>
             <a:ext cx="338328" cy="338328"/>
           </a:xfrm>
           <a:prstGeom prst="rect">
@@ -10631,7 +10631,7 @@
         </p:nvSpPr>
         <p:spPr>
           <a:xfrm>
-            <a:off x="1605272" y="3128320"/>
+            <a:off x="3730538" y="2167700"/>
             <a:ext cx="169164" cy="169164"/>
           </a:xfrm>
           <a:prstGeom prst="ellipse">
@@ -10656,6 +10656,67 @@
         </p:nvSpPr>
         <p:spPr>
           <a:xfrm>
+            <a:off x="3645956" y="2083118"/>
+            <a:ext cx="338328" cy="338328"/>
+          </a:xfrm>
+          <a:prstGeom prst="rect">
+            <a:avLst/>
+          </a:prstGeom>
+          <a:noFill/>
+          <a:ln/>
+        </p:spPr>
+        <p:txBody>
+          <a:bodyPr wrap="square" lIns="0" tIns="0" rIns="0" bIns="0" rtlCol="0" anchor="ctr"/>
+          <a:lstStyle/>
+          <a:p>
+            <a:pPr algn="ctr" indent="0" marL="0">
+              <a:buNone/>
+            </a:pPr>
+            <a:r>
+              <a:rPr lang="en-US" sz="850" b="1" dirty="0">
+                <a:solidFill>
+                  <a:srgbClr val="FFFFFF"/>
+                </a:solidFill>
+              </a:rPr>
+              <a:t>5</a:t>
+            </a:r>
+            <a:endParaRPr lang="en-US" sz="850" dirty="0"/>
+          </a:p>
+        </p:txBody>
+      </p:sp>
+      <p:sp>
+        <p:nvSpPr>
+          <p:cNvPr id="16" name="Shape 13"/>
+          <p:cNvSpPr/>
+          <p:nvPr/>
+        </p:nvSpPr>
+        <p:spPr>
+          <a:xfrm>
+            <a:off x="1605272" y="3128320"/>
+            <a:ext cx="169164" cy="169164"/>
+          </a:xfrm>
+          <a:prstGeom prst="ellipse">
+            <a:avLst/>
+          </a:prstGeom>
+          <a:solidFill>
+            <a:srgbClr val="D92D20"/>
+          </a:solidFill>
+          <a:ln w="19050">
+            <a:solidFill>
+              <a:srgbClr val="FFFFFF"/>
+            </a:solidFill>
+            <a:prstDash val="solid"/>
+          </a:ln>
+        </p:spPr>
+      </p:sp>
+      <p:sp>
+        <p:nvSpPr>
+          <p:cNvPr id="17" name="Text 14"/>
+          <p:cNvSpPr txBox="1"/>
+          <p:nvPr/>
+        </p:nvSpPr>
+        <p:spPr>
+          <a:xfrm>
             <a:off x="1520690" y="3043738"/>
             <a:ext cx="338328" cy="338328"/>
           </a:xfrm>
@@ -10678,7 +10739,7 @@
                   <a:srgbClr val="FFFFFF"/>
                 </a:solidFill>
               </a:rPr>
-              <a:t>5</a:t>
+              <a:t>6</a:t>
             </a:r>
             <a:endParaRPr lang="en-US" sz="850" dirty="0"/>
           </a:p>
@@ -10686,7 +10747,7 @@
       </p:sp>
       <p:sp>
         <p:nvSpPr>
-          <p:cNvPr id="16" name="Text 13"/>
+          <p:cNvPr id="18" name="Text 15"/>
           <p:cNvSpPr txBox="1"/>
           <p:nvPr/>
         </p:nvSpPr>
@@ -10802,17 +10863,6 @@
               </a:spcAft>
               <a:buNone/>
             </a:pPr>
-            <a:r>
-              <a:rPr lang="en-US" sz="1100" dirty="0">
-                <a:solidFill>
-                  <a:srgbClr val="3C4252"/>
-                </a:solidFill>
-              </a:rPr>
-              <a:t>點任何一列，右側會顯示該料件的 Footprint、RC/EC、P/N、Qty、比對狀態</a:t>
-            </a:r>
-            <a:endParaRPr lang="en-US" sz="1100" dirty="0"/>
-          </a:p>
-          <a:p>
             <a:pPr indent="0" marL="0">
               <a:lnSpc>
                 <a:spcPts val="1600"/>
@@ -10823,12 +10873,12 @@
               <a:buNone/>
             </a:pPr>
             <a:r>
-              <a:rPr lang="en-US" sz="1200" b="1" dirty="0">
-                <a:solidFill>
-                  <a:srgbClr val="D92D20"/>
-                </a:solidFill>
-              </a:rPr>
-              <a:t>③ </a:t>
+              <a:rPr lang="en-US" sz="1100" b="1" dirty="0">
+                <a:solidFill>
+                  <a:srgbClr val="3C4252"/>
+                </a:solidFill>
+              </a:rPr>
+              <a:t>所有欄位都在表格裡改</a:t>
             </a:r>
             <a:pPr indent="0" marL="0">
               <a:lnSpc>
@@ -10845,7 +10895,7 @@
                   <a:srgbClr val="3C4252"/>
                 </a:solidFill>
               </a:rPr>
-              <a:t>未命中的列顯示「— 無命中 —」，直接在格子裡補料號</a:t>
+              <a:t>：RC/EC 是下拉，其餘直接點進格子打字</a:t>
             </a:r>
             <a:endParaRPr lang="en-US" sz="1100" dirty="0"/>
           </a:p>
@@ -10865,7 +10915,7 @@
                   <a:srgbClr val="D92D20"/>
                 </a:solidFill>
               </a:rPr>
-              <a:t>④ </a:t>
+              <a:t>③ </a:t>
             </a:r>
             <a:pPr indent="0" marL="0">
               <a:lnSpc>
@@ -10882,8 +10932,11 @@
                   <a:srgbClr val="3C4252"/>
                 </a:solidFill>
               </a:rPr>
-              <a:t>Location 欄放不下全部點位時，</a:t>
-            </a:r>
+              <a:t>未命中的列顯示「— 無命中 —」，直接在格子裡補料號</a:t>
+            </a:r>
+            <a:endParaRPr lang="en-US" sz="1100" dirty="0"/>
+          </a:p>
+          <a:p>
             <a:pPr indent="0" marL="0">
               <a:lnSpc>
                 <a:spcPts val="1600"/>
@@ -10894,12 +10947,12 @@
               <a:buNone/>
             </a:pPr>
             <a:r>
-              <a:rPr lang="en-US" sz="1100" b="1" dirty="0">
-                <a:solidFill>
-                  <a:srgbClr val="3C4252"/>
-                </a:solidFill>
-              </a:rPr>
-              <a:t>滑鼠移上去會跳出氣泡</a:t>
+              <a:rPr lang="en-US" sz="1200" b="1" dirty="0">
+                <a:solidFill>
+                  <a:srgbClr val="D92D20"/>
+                </a:solidFill>
+              </a:rPr>
+              <a:t>④ </a:t>
             </a:r>
             <a:pPr indent="0" marL="0">
               <a:lnSpc>
@@ -10916,11 +10969,8 @@
                   <a:srgbClr val="3C4252"/>
                 </a:solidFill>
               </a:rPr>
-              <a:t>，列出完整清單與個數</a:t>
-            </a:r>
-            <a:endParaRPr lang="en-US" sz="1100" dirty="0"/>
-          </a:p>
-          <a:p>
+              <a:t>滑過 Description 會跳氣泡，顯示 </a:t>
+            </a:r>
             <a:pPr indent="0" marL="0">
               <a:lnSpc>
                 <a:spcPts val="1600"/>
@@ -10931,12 +10981,12 @@
               <a:buNone/>
             </a:pPr>
             <a:r>
-              <a:rPr lang="en-US" sz="1200" b="1" dirty="0">
-                <a:solidFill>
-                  <a:srgbClr val="D92D20"/>
-                </a:solidFill>
-              </a:rPr>
-              <a:t>⑤ </a:t>
+              <a:rPr lang="en-US" sz="1100" b="1" dirty="0">
+                <a:solidFill>
+                  <a:srgbClr val="3C4252"/>
+                </a:solidFill>
+              </a:rPr>
+              <a:t>Footprint、原始 Part、比對狀態</a:t>
             </a:r>
             <a:pPr indent="0" marL="0">
               <a:lnSpc>
@@ -10953,8 +11003,11 @@
                   <a:srgbClr val="3C4252"/>
                 </a:solidFill>
               </a:rPr>
-              <a:t>下方「</a:t>
-            </a:r>
+              <a:t>與完整描述</a:t>
+            </a:r>
+            <a:endParaRPr lang="en-US" sz="1100" dirty="0"/>
+          </a:p>
+          <a:p>
             <a:pPr indent="0" marL="0">
               <a:lnSpc>
                 <a:spcPts val="1600"/>
@@ -10965,12 +11018,12 @@
               <a:buNone/>
             </a:pPr>
             <a:r>
-              <a:rPr lang="en-US" sz="1100" b="1" dirty="0">
-                <a:solidFill>
-                  <a:srgbClr val="3C4252"/>
-                </a:solidFill>
-              </a:rPr>
-              <a:t>執行日誌</a:t>
+              <a:rPr lang="en-US" sz="1200" b="1" dirty="0">
+                <a:solidFill>
+                  <a:srgbClr val="D92D20"/>
+                </a:solidFill>
+              </a:rPr>
+              <a:t>⑤ </a:t>
             </a:r>
             <a:pPr indent="0" marL="0">
               <a:lnSpc>
@@ -10987,6 +11040,77 @@
                   <a:srgbClr val="3C4252"/>
                 </a:solidFill>
               </a:rPr>
+              <a:t>Location 欄放不下時一樣跳氣泡，列出完整清單與個數</a:t>
+            </a:r>
+            <a:endParaRPr lang="en-US" sz="1100" dirty="0"/>
+          </a:p>
+          <a:p>
+            <a:pPr indent="0" marL="0">
+              <a:lnSpc>
+                <a:spcPts val="1600"/>
+              </a:lnSpc>
+              <a:spcAft>
+                <a:spcPts val="900"/>
+              </a:spcAft>
+              <a:buNone/>
+            </a:pPr>
+            <a:r>
+              <a:rPr lang="en-US" sz="1200" b="1" dirty="0">
+                <a:solidFill>
+                  <a:srgbClr val="D92D20"/>
+                </a:solidFill>
+              </a:rPr>
+              <a:t>⑥ </a:t>
+            </a:r>
+            <a:pPr indent="0" marL="0">
+              <a:lnSpc>
+                <a:spcPts val="1600"/>
+              </a:lnSpc>
+              <a:spcAft>
+                <a:spcPts val="900"/>
+              </a:spcAft>
+              <a:buNone/>
+            </a:pPr>
+            <a:r>
+              <a:rPr lang="en-US" sz="1100" dirty="0">
+                <a:solidFill>
+                  <a:srgbClr val="3C4252"/>
+                </a:solidFill>
+              </a:rPr>
+              <a:t>下方「</a:t>
+            </a:r>
+            <a:pPr indent="0" marL="0">
+              <a:lnSpc>
+                <a:spcPts val="1600"/>
+              </a:lnSpc>
+              <a:spcAft>
+                <a:spcPts val="900"/>
+              </a:spcAft>
+              <a:buNone/>
+            </a:pPr>
+            <a:r>
+              <a:rPr lang="en-US" sz="1100" b="1" dirty="0">
+                <a:solidFill>
+                  <a:srgbClr val="3C4252"/>
+                </a:solidFill>
+              </a:rPr>
+              <a:t>執行日誌</a:t>
+            </a:r>
+            <a:pPr indent="0" marL="0">
+              <a:lnSpc>
+                <a:spcPts val="1600"/>
+              </a:lnSpc>
+              <a:spcAft>
+                <a:spcPts val="900"/>
+              </a:spcAft>
+              <a:buNone/>
+            </a:pPr>
+            <a:r>
+              <a:rPr lang="en-US" sz="1100" dirty="0">
+                <a:solidFill>
+                  <a:srgbClr val="3C4252"/>
+                </a:solidFill>
+              </a:rPr>
               <a:t>」整列寬，可收合；[請人工確認] / [警告] / [提示] 是紅字</a:t>
             </a:r>
             <a:endParaRPr lang="en-US" sz="1100" dirty="0"/>
@@ -10995,7 +11119,7 @@
       </p:sp>
       <p:sp>
         <p:nvSpPr>
-          <p:cNvPr id="17" name="warn"/>
+          <p:cNvPr id="19" name="warn"/>
           <p:cNvSpPr/>
           <p:nvPr/>
         </p:nvSpPr>
@@ -11022,7 +11146,7 @@
       </p:sp>
       <p:sp>
         <p:nvSpPr>
-          <p:cNvPr id="18" name="Shape 15"/>
+          <p:cNvPr id="20" name="Shape 17"/>
           <p:cNvSpPr/>
           <p:nvPr/>
         </p:nvSpPr>
@@ -11047,7 +11171,7 @@
       </p:sp>
       <p:sp>
         <p:nvSpPr>
-          <p:cNvPr id="19" name="Text 16"/>
+          <p:cNvPr id="21" name="Text 18"/>
           <p:cNvSpPr txBox="1"/>
           <p:nvPr/>
         </p:nvSpPr>
@@ -11083,7 +11207,7 @@
       </p:sp>
       <p:sp>
         <p:nvSpPr>
-          <p:cNvPr id="20" name="Text 17"/>
+          <p:cNvPr id="22" name="Text 19"/>
           <p:cNvSpPr txBox="1"/>
           <p:nvPr/>
         </p:nvSpPr>
@@ -25034,7 +25158,7 @@
                   <a:srgbClr val="3C4252"/>
                 </a:solidFill>
               </a:rPr>
-              <a:t>三欄式，右側即時顯示明細</a:t>
+              <a:t>表格佔滿整列，滑鼠氣泡看完整內容</a:t>
             </a:r>
             <a:endParaRPr lang="en-US" sz="1100" dirty="0"/>
           </a:p>

--- a/docs/BOM_Matcher_v0.10_操作SOP.pptx
+++ b/docs/BOM_Matcher_v0.10_操作SOP.pptx
@@ -139,27 +139,27 @@
   <p:extLst>
     <p:ext uri="{521415D9-36F7-43E2-AB2F-B90AF26B5E84}">
       <p14:sectionLst xmlns:p14="http://schemas.microsoft.com/office/powerpoint/2010/main">
-        <p14:section name="封面" id="{594fb553-3147-d913-d485-1705a92ae6c5}">
+        <p14:section name="封面" id="{c43190c2-4f08-9759-9d35-b65792feb0e5}">
           <p14:sldIdLst>
             <p14:sldId id="256"/>
             <p14:sldId id="257"/>
           </p14:sldIdLst>
         </p14:section>
-        <p14:section name="認識工具" id="{9cc9ce74-c960-03f6-f3a0-649197dcd52e}">
+        <p14:section name="認識工具" id="{f5321de8-93a0-0c84-5311-7700d1a58212}">
           <p14:sldIdLst>
             <p14:sldId id="258"/>
             <p14:sldId id="259"/>
             <p14:sldId id="260"/>
           </p14:sldIdLst>
         </p14:section>
-        <p14:section name="安裝" id="{2df34045-c8ec-c341-bbfc-bfe8603bf01a}">
+        <p14:section name="安裝" id="{c9b0a58a-72ed-73ce-1b8c-a3ace6f8f47b}">
           <p14:sldIdLst>
             <p14:sldId id="261"/>
             <p14:sldId id="262"/>
             <p14:sldId id="263"/>
           </p14:sldIdLst>
         </p14:section>
-        <p14:section name="S 案操作" id="{19eec0ab-6b6f-b5ef-6405-cdb950078810}">
+        <p14:section name="S 案操作" id="{ba9c8db1-94aa-c3aa-d6b5-3c38f63d4818}">
           <p14:sldIdLst>
             <p14:sldId id="264"/>
             <p14:sldId id="265"/>
@@ -170,7 +170,7 @@
             <p14:sldId id="270"/>
           </p14:sldIdLst>
         </p14:section>
-        <p14:section name="W 案操作" id="{75a0fecb-2c70-d113-3301-cfa21a68fa39}">
+        <p14:section name="W 案操作" id="{f33f4a2e-8c91-abcc-1889-62f1d74398b4}">
           <p14:sldIdLst>
             <p14:sldId id="271"/>
             <p14:sldId id="272"/>
@@ -180,28 +180,28 @@
             <p14:sldId id="276"/>
           </p14:sldIdLst>
         </p14:section>
-        <p14:section name="雙面板" id="{e3764f58-83f7-ea2d-89bf-ac463b216f1b}">
+        <p14:section name="雙面板" id="{ce72949d-54d3-095f-7926-ad9673586868}">
           <p14:sldIdLst>
             <p14:sldId id="277"/>
             <p14:sldId id="278"/>
             <p14:sldId id="279"/>
           </p14:sldIdLst>
         </p14:section>
-        <p14:section name="降壓選料" id="{686635fd-8d48-8f0a-058b-40925223b771}">
+        <p14:section name="降壓選料" id="{befe6a74-6e49-3862-d656-d1c9501ec4cb}">
           <p14:sldIdLst>
             <p14:sldId id="280"/>
             <p14:sldId id="281"/>
             <p14:sldId id="282"/>
           </p14:sldIdLst>
         </p14:section>
-        <p14:section name="看懂輸出" id="{6609de68-67c7-f6d0-4ee7-5888859be33a}">
+        <p14:section name="看懂輸出" id="{a206a01e-bcfd-602d-c8db-f4564d5537a4}">
           <p14:sldIdLst>
             <p14:sldId id="283"/>
             <p14:sldId id="284"/>
             <p14:sldId id="285"/>
           </p14:sldIdLst>
         </p14:section>
-        <p14:section name="疑難排解" id="{5b266d42-bfbe-fc96-3f52-78b786c7fe05}">
+        <p14:section name="疑難排解" id="{5f0876c1-a204-b892-243c-52ba77ebd4a8}">
           <p14:sldIdLst>
             <p14:sldId id="286"/>
             <p14:sldId id="287"/>
@@ -876,7 +876,7 @@
           <a:p>
             <a:r>
               <a:rPr lang="en-US" dirty="0"/>
-              <a:t>上方六個數字：總項次 / 輸出列數 / 命中 P/N / 未命中 / Knowledge / Total Qty　「⤢ 放大表格」一次看三倍的列數（151 列預設只看得到十幾列）　表格可直接改 P/N、RC/EC、Description、Qty、Location（帶 (T)/(B)，同 Excel）　狀態欄：🔴 R8 降壓選料　⚠️ Location 未知　🟠🟡🟢 對應 Excel 色底</a:t>
+              <a:t>上方六個數字：總項次 / 輸出列數 / 命中 P/N / 未命中 / Knowledge / Total Qty　篩選鈕：全部 / 未命中 / NC / 替代料 / Knowledge / 需確認 / Location 未知，各帶列數　搜尋框：比對 P/N、Description、Location　「⤢ 放大」一次看三倍的列數（151 列預設只看得到十幾列）　表格可直接改 P/N、RC/EC、Description、Qty、Location（帶 (T)/(B)，同 Excel）　狀態欄：🔴 R8 降壓選料　⚠️ Location 未知　🟠🟡🟢 對應 Excel 色底　側邊欄徽章：比對結果 / Knowledge / 未命中 的即時數字</a:t>
             </a:r>
             <a:endParaRPr lang="en-US" dirty="0"/>
           </a:p>
@@ -5682,7 +5682,7 @@
         </p:nvSpPr>
         <p:spPr>
           <a:xfrm>
-            <a:off x="2035048" y="2077022"/>
+            <a:off x="1997266" y="2145030"/>
             <a:ext cx="169164" cy="169164"/>
           </a:xfrm>
           <a:prstGeom prst="ellipse">
@@ -5707,7 +5707,7 @@
         </p:nvSpPr>
         <p:spPr>
           <a:xfrm>
-            <a:off x="1950466" y="1992440"/>
+            <a:off x="1912684" y="2060448"/>
             <a:ext cx="338328" cy="338328"/>
           </a:xfrm>
           <a:prstGeom prst="rect">
@@ -5743,7 +5743,7 @@
         </p:nvSpPr>
         <p:spPr>
           <a:xfrm>
-            <a:off x="4169759" y="2866676"/>
+            <a:off x="4453128" y="2111026"/>
             <a:ext cx="169164" cy="169164"/>
           </a:xfrm>
           <a:prstGeom prst="ellipse">
@@ -5768,7 +5768,7 @@
         </p:nvSpPr>
         <p:spPr>
           <a:xfrm>
-            <a:off x="4085177" y="2782094"/>
+            <a:off x="4368546" y="2026444"/>
             <a:ext cx="338328" cy="338328"/>
           </a:xfrm>
           <a:prstGeom prst="rect">
@@ -5804,7 +5804,7 @@
         </p:nvSpPr>
         <p:spPr>
           <a:xfrm>
-            <a:off x="1880140" y="2602198"/>
+            <a:off x="5170996" y="2107248"/>
             <a:ext cx="169164" cy="169164"/>
           </a:xfrm>
           <a:prstGeom prst="ellipse">
@@ -5829,7 +5829,7 @@
         </p:nvSpPr>
         <p:spPr>
           <a:xfrm>
-            <a:off x="1795558" y="2517616"/>
+            <a:off x="5086413" y="2022666"/>
             <a:ext cx="338328" cy="338328"/>
           </a:xfrm>
           <a:prstGeom prst="rect">
@@ -5859,7 +5859,190 @@
       </p:sp>
       <p:sp>
         <p:nvSpPr>
-          <p:cNvPr id="14" name="Text 11"/>
+          <p:cNvPr id="14" name="Shape 11"/>
+          <p:cNvSpPr/>
+          <p:nvPr/>
+        </p:nvSpPr>
+        <p:spPr>
+          <a:xfrm>
+            <a:off x="4169759" y="3138710"/>
+            <a:ext cx="169164" cy="169164"/>
+          </a:xfrm>
+          <a:prstGeom prst="ellipse">
+            <a:avLst/>
+          </a:prstGeom>
+          <a:solidFill>
+            <a:srgbClr val="D92D20"/>
+          </a:solidFill>
+          <a:ln w="19050">
+            <a:solidFill>
+              <a:srgbClr val="FFFFFF"/>
+            </a:solidFill>
+            <a:prstDash val="solid"/>
+          </a:ln>
+        </p:spPr>
+      </p:sp>
+      <p:sp>
+        <p:nvSpPr>
+          <p:cNvPr id="15" name="Text 12"/>
+          <p:cNvSpPr txBox="1"/>
+          <p:nvPr/>
+        </p:nvSpPr>
+        <p:spPr>
+          <a:xfrm>
+            <a:off x="4085177" y="3054128"/>
+            <a:ext cx="338328" cy="338328"/>
+          </a:xfrm>
+          <a:prstGeom prst="rect">
+            <a:avLst/>
+          </a:prstGeom>
+          <a:noFill/>
+          <a:ln/>
+        </p:spPr>
+        <p:txBody>
+          <a:bodyPr wrap="square" lIns="0" tIns="0" rIns="0" bIns="0" rtlCol="0" anchor="ctr"/>
+          <a:lstStyle/>
+          <a:p>
+            <a:pPr algn="ctr" indent="0" marL="0">
+              <a:buNone/>
+            </a:pPr>
+            <a:r>
+              <a:rPr lang="en-US" sz="850" b="1" dirty="0">
+                <a:solidFill>
+                  <a:srgbClr val="FFFFFF"/>
+                </a:solidFill>
+              </a:rPr>
+              <a:t>5</a:t>
+            </a:r>
+            <a:endParaRPr lang="en-US" sz="850" dirty="0"/>
+          </a:p>
+        </p:txBody>
+      </p:sp>
+      <p:sp>
+        <p:nvSpPr>
+          <p:cNvPr id="16" name="Shape 13"/>
+          <p:cNvSpPr/>
+          <p:nvPr/>
+        </p:nvSpPr>
+        <p:spPr>
+          <a:xfrm>
+            <a:off x="1880140" y="2741994"/>
+            <a:ext cx="169164" cy="169164"/>
+          </a:xfrm>
+          <a:prstGeom prst="ellipse">
+            <a:avLst/>
+          </a:prstGeom>
+          <a:solidFill>
+            <a:srgbClr val="D92D20"/>
+          </a:solidFill>
+          <a:ln w="19050">
+            <a:solidFill>
+              <a:srgbClr val="FFFFFF"/>
+            </a:solidFill>
+            <a:prstDash val="solid"/>
+          </a:ln>
+        </p:spPr>
+      </p:sp>
+      <p:sp>
+        <p:nvSpPr>
+          <p:cNvPr id="17" name="Text 14"/>
+          <p:cNvSpPr txBox="1"/>
+          <p:nvPr/>
+        </p:nvSpPr>
+        <p:spPr>
+          <a:xfrm>
+            <a:off x="1795558" y="2657412"/>
+            <a:ext cx="338328" cy="338328"/>
+          </a:xfrm>
+          <a:prstGeom prst="rect">
+            <a:avLst/>
+          </a:prstGeom>
+          <a:noFill/>
+          <a:ln/>
+        </p:spPr>
+        <p:txBody>
+          <a:bodyPr wrap="square" lIns="0" tIns="0" rIns="0" bIns="0" rtlCol="0" anchor="ctr"/>
+          <a:lstStyle/>
+          <a:p>
+            <a:pPr algn="ctr" indent="0" marL="0">
+              <a:buNone/>
+            </a:pPr>
+            <a:r>
+              <a:rPr lang="en-US" sz="850" b="1" dirty="0">
+                <a:solidFill>
+                  <a:srgbClr val="FFFFFF"/>
+                </a:solidFill>
+              </a:rPr>
+              <a:t>6</a:t>
+            </a:r>
+            <a:endParaRPr lang="en-US" sz="850" dirty="0"/>
+          </a:p>
+        </p:txBody>
+      </p:sp>
+      <p:sp>
+        <p:nvSpPr>
+          <p:cNvPr id="18" name="Shape 15"/>
+          <p:cNvSpPr/>
+          <p:nvPr/>
+        </p:nvSpPr>
+        <p:spPr>
+          <a:xfrm>
+            <a:off x="962025" y="2677763"/>
+            <a:ext cx="169164" cy="169164"/>
+          </a:xfrm>
+          <a:prstGeom prst="ellipse">
+            <a:avLst/>
+          </a:prstGeom>
+          <a:solidFill>
+            <a:srgbClr val="D92D20"/>
+          </a:solidFill>
+          <a:ln w="19050">
+            <a:solidFill>
+              <a:srgbClr val="FFFFFF"/>
+            </a:solidFill>
+            <a:prstDash val="solid"/>
+          </a:ln>
+        </p:spPr>
+      </p:sp>
+      <p:sp>
+        <p:nvSpPr>
+          <p:cNvPr id="19" name="Text 16"/>
+          <p:cNvSpPr txBox="1"/>
+          <p:nvPr/>
+        </p:nvSpPr>
+        <p:spPr>
+          <a:xfrm>
+            <a:off x="877443" y="2593181"/>
+            <a:ext cx="338328" cy="338328"/>
+          </a:xfrm>
+          <a:prstGeom prst="rect">
+            <a:avLst/>
+          </a:prstGeom>
+          <a:noFill/>
+          <a:ln/>
+        </p:spPr>
+        <p:txBody>
+          <a:bodyPr wrap="square" lIns="0" tIns="0" rIns="0" bIns="0" rtlCol="0" anchor="ctr"/>
+          <a:lstStyle/>
+          <a:p>
+            <a:pPr algn="ctr" indent="0" marL="0">
+              <a:buNone/>
+            </a:pPr>
+            <a:r>
+              <a:rPr lang="en-US" sz="850" b="1" dirty="0">
+                <a:solidFill>
+                  <a:srgbClr val="FFFFFF"/>
+                </a:solidFill>
+              </a:rPr>
+              <a:t>7</a:t>
+            </a:r>
+            <a:endParaRPr lang="en-US" sz="850" dirty="0"/>
+          </a:p>
+        </p:txBody>
+      </p:sp>
+      <p:sp>
+        <p:nvSpPr>
+          <p:cNvPr id="20" name="Text 17"/>
           <p:cNvSpPr txBox="1"/>
           <p:nvPr/>
         </p:nvSpPr>
@@ -5941,14 +6124,6 @@
               </a:spcAft>
               <a:buNone/>
             </a:pPr>
-            <a:r>
-              <a:rPr lang="en-US" sz="1100" dirty="0">
-                <a:solidFill>
-                  <a:srgbClr val="3C4252"/>
-                </a:solidFill>
-              </a:rPr>
-              <a:t>「</a:t>
-            </a:r>
             <a:pPr indent="0" marL="0">
               <a:lnSpc>
                 <a:spcPts val="1600"/>
@@ -5964,7 +6139,7 @@
                   <a:srgbClr val="3C4252"/>
                 </a:solidFill>
               </a:rPr>
-              <a:t>⤢ 放大表格</a:t>
+              <a:t>篩選鈕</a:t>
             </a:r>
             <a:pPr indent="0" marL="0">
               <a:lnSpc>
@@ -5981,7 +6156,7 @@
                   <a:srgbClr val="3C4252"/>
                 </a:solidFill>
               </a:rPr>
-              <a:t>」一次看三倍的列數（151 列預設只看得到十幾列）</a:t>
+              <a:t>：全部 / 未命中 / NC / 替代料 / Knowledge / 需確認 / Location 未知，各帶列數</a:t>
             </a:r>
             <a:endParaRPr lang="en-US" sz="1100" dirty="0"/>
           </a:p>
@@ -6012,14 +6187,6 @@
               </a:spcAft>
               <a:buNone/>
             </a:pPr>
-            <a:r>
-              <a:rPr lang="en-US" sz="1100" dirty="0">
-                <a:solidFill>
-                  <a:srgbClr val="3C4252"/>
-                </a:solidFill>
-              </a:rPr>
-              <a:t>表格可直接改 P/N、RC/EC、Description、Qty、Location（帶 </a:t>
-            </a:r>
             <a:pPr indent="0" marL="0">
               <a:lnSpc>
                 <a:spcPts val="1600"/>
@@ -6035,7 +6202,7 @@
                   <a:srgbClr val="3C4252"/>
                 </a:solidFill>
               </a:rPr>
-              <a:t>(T)/(B)</a:t>
+              <a:t>搜尋框</a:t>
             </a:r>
             <a:pPr indent="0" marL="0">
               <a:lnSpc>
@@ -6052,7 +6219,7 @@
                   <a:srgbClr val="3C4252"/>
                 </a:solidFill>
               </a:rPr>
-              <a:t>，同 Excel）</a:t>
+              <a:t>：比對 P/N、Description、Location</a:t>
             </a:r>
             <a:endParaRPr lang="en-US" sz="1100" dirty="0"/>
           </a:p>
@@ -6089,15 +6256,194 @@
                   <a:srgbClr val="3C4252"/>
                 </a:solidFill>
               </a:rPr>
+              <a:t>「</a:t>
+            </a:r>
+            <a:pPr indent="0" marL="0">
+              <a:lnSpc>
+                <a:spcPts val="1600"/>
+              </a:lnSpc>
+              <a:spcAft>
+                <a:spcPts val="900"/>
+              </a:spcAft>
+              <a:buNone/>
+            </a:pPr>
+            <a:r>
+              <a:rPr lang="en-US" sz="1100" b="1" dirty="0">
+                <a:solidFill>
+                  <a:srgbClr val="3C4252"/>
+                </a:solidFill>
+              </a:rPr>
+              <a:t>⤢ 放大</a:t>
+            </a:r>
+            <a:pPr indent="0" marL="0">
+              <a:lnSpc>
+                <a:spcPts val="1600"/>
+              </a:lnSpc>
+              <a:spcAft>
+                <a:spcPts val="900"/>
+              </a:spcAft>
+              <a:buNone/>
+            </a:pPr>
+            <a:r>
+              <a:rPr lang="en-US" sz="1100" dirty="0">
+                <a:solidFill>
+                  <a:srgbClr val="3C4252"/>
+                </a:solidFill>
+              </a:rPr>
+              <a:t>」一次看三倍的列數（151 列預設只看得到十幾列）</a:t>
+            </a:r>
+            <a:endParaRPr lang="en-US" sz="1100" dirty="0"/>
+          </a:p>
+          <a:p>
+            <a:pPr indent="0" marL="0">
+              <a:lnSpc>
+                <a:spcPts val="1600"/>
+              </a:lnSpc>
+              <a:spcAft>
+                <a:spcPts val="900"/>
+              </a:spcAft>
+              <a:buNone/>
+            </a:pPr>
+            <a:r>
+              <a:rPr lang="en-US" sz="1200" b="1" dirty="0">
+                <a:solidFill>
+                  <a:srgbClr val="D92D20"/>
+                </a:solidFill>
+              </a:rPr>
+              <a:t>⑤ </a:t>
+            </a:r>
+            <a:pPr indent="0" marL="0">
+              <a:lnSpc>
+                <a:spcPts val="1600"/>
+              </a:lnSpc>
+              <a:spcAft>
+                <a:spcPts val="900"/>
+              </a:spcAft>
+              <a:buNone/>
+            </a:pPr>
+            <a:r>
+              <a:rPr lang="en-US" sz="1100" dirty="0">
+                <a:solidFill>
+                  <a:srgbClr val="3C4252"/>
+                </a:solidFill>
+              </a:rPr>
+              <a:t>表格可直接改 P/N、RC/EC、Description、Qty、Location（帶 </a:t>
+            </a:r>
+            <a:pPr indent="0" marL="0">
+              <a:lnSpc>
+                <a:spcPts val="1600"/>
+              </a:lnSpc>
+              <a:spcAft>
+                <a:spcPts val="900"/>
+              </a:spcAft>
+              <a:buNone/>
+            </a:pPr>
+            <a:r>
+              <a:rPr lang="en-US" sz="1100" b="1" dirty="0">
+                <a:solidFill>
+                  <a:srgbClr val="3C4252"/>
+                </a:solidFill>
+              </a:rPr>
+              <a:t>(T)/(B)</a:t>
+            </a:r>
+            <a:pPr indent="0" marL="0">
+              <a:lnSpc>
+                <a:spcPts val="1600"/>
+              </a:lnSpc>
+              <a:spcAft>
+                <a:spcPts val="900"/>
+              </a:spcAft>
+              <a:buNone/>
+            </a:pPr>
+            <a:r>
+              <a:rPr lang="en-US" sz="1100" dirty="0">
+                <a:solidFill>
+                  <a:srgbClr val="3C4252"/>
+                </a:solidFill>
+              </a:rPr>
+              <a:t>，同 Excel）</a:t>
+            </a:r>
+            <a:endParaRPr lang="en-US" sz="1100" dirty="0"/>
+          </a:p>
+          <a:p>
+            <a:pPr indent="0" marL="0">
+              <a:lnSpc>
+                <a:spcPts val="1600"/>
+              </a:lnSpc>
+              <a:spcAft>
+                <a:spcPts val="900"/>
+              </a:spcAft>
+              <a:buNone/>
+            </a:pPr>
+            <a:r>
+              <a:rPr lang="en-US" sz="1200" b="1" dirty="0">
+                <a:solidFill>
+                  <a:srgbClr val="D92D20"/>
+                </a:solidFill>
+              </a:rPr>
+              <a:t>⑥ </a:t>
+            </a:r>
+            <a:pPr indent="0" marL="0">
+              <a:lnSpc>
+                <a:spcPts val="1600"/>
+              </a:lnSpc>
+              <a:spcAft>
+                <a:spcPts val="900"/>
+              </a:spcAft>
+              <a:buNone/>
+            </a:pPr>
+            <a:r>
+              <a:rPr lang="en-US" sz="1100" dirty="0">
+                <a:solidFill>
+                  <a:srgbClr val="3C4252"/>
+                </a:solidFill>
+              </a:rPr>
               <a:t>狀態欄：🔴 R8 降壓選料　⚠️ Location 未知　🟠🟡🟢 對應 Excel 色底</a:t>
             </a:r>
             <a:endParaRPr lang="en-US" sz="1100" dirty="0"/>
           </a:p>
-        </p:txBody>
-      </p:sp>
-      <p:sp>
-        <p:nvSpPr>
-          <p:cNvPr id="15" name="warn"/>
+          <a:p>
+            <a:pPr indent="0" marL="0">
+              <a:lnSpc>
+                <a:spcPts val="1600"/>
+              </a:lnSpc>
+              <a:spcAft>
+                <a:spcPts val="900"/>
+              </a:spcAft>
+              <a:buNone/>
+            </a:pPr>
+            <a:r>
+              <a:rPr lang="en-US" sz="1200" b="1" dirty="0">
+                <a:solidFill>
+                  <a:srgbClr val="D92D20"/>
+                </a:solidFill>
+              </a:rPr>
+              <a:t>⑦ </a:t>
+            </a:r>
+            <a:pPr indent="0" marL="0">
+              <a:lnSpc>
+                <a:spcPts val="1600"/>
+              </a:lnSpc>
+              <a:spcAft>
+                <a:spcPts val="900"/>
+              </a:spcAft>
+              <a:buNone/>
+            </a:pPr>
+            <a:r>
+              <a:rPr lang="en-US" sz="1100" dirty="0">
+                <a:solidFill>
+                  <a:srgbClr val="3C4252"/>
+                </a:solidFill>
+              </a:rPr>
+              <a:t>側邊欄徽章：比對結果 / Knowledge / 未命中 的即時數字</a:t>
+            </a:r>
+            <a:endParaRPr lang="en-US" sz="1100" dirty="0"/>
+          </a:p>
+        </p:txBody>
+      </p:sp>
+      <p:sp>
+        <p:nvSpPr>
+          <p:cNvPr id="21" name="warn"/>
           <p:cNvSpPr/>
           <p:nvPr/>
         </p:nvSpPr>
@@ -6124,7 +6470,7 @@
       </p:sp>
       <p:sp>
         <p:nvSpPr>
-          <p:cNvPr id="16" name="Shape 13"/>
+          <p:cNvPr id="22" name="Shape 19"/>
           <p:cNvSpPr/>
           <p:nvPr/>
         </p:nvSpPr>
@@ -6149,7 +6495,7 @@
       </p:sp>
       <p:sp>
         <p:nvSpPr>
-          <p:cNvPr id="17" name="Text 14"/>
+          <p:cNvPr id="23" name="Text 20"/>
           <p:cNvSpPr txBox="1"/>
           <p:nvPr/>
         </p:nvSpPr>
@@ -6185,7 +6531,7 @@
       </p:sp>
       <p:sp>
         <p:nvSpPr>
-          <p:cNvPr id="18" name="Text 15"/>
+          <p:cNvPr id="24" name="Text 21"/>
           <p:cNvSpPr txBox="1"/>
           <p:nvPr/>
         </p:nvSpPr>
@@ -6216,7 +6562,7 @@
                   <a:srgbClr val="6B4413"/>
                 </a:solidFill>
               </a:rPr>
-              <a:t>S 案的「✎ 編輯」頁籤不顯示色底 —— 這是 Streamlit 的限制。</a:t>
+              <a:t>篩選後編輯一樣會寫回原本的位置 —— 表格依「原始列號」對應，</a:t>
             </a:r>
             <a:endParaRPr lang="en-US" sz="1000" dirty="0"/>
           </a:p>
@@ -6233,7 +6579,7 @@
                   <a:srgbClr val="6B4413"/>
                 </a:solidFill>
               </a:rPr>
-              <a:t>要看色底請切到「🎨 色底檢視」頁籤（唯讀）。</a:t>
+              <a:t>不是依畫面上的順序。色底要切到「🎨 色底檢視」頁籤（Streamlit 限制）。</a:t>
             </a:r>
             <a:endParaRPr lang="en-US" sz="1000" dirty="0"/>
           </a:p>
@@ -24926,7 +25272,7 @@
                   <a:srgbClr val="3C4252"/>
                 </a:solidFill>
               </a:rPr>
-              <a:t>可編輯表格後再產出</a:t>
+              <a:t>可編輯表格後再產出，有篩選鈕與搜尋框</a:t>
             </a:r>
             <a:endParaRPr lang="en-US" sz="1100" dirty="0"/>
           </a:p>

--- a/docs/BOM_Matcher_v0.10_操作SOP.pptx
+++ b/docs/BOM_Matcher_v0.10_操作SOP.pptx
@@ -139,27 +139,27 @@
   <p:extLst>
     <p:ext uri="{521415D9-36F7-43E2-AB2F-B90AF26B5E84}">
       <p14:sectionLst xmlns:p14="http://schemas.microsoft.com/office/powerpoint/2010/main">
-        <p14:section name="封面" id="{c43190c2-4f08-9759-9d35-b65792feb0e5}">
+        <p14:section name="封面" id="{ed5d1800-63fb-c772-961c-0488df8defbb}">
           <p14:sldIdLst>
             <p14:sldId id="256"/>
             <p14:sldId id="257"/>
           </p14:sldIdLst>
         </p14:section>
-        <p14:section name="認識工具" id="{f5321de8-93a0-0c84-5311-7700d1a58212}">
+        <p14:section name="認識工具" id="{764287c5-9a98-cdae-a26e-e179de335e80}">
           <p14:sldIdLst>
             <p14:sldId id="258"/>
             <p14:sldId id="259"/>
             <p14:sldId id="260"/>
           </p14:sldIdLst>
         </p14:section>
-        <p14:section name="安裝" id="{c9b0a58a-72ed-73ce-1b8c-a3ace6f8f47b}">
+        <p14:section name="安裝" id="{eb9bcde2-c0b6-2e93-9ba3-9eb96d9a3892}">
           <p14:sldIdLst>
             <p14:sldId id="261"/>
             <p14:sldId id="262"/>
             <p14:sldId id="263"/>
           </p14:sldIdLst>
         </p14:section>
-        <p14:section name="S 案操作" id="{ba9c8db1-94aa-c3aa-d6b5-3c38f63d4818}">
+        <p14:section name="S 案操作" id="{057651f2-49e0-3037-f88c-e8d0593eed5f}">
           <p14:sldIdLst>
             <p14:sldId id="264"/>
             <p14:sldId id="265"/>
@@ -170,7 +170,7 @@
             <p14:sldId id="270"/>
           </p14:sldIdLst>
         </p14:section>
-        <p14:section name="W 案操作" id="{f33f4a2e-8c91-abcc-1889-62f1d74398b4}">
+        <p14:section name="W 案操作" id="{22fb2677-5b4c-e27c-597c-d8c8677ca095}">
           <p14:sldIdLst>
             <p14:sldId id="271"/>
             <p14:sldId id="272"/>
@@ -180,28 +180,28 @@
             <p14:sldId id="276"/>
           </p14:sldIdLst>
         </p14:section>
-        <p14:section name="雙面板" id="{ce72949d-54d3-095f-7926-ad9673586868}">
+        <p14:section name="雙面板" id="{6faf2715-b9eb-6688-597b-f87e14468baf}">
           <p14:sldIdLst>
             <p14:sldId id="277"/>
             <p14:sldId id="278"/>
             <p14:sldId id="279"/>
           </p14:sldIdLst>
         </p14:section>
-        <p14:section name="降壓選料" id="{befe6a74-6e49-3862-d656-d1c9501ec4cb}">
+        <p14:section name="降壓選料" id="{ecfc5ed3-6c17-32da-30b7-5213913f88ae}">
           <p14:sldIdLst>
             <p14:sldId id="280"/>
             <p14:sldId id="281"/>
             <p14:sldId id="282"/>
           </p14:sldIdLst>
         </p14:section>
-        <p14:section name="看懂輸出" id="{a206a01e-bcfd-602d-c8db-f4564d5537a4}">
+        <p14:section name="看懂輸出" id="{31816946-397f-c8ab-5031-c128493d4796}">
           <p14:sldIdLst>
             <p14:sldId id="283"/>
             <p14:sldId id="284"/>
             <p14:sldId id="285"/>
           </p14:sldIdLst>
         </p14:section>
-        <p14:section name="疑難排解" id="{5f0876c1-a204-b892-243c-52ba77ebd4a8}">
+        <p14:section name="疑難排解" id="{98d822d7-1243-f7a9-89e6-551f5bde30aa}">
           <p14:sldIdLst>
             <p14:sldId id="286"/>
             <p14:sldId id="287"/>
@@ -876,7 +876,7 @@
           <a:p>
             <a:r>
               <a:rPr lang="en-US" dirty="0"/>
-              <a:t>上方六個數字：總項次 / 輸出列數 / 命中 P/N / 未命中 / Knowledge / Total Qty　篩選鈕：全部 / 未命中 / NC / 替代料 / Knowledge / 需確認 / Location 未知，各帶列數　搜尋框：比對 P/N、Description、Location　「⤢ 放大」一次看三倍的列數（151 列預設只看得到十幾列）　表格可直接改 P/N、RC/EC、Description、Qty、Location（帶 (T)/(B)，同 Excel）　狀態欄：🔴 R8 降壓選料　⚠️ Location 未知　🟠🟡🟢 對應 Excel 色底　側邊欄徽章：比對結果 / Knowledge / 未命中 的即時數字</a:t>
+              <a:t>上方六個數字：總項次 / 輸出列數 / 命中 / 未命中 / Knowledge / Total Qty　篩選鈕七個，各自帶列數　搜尋框：比對 P/N、Description、Location　「⤢ 放大」一次看三倍的列數　表格可直接改；狀態欄的色點對應 Excel 色底</a:t>
             </a:r>
             <a:endParaRPr lang="en-US" dirty="0"/>
           </a:p>
@@ -1404,7 +1404,7 @@
           <a:p>
             <a:r>
               <a:rPr lang="en-US" dirty="0"/>
-              <a:t>表格上方的篩選鈕：全部 / 未命中 / NC / 替代料 / Knowledge / 需確認 / Location 未知，右邊還有搜尋框　所有欄位都在表格裡改：RC/EC 是下拉，其餘直接點進格子打字　未命中的列顯示「— 無命中 —」，直接在格子裡補料號　滑過 Description 會跳氣泡，顯示 Footprint、原始 Part、比對狀態與完整描述　Location 欄放不下時一樣跳氣泡，列出完整清單與個數　下方「執行日誌」整列寬，可收合；[請人工確認] / [警告] / [提示] 是紅字</a:t>
+              <a:t>表格上方的篩選鈕與搜尋框，各自帶列數　所有欄位都在表格裡改：RC/EC 是下拉，其餘直接打字　未命中的列顯示「— 無命中 —」，直接補料號　滑過 Description 或 Location 會跳氣泡，顯示完整內容　下方「執行日誌」整列寬、可收合</a:t>
             </a:r>
             <a:endParaRPr lang="en-US" dirty="0"/>
           </a:p>
@@ -4722,7 +4722,7 @@
                   <a:srgbClr val="6B4413"/>
                 </a:solidFill>
               </a:rPr>
-              <a:t>綠色「雙面板模式」／藍色「單面板模式」會告訴你這次會怎麼輸出；輸出路徑預設在 output\，副檔名強制 .xlsx。</a:t>
+              <a:t>綠色「雙面板模式」／藍色「單面板模式」會告訴你這次怎麼輸出。</a:t>
             </a:r>
             <a:endParaRPr lang="en-US" sz="1000" dirty="0"/>
           </a:p>
@@ -4739,7 +4739,7 @@
                   <a:srgbClr val="6B4413"/>
                 </a:solidFill>
               </a:rPr>
-              <a:t>確認 Text BOM 是你這次要跑的那一支 —— 選錯檔案是最常見的失誤。</a:t>
+              <a:t>確認 Text BOM 是這次要跑的那一支 —— 選錯是最常見的失誤。</a:t>
             </a:r>
             <a:endParaRPr lang="en-US" sz="1000" dirty="0"/>
           </a:p>
@@ -5865,7 +5865,7 @@
         </p:nvSpPr>
         <p:spPr>
           <a:xfrm>
-            <a:off x="4169759" y="3138710"/>
+            <a:off x="1880140" y="2741994"/>
             <a:ext cx="169164" cy="169164"/>
           </a:xfrm>
           <a:prstGeom prst="ellipse">
@@ -5890,67 +5890,6 @@
         </p:nvSpPr>
         <p:spPr>
           <a:xfrm>
-            <a:off x="4085177" y="3054128"/>
-            <a:ext cx="338328" cy="338328"/>
-          </a:xfrm>
-          <a:prstGeom prst="rect">
-            <a:avLst/>
-          </a:prstGeom>
-          <a:noFill/>
-          <a:ln/>
-        </p:spPr>
-        <p:txBody>
-          <a:bodyPr wrap="square" lIns="0" tIns="0" rIns="0" bIns="0" rtlCol="0" anchor="ctr"/>
-          <a:lstStyle/>
-          <a:p>
-            <a:pPr algn="ctr" indent="0" marL="0">
-              <a:buNone/>
-            </a:pPr>
-            <a:r>
-              <a:rPr lang="en-US" sz="850" b="1" dirty="0">
-                <a:solidFill>
-                  <a:srgbClr val="FFFFFF"/>
-                </a:solidFill>
-              </a:rPr>
-              <a:t>5</a:t>
-            </a:r>
-            <a:endParaRPr lang="en-US" sz="850" dirty="0"/>
-          </a:p>
-        </p:txBody>
-      </p:sp>
-      <p:sp>
-        <p:nvSpPr>
-          <p:cNvPr id="16" name="Shape 13"/>
-          <p:cNvSpPr/>
-          <p:nvPr/>
-        </p:nvSpPr>
-        <p:spPr>
-          <a:xfrm>
-            <a:off x="1880140" y="2741994"/>
-            <a:ext cx="169164" cy="169164"/>
-          </a:xfrm>
-          <a:prstGeom prst="ellipse">
-            <a:avLst/>
-          </a:prstGeom>
-          <a:solidFill>
-            <a:srgbClr val="D92D20"/>
-          </a:solidFill>
-          <a:ln w="19050">
-            <a:solidFill>
-              <a:srgbClr val="FFFFFF"/>
-            </a:solidFill>
-            <a:prstDash val="solid"/>
-          </a:ln>
-        </p:spPr>
-      </p:sp>
-      <p:sp>
-        <p:nvSpPr>
-          <p:cNvPr id="17" name="Text 14"/>
-          <p:cNvSpPr txBox="1"/>
-          <p:nvPr/>
-        </p:nvSpPr>
-        <p:spPr>
-          <a:xfrm>
             <a:off x="1795558" y="2657412"/>
             <a:ext cx="338328" cy="338328"/>
           </a:xfrm>
@@ -5973,7 +5912,7 @@
                   <a:srgbClr val="FFFFFF"/>
                 </a:solidFill>
               </a:rPr>
-              <a:t>6</a:t>
+              <a:t>5</a:t>
             </a:r>
             <a:endParaRPr lang="en-US" sz="850" dirty="0"/>
           </a:p>
@@ -5981,68 +5920,7 @@
       </p:sp>
       <p:sp>
         <p:nvSpPr>
-          <p:cNvPr id="18" name="Shape 15"/>
-          <p:cNvSpPr/>
-          <p:nvPr/>
-        </p:nvSpPr>
-        <p:spPr>
-          <a:xfrm>
-            <a:off x="962025" y="2677763"/>
-            <a:ext cx="169164" cy="169164"/>
-          </a:xfrm>
-          <a:prstGeom prst="ellipse">
-            <a:avLst/>
-          </a:prstGeom>
-          <a:solidFill>
-            <a:srgbClr val="D92D20"/>
-          </a:solidFill>
-          <a:ln w="19050">
-            <a:solidFill>
-              <a:srgbClr val="FFFFFF"/>
-            </a:solidFill>
-            <a:prstDash val="solid"/>
-          </a:ln>
-        </p:spPr>
-      </p:sp>
-      <p:sp>
-        <p:nvSpPr>
-          <p:cNvPr id="19" name="Text 16"/>
-          <p:cNvSpPr txBox="1"/>
-          <p:nvPr/>
-        </p:nvSpPr>
-        <p:spPr>
-          <a:xfrm>
-            <a:off x="877443" y="2593181"/>
-            <a:ext cx="338328" cy="338328"/>
-          </a:xfrm>
-          <a:prstGeom prst="rect">
-            <a:avLst/>
-          </a:prstGeom>
-          <a:noFill/>
-          <a:ln/>
-        </p:spPr>
-        <p:txBody>
-          <a:bodyPr wrap="square" lIns="0" tIns="0" rIns="0" bIns="0" rtlCol="0" anchor="ctr"/>
-          <a:lstStyle/>
-          <a:p>
-            <a:pPr algn="ctr" indent="0" marL="0">
-              <a:buNone/>
-            </a:pPr>
-            <a:r>
-              <a:rPr lang="en-US" sz="850" b="1" dirty="0">
-                <a:solidFill>
-                  <a:srgbClr val="FFFFFF"/>
-                </a:solidFill>
-              </a:rPr>
-              <a:t>7</a:t>
-            </a:r>
-            <a:endParaRPr lang="en-US" sz="850" dirty="0"/>
-          </a:p>
-        </p:txBody>
-      </p:sp>
-      <p:sp>
-        <p:nvSpPr>
-          <p:cNvPr id="20" name="Text 17"/>
+          <p:cNvPr id="16" name="Text 13"/>
           <p:cNvSpPr txBox="1"/>
           <p:nvPr/>
         </p:nvSpPr>
@@ -6093,7 +5971,7 @@
                   <a:srgbClr val="3C4252"/>
                 </a:solidFill>
               </a:rPr>
-              <a:t>上方六個數字：總項次 / 輸出列數 / 命中 P/N / 未命中 / Knowledge / Total Qty</a:t>
+              <a:t>上方六個數字：總項次 / 輸出列數 / 命中 / 未命中 / Knowledge / Total Qty</a:t>
             </a:r>
             <a:endParaRPr lang="en-US" sz="1100" dirty="0"/>
           </a:p>
@@ -6156,7 +6034,7 @@
                   <a:srgbClr val="3C4252"/>
                 </a:solidFill>
               </a:rPr>
-              <a:t>：全部 / 未命中 / NC / 替代料 / Knowledge / 需確認 / Location 未知，各帶列數</a:t>
+              <a:t>七個，各自帶列數</a:t>
             </a:r>
             <a:endParaRPr lang="en-US" sz="1100" dirty="0"/>
           </a:p>
@@ -6290,7 +6168,7 @@
                   <a:srgbClr val="3C4252"/>
                 </a:solidFill>
               </a:rPr>
-              <a:t>」一次看三倍的列數（151 列預設只看得到十幾列）</a:t>
+              <a:t>」一次看三倍的列數</a:t>
             </a:r>
             <a:endParaRPr lang="en-US" sz="1100" dirty="0"/>
           </a:p>
@@ -6327,123 +6205,15 @@
                   <a:srgbClr val="3C4252"/>
                 </a:solidFill>
               </a:rPr>
-              <a:t>表格可直接改 P/N、RC/EC、Description、Qty、Location（帶 </a:t>
-            </a:r>
-            <a:pPr indent="0" marL="0">
-              <a:lnSpc>
-                <a:spcPts val="1600"/>
-              </a:lnSpc>
-              <a:spcAft>
-                <a:spcPts val="900"/>
-              </a:spcAft>
-              <a:buNone/>
-            </a:pPr>
-            <a:r>
-              <a:rPr lang="en-US" sz="1100" b="1" dirty="0">
-                <a:solidFill>
-                  <a:srgbClr val="3C4252"/>
-                </a:solidFill>
-              </a:rPr>
-              <a:t>(T)/(B)</a:t>
-            </a:r>
-            <a:pPr indent="0" marL="0">
-              <a:lnSpc>
-                <a:spcPts val="1600"/>
-              </a:lnSpc>
-              <a:spcAft>
-                <a:spcPts val="900"/>
-              </a:spcAft>
-              <a:buNone/>
-            </a:pPr>
-            <a:r>
-              <a:rPr lang="en-US" sz="1100" dirty="0">
-                <a:solidFill>
-                  <a:srgbClr val="3C4252"/>
-                </a:solidFill>
-              </a:rPr>
-              <a:t>，同 Excel）</a:t>
+              <a:t>表格可直接改；狀態欄的色點對應 Excel 色底</a:t>
             </a:r>
             <a:endParaRPr lang="en-US" sz="1100" dirty="0"/>
           </a:p>
-          <a:p>
-            <a:pPr indent="0" marL="0">
-              <a:lnSpc>
-                <a:spcPts val="1600"/>
-              </a:lnSpc>
-              <a:spcAft>
-                <a:spcPts val="900"/>
-              </a:spcAft>
-              <a:buNone/>
-            </a:pPr>
-            <a:r>
-              <a:rPr lang="en-US" sz="1200" b="1" dirty="0">
-                <a:solidFill>
-                  <a:srgbClr val="D92D20"/>
-                </a:solidFill>
-              </a:rPr>
-              <a:t>⑥ </a:t>
-            </a:r>
-            <a:pPr indent="0" marL="0">
-              <a:lnSpc>
-                <a:spcPts val="1600"/>
-              </a:lnSpc>
-              <a:spcAft>
-                <a:spcPts val="900"/>
-              </a:spcAft>
-              <a:buNone/>
-            </a:pPr>
-            <a:r>
-              <a:rPr lang="en-US" sz="1100" dirty="0">
-                <a:solidFill>
-                  <a:srgbClr val="3C4252"/>
-                </a:solidFill>
-              </a:rPr>
-              <a:t>狀態欄：🔴 R8 降壓選料　⚠️ Location 未知　🟠🟡🟢 對應 Excel 色底</a:t>
-            </a:r>
-            <a:endParaRPr lang="en-US" sz="1100" dirty="0"/>
-          </a:p>
-          <a:p>
-            <a:pPr indent="0" marL="0">
-              <a:lnSpc>
-                <a:spcPts val="1600"/>
-              </a:lnSpc>
-              <a:spcAft>
-                <a:spcPts val="900"/>
-              </a:spcAft>
-              <a:buNone/>
-            </a:pPr>
-            <a:r>
-              <a:rPr lang="en-US" sz="1200" b="1" dirty="0">
-                <a:solidFill>
-                  <a:srgbClr val="D92D20"/>
-                </a:solidFill>
-              </a:rPr>
-              <a:t>⑦ </a:t>
-            </a:r>
-            <a:pPr indent="0" marL="0">
-              <a:lnSpc>
-                <a:spcPts val="1600"/>
-              </a:lnSpc>
-              <a:spcAft>
-                <a:spcPts val="900"/>
-              </a:spcAft>
-              <a:buNone/>
-            </a:pPr>
-            <a:r>
-              <a:rPr lang="en-US" sz="1100" dirty="0">
-                <a:solidFill>
-                  <a:srgbClr val="3C4252"/>
-                </a:solidFill>
-              </a:rPr>
-              <a:t>側邊欄徽章：比對結果 / Knowledge / 未命中 的即時數字</a:t>
-            </a:r>
-            <a:endParaRPr lang="en-US" sz="1100" dirty="0"/>
-          </a:p>
-        </p:txBody>
-      </p:sp>
-      <p:sp>
-        <p:nvSpPr>
-          <p:cNvPr id="21" name="warn"/>
+        </p:txBody>
+      </p:sp>
+      <p:sp>
+        <p:nvSpPr>
+          <p:cNvPr id="17" name="warn"/>
           <p:cNvSpPr/>
           <p:nvPr/>
         </p:nvSpPr>
@@ -6470,7 +6240,7 @@
       </p:sp>
       <p:sp>
         <p:nvSpPr>
-          <p:cNvPr id="22" name="Shape 19"/>
+          <p:cNvPr id="18" name="Shape 15"/>
           <p:cNvSpPr/>
           <p:nvPr/>
         </p:nvSpPr>
@@ -6495,7 +6265,7 @@
       </p:sp>
       <p:sp>
         <p:nvSpPr>
-          <p:cNvPr id="23" name="Text 20"/>
+          <p:cNvPr id="19" name="Text 16"/>
           <p:cNvSpPr txBox="1"/>
           <p:nvPr/>
         </p:nvSpPr>
@@ -6531,7 +6301,7 @@
       </p:sp>
       <p:sp>
         <p:nvSpPr>
-          <p:cNvPr id="24" name="Text 21"/>
+          <p:cNvPr id="20" name="Text 17"/>
           <p:cNvSpPr txBox="1"/>
           <p:nvPr/>
         </p:nvSpPr>
@@ -6562,7 +6332,7 @@
                   <a:srgbClr val="6B4413"/>
                 </a:solidFill>
               </a:rPr>
-              <a:t>篩選後編輯一樣會寫回原本的位置 —— 表格依「原始列號」對應，</a:t>
+              <a:t>篩選後編輯一樣寫回原本的位置（依原始列號）。</a:t>
             </a:r>
             <a:endParaRPr lang="en-US" sz="1000" dirty="0"/>
           </a:p>
@@ -6579,7 +6349,7 @@
                   <a:srgbClr val="6B4413"/>
                 </a:solidFill>
               </a:rPr>
-              <a:t>不是依畫面上的順序。色底要切到「🎨 色底檢視」頁籤（Streamlit 限制）。</a:t>
+              <a:t>色底要切到「色底檢視」頁籤 —— Streamlit 的限制。</a:t>
             </a:r>
             <a:endParaRPr lang="en-US" sz="1000" dirty="0"/>
           </a:p>
@@ -10977,7 +10747,7 @@
         </p:nvSpPr>
         <p:spPr>
           <a:xfrm>
-            <a:off x="3730538" y="2167700"/>
+            <a:off x="1605272" y="3128320"/>
             <a:ext cx="169164" cy="169164"/>
           </a:xfrm>
           <a:prstGeom prst="ellipse">
@@ -11002,67 +10772,6 @@
         </p:nvSpPr>
         <p:spPr>
           <a:xfrm>
-            <a:off x="3645956" y="2083118"/>
-            <a:ext cx="338328" cy="338328"/>
-          </a:xfrm>
-          <a:prstGeom prst="rect">
-            <a:avLst/>
-          </a:prstGeom>
-          <a:noFill/>
-          <a:ln/>
-        </p:spPr>
-        <p:txBody>
-          <a:bodyPr wrap="square" lIns="0" tIns="0" rIns="0" bIns="0" rtlCol="0" anchor="ctr"/>
-          <a:lstStyle/>
-          <a:p>
-            <a:pPr algn="ctr" indent="0" marL="0">
-              <a:buNone/>
-            </a:pPr>
-            <a:r>
-              <a:rPr lang="en-US" sz="850" b="1" dirty="0">
-                <a:solidFill>
-                  <a:srgbClr val="FFFFFF"/>
-                </a:solidFill>
-              </a:rPr>
-              <a:t>5</a:t>
-            </a:r>
-            <a:endParaRPr lang="en-US" sz="850" dirty="0"/>
-          </a:p>
-        </p:txBody>
-      </p:sp>
-      <p:sp>
-        <p:nvSpPr>
-          <p:cNvPr id="16" name="Shape 13"/>
-          <p:cNvSpPr/>
-          <p:nvPr/>
-        </p:nvSpPr>
-        <p:spPr>
-          <a:xfrm>
-            <a:off x="1605272" y="3128320"/>
-            <a:ext cx="169164" cy="169164"/>
-          </a:xfrm>
-          <a:prstGeom prst="ellipse">
-            <a:avLst/>
-          </a:prstGeom>
-          <a:solidFill>
-            <a:srgbClr val="D92D20"/>
-          </a:solidFill>
-          <a:ln w="19050">
-            <a:solidFill>
-              <a:srgbClr val="FFFFFF"/>
-            </a:solidFill>
-            <a:prstDash val="solid"/>
-          </a:ln>
-        </p:spPr>
-      </p:sp>
-      <p:sp>
-        <p:nvSpPr>
-          <p:cNvPr id="17" name="Text 14"/>
-          <p:cNvSpPr txBox="1"/>
-          <p:nvPr/>
-        </p:nvSpPr>
-        <p:spPr>
-          <a:xfrm>
             <a:off x="1520690" y="3043738"/>
             <a:ext cx="338328" cy="338328"/>
           </a:xfrm>
@@ -11085,7 +10794,7 @@
                   <a:srgbClr val="FFFFFF"/>
                 </a:solidFill>
               </a:rPr>
-              <a:t>6</a:t>
+              <a:t>5</a:t>
             </a:r>
             <a:endParaRPr lang="en-US" sz="850" dirty="0"/>
           </a:p>
@@ -11093,7 +10802,7 @@
       </p:sp>
       <p:sp>
         <p:nvSpPr>
-          <p:cNvPr id="18" name="Text 15"/>
+          <p:cNvPr id="16" name="Text 13"/>
           <p:cNvSpPr txBox="1"/>
           <p:nvPr/>
         </p:nvSpPr>
@@ -11178,7 +10887,7 @@
                   <a:srgbClr val="3C4252"/>
                 </a:solidFill>
               </a:rPr>
-              <a:t>：全部 / 未命中 / NC / 替代料 / Knowledge / 需確認 / Location 未知，右邊還有搜尋框</a:t>
+              <a:t>與搜尋框，各自帶列數</a:t>
             </a:r>
             <a:endParaRPr lang="en-US" sz="1100" dirty="0"/>
           </a:p>
@@ -11241,7 +10950,7 @@
                   <a:srgbClr val="3C4252"/>
                 </a:solidFill>
               </a:rPr>
-              <a:t>：RC/EC 是下拉，其餘直接點進格子打字</a:t>
+              <a:t>：RC/EC 是下拉，其餘直接打字</a:t>
             </a:r>
             <a:endParaRPr lang="en-US" sz="1100" dirty="0"/>
           </a:p>
@@ -11278,7 +10987,7 @@
                   <a:srgbClr val="3C4252"/>
                 </a:solidFill>
               </a:rPr>
-              <a:t>未命中的列顯示「— 無命中 —」，直接在格子裡補料號</a:t>
+              <a:t>未命中的列顯示「— 無命中 —」，直接補料號</a:t>
             </a:r>
             <a:endParaRPr lang="en-US" sz="1100" dirty="0"/>
           </a:p>
@@ -11315,7 +11024,7 @@
                   <a:srgbClr val="3C4252"/>
                 </a:solidFill>
               </a:rPr>
-              <a:t>滑過 Description 會跳氣泡，顯示 </a:t>
+              <a:t>滑過 Description 或 Location 會跳</a:t>
             </a:r>
             <a:pPr indent="0" marL="0">
               <a:lnSpc>
@@ -11332,7 +11041,7 @@
                   <a:srgbClr val="3C4252"/>
                 </a:solidFill>
               </a:rPr>
-              <a:t>Footprint、原始 Part、比對狀態</a:t>
+              <a:t>氣泡</a:t>
             </a:r>
             <a:pPr indent="0" marL="0">
               <a:lnSpc>
@@ -11349,7 +11058,7 @@
                   <a:srgbClr val="3C4252"/>
                 </a:solidFill>
               </a:rPr>
-              <a:t>與完整描述</a:t>
+              <a:t>，顯示完整內容</a:t>
             </a:r>
             <a:endParaRPr lang="en-US" sz="1100" dirty="0"/>
           </a:p>
@@ -11386,11 +11095,8 @@
                   <a:srgbClr val="3C4252"/>
                 </a:solidFill>
               </a:rPr>
-              <a:t>Location 欄放不下時一樣跳氣泡，列出完整清單與個數</a:t>
-            </a:r>
-            <a:endParaRPr lang="en-US" sz="1100" dirty="0"/>
-          </a:p>
-          <a:p>
+              <a:t>下方「</a:t>
+            </a:r>
             <a:pPr indent="0" marL="0">
               <a:lnSpc>
                 <a:spcPts val="1600"/>
@@ -11401,12 +11107,12 @@
               <a:buNone/>
             </a:pPr>
             <a:r>
-              <a:rPr lang="en-US" sz="1200" b="1" dirty="0">
-                <a:solidFill>
-                  <a:srgbClr val="D92D20"/>
-                </a:solidFill>
-              </a:rPr>
-              <a:t>⑥ </a:t>
+              <a:rPr lang="en-US" sz="1100" b="1" dirty="0">
+                <a:solidFill>
+                  <a:srgbClr val="3C4252"/>
+                </a:solidFill>
+              </a:rPr>
+              <a:t>執行日誌</a:t>
             </a:r>
             <a:pPr indent="0" marL="0">
               <a:lnSpc>
@@ -11423,41 +11129,7 @@
                   <a:srgbClr val="3C4252"/>
                 </a:solidFill>
               </a:rPr>
-              <a:t>下方「</a:t>
-            </a:r>
-            <a:pPr indent="0" marL="0">
-              <a:lnSpc>
-                <a:spcPts val="1600"/>
-              </a:lnSpc>
-              <a:spcAft>
-                <a:spcPts val="900"/>
-              </a:spcAft>
-              <a:buNone/>
-            </a:pPr>
-            <a:r>
-              <a:rPr lang="en-US" sz="1100" b="1" dirty="0">
-                <a:solidFill>
-                  <a:srgbClr val="3C4252"/>
-                </a:solidFill>
-              </a:rPr>
-              <a:t>執行日誌</a:t>
-            </a:r>
-            <a:pPr indent="0" marL="0">
-              <a:lnSpc>
-                <a:spcPts val="1600"/>
-              </a:lnSpc>
-              <a:spcAft>
-                <a:spcPts val="900"/>
-              </a:spcAft>
-              <a:buNone/>
-            </a:pPr>
-            <a:r>
-              <a:rPr lang="en-US" sz="1100" dirty="0">
-                <a:solidFill>
-                  <a:srgbClr val="3C4252"/>
-                </a:solidFill>
-              </a:rPr>
-              <a:t>」整列寬，可收合；[請人工確認] / [警告] / [提示] 是紅字</a:t>
+              <a:t>」整列寬、可收合</a:t>
             </a:r>
             <a:endParaRPr lang="en-US" sz="1100" dirty="0"/>
           </a:p>
@@ -11465,7 +11137,7 @@
       </p:sp>
       <p:sp>
         <p:nvSpPr>
-          <p:cNvPr id="19" name="warn"/>
+          <p:cNvPr id="17" name="warn"/>
           <p:cNvSpPr/>
           <p:nvPr/>
         </p:nvSpPr>
@@ -11492,7 +11164,7 @@
       </p:sp>
       <p:sp>
         <p:nvSpPr>
-          <p:cNvPr id="20" name="Shape 17"/>
+          <p:cNvPr id="18" name="Shape 15"/>
           <p:cNvSpPr/>
           <p:nvPr/>
         </p:nvSpPr>
@@ -11517,7 +11189,7 @@
       </p:sp>
       <p:sp>
         <p:nvSpPr>
-          <p:cNvPr id="21" name="Text 18"/>
+          <p:cNvPr id="19" name="Text 16"/>
           <p:cNvSpPr txBox="1"/>
           <p:nvPr/>
         </p:nvSpPr>
@@ -11553,7 +11225,7 @@
       </p:sp>
       <p:sp>
         <p:nvSpPr>
-          <p:cNvPr id="22" name="Text 19"/>
+          <p:cNvPr id="20" name="Text 17"/>
           <p:cNvSpPr txBox="1"/>
           <p:nvPr/>
         </p:nvSpPr>
@@ -11584,7 +11256,7 @@
                   <a:srgbClr val="6B4413"/>
                 </a:solidFill>
               </a:rPr>
-              <a:t>改了 Qty，右上角的 Total Qty 會立刻跟著變，</a:t>
+              <a:t>氣泡裡還有 Footprint、原始 Part 與比對狀態 ——</a:t>
             </a:r>
             <a:endParaRPr lang="en-US" sz="1000" dirty="0"/>
           </a:p>
@@ -11601,7 +11273,7 @@
                   <a:srgbClr val="6B4413"/>
                 </a:solidFill>
               </a:rPr>
-              <a:t>可以用來確認改對了。</a:t>
+              <a:t>這三項是表格上唯一看不到的資訊。</a:t>
             </a:r>
             <a:endParaRPr lang="en-US" sz="1000" dirty="0"/>
           </a:p>
